--- a/lecons/USA/Practical Geography/15_USA_PRA_QT04_Plotting_and_Interpreting_Graphical_Tools.pptx
+++ b/lecons/USA/Practical Geography/15_USA_PRA_QT04_Plotting_and_Interpreting_Graphical_Tools.pptx
@@ -76,9 +76,11 @@
     <p:sldId id="324" r:id="rId70"/>
     <p:sldId id="325" r:id="rId71"/>
     <p:sldId id="326" r:id="rId72"/>
+    <p:sldId id="327" r:id="rId73"/>
+    <p:sldId id="328" r:id="rId74"/>
   </p:sldIdLst>
   <p:notesMasterIdLst>
-    <p:notesMasterId r:id="rId73"/>
+    <p:notesMasterId r:id="rId75"/>
   </p:notesMasterIdLst>
   <p:sldSz cx="12192000" cy="6858000"/>
   <p:notesSz cx="6858000" cy="12192000"/>
@@ -3300,7 +3302,7 @@
           <a:p>
             <a:r>
               <a:rPr lang="en-US" dirty="0"/>
-              <a:t>Let us copy Bar Graphs. Bar graphs are drawn and used as follows. Copy the point on Types on the left, then draw the diagram on the right: a vertical bar graph. Give it a title and label it clearly.</a:t>
+              <a:t>Let us copy Bar Graphs. Bar graphs are constructed and interpreted as follows. Copy the point on Types on the left, then draw the diagram on the right: a vertical bar graph. Give it a title and label it clearly.</a:t>
             </a:r>
             <a:endParaRPr lang="en-US" dirty="0"/>
           </a:p>
@@ -3388,7 +3390,7 @@
           <a:p>
             <a:r>
               <a:rPr lang="en-US" dirty="0"/>
-              <a:t>We continue with Bar Graphs. On this slide we have Steps. Write each point on a new line, with the key term first, and explain it in your own words when we revise. When you finish, we go to the next slide.</a:t>
+              <a:t>We continue with Bar Graphs. Copy the point on Construction: write the key term first, then its explanation.</a:t>
             </a:r>
             <a:endParaRPr lang="en-US" dirty="0"/>
           </a:p>
@@ -3564,7 +3566,7 @@
           <a:p>
             <a:r>
               <a:rPr lang="en-US" dirty="0"/>
-              <a:t>We continue with Bar Graphs. Copy this carefully.</a:t>
+              <a:t>Copy the point on Interpretation on the left, then draw the diagram on the right: a horizontal bar graph. Give it a title and label it clearly.</a:t>
             </a:r>
             <a:endParaRPr lang="en-US" dirty="0"/>
           </a:p>
@@ -3652,7 +3654,7 @@
           <a:p>
             <a:r>
               <a:rPr lang="en-US" dirty="0"/>
-              <a:t>Copy the point on Interpretation on the left, then draw the diagram on the right: a horizontal bar graph. Give it a title and label it clearly.</a:t>
+              <a:t>We continue with Bar Graphs. Copy the point on Assessment: write the key term first, then its explanation.</a:t>
             </a:r>
             <a:endParaRPr lang="en-US" dirty="0"/>
           </a:p>
@@ -3740,7 +3742,7 @@
           <a:p>
             <a:r>
               <a:rPr lang="en-US" dirty="0"/>
-              <a:t>We continue with Bar Graphs. On this slide we have Assessment. Write each point on a new line, with the key term first, and explain it in your own words when we revise.</a:t>
+              <a:t>Let us copy Linear Graphs. Line graphs are constructed and interpreted as follows. Copy the point on Types: write the key term first, then its explanation.</a:t>
             </a:r>
             <a:endParaRPr lang="en-US" dirty="0"/>
           </a:p>
@@ -3828,7 +3830,7 @@
           <a:p>
             <a:r>
               <a:rPr lang="en-US" dirty="0"/>
-              <a:t>Let us copy Line Graphs. Line graphs are drawn and used as follows. On this slide we have Types. Write each point on a new line, with the key term first, and explain it in your own words when we revise.</a:t>
+              <a:t>Copy the point on Construction on the left, then draw the diagram on the right: a line graph. Give it a title and label it clearly.</a:t>
             </a:r>
             <a:endParaRPr lang="en-US" dirty="0"/>
           </a:p>
@@ -3916,7 +3918,7 @@
           <a:p>
             <a:r>
               <a:rPr lang="en-US" dirty="0"/>
-              <a:t>Copy the point on Steps on the left, then draw the diagram on the right: a simple line graph. Give it a title and label it clearly.</a:t>
+              <a:t>We continue with Linear Graphs. Copy the point on Example: write the key term first, then its explanation.</a:t>
             </a:r>
             <a:endParaRPr lang="en-US" dirty="0"/>
           </a:p>
@@ -4004,7 +4006,7 @@
           <a:p>
             <a:r>
               <a:rPr lang="en-US" dirty="0"/>
-              <a:t>We continue with Line Graphs. On this slide we have Example and Assessment. Write each point on a new line, with the key term first, and explain it in your own words when we revise. When you finish, we go to the next slide.</a:t>
+              <a:t>We continue with Linear Graphs. Copy the point on Assessment: write the key term first, then its explanation.</a:t>
             </a:r>
             <a:endParaRPr lang="en-US" dirty="0"/>
           </a:p>
@@ -4092,7 +4094,7 @@
           <a:p>
             <a:r>
               <a:rPr lang="en-US" dirty="0"/>
-              <a:t>We continue with Line Graphs. Copy this carefully.</a:t>
+              <a:t>Let us copy Cumulative Frequency Curves (Ogives). Ogives are constructed and interpreted as follows. Copy the point on Construction on the left, then draw the diagram on the right: an ogive. Give it a title and label it clearly.</a:t>
             </a:r>
             <a:endParaRPr lang="en-US" dirty="0"/>
           </a:p>
@@ -4180,7 +4182,7 @@
           <a:p>
             <a:r>
               <a:rPr lang="en-US" dirty="0"/>
-              <a:t>Let us copy Ogives and Climographs. Ogives and climographs are drawn and used as follows. Copy the point on Ogive steps on the left, then draw the diagram on the right: an ogive. Give it a title and label it clearly.</a:t>
+              <a:t>We continue with Cumulative Frequency Curves (Ogives). Copy the point on Example: write the key term first, then its explanation.</a:t>
             </a:r>
             <a:endParaRPr lang="en-US" dirty="0"/>
           </a:p>
@@ -4268,7 +4270,7 @@
           <a:p>
             <a:r>
               <a:rPr lang="en-US" dirty="0"/>
-              <a:t>We continue with Ogives and Climographs. On this slide we have Ogive example. Write each point on a new line, with the key term first, and explain it in your own words when we revise.</a:t>
+              <a:t>We continue with Cumulative Frequency Curves (Ogives). Copy the point on Assessment: write the key term first, then its explanation.</a:t>
             </a:r>
             <a:endParaRPr lang="en-US" dirty="0"/>
           </a:p>
@@ -4356,7 +4358,7 @@
           <a:p>
             <a:r>
               <a:rPr lang="en-US" dirty="0"/>
-              <a:t>Copy the point on Climograph steps on the left, then draw the diagram on the right: the climograph of Garoua. Give it a title and label it clearly.</a:t>
+              <a:t>Let us copy Climographs. Climographs are constructed and interpreted as follows. Copy the point on Construction on the left, then draw the diagram on the right: the climograph of Garoua. Give it a title and label it clearly.</a:t>
             </a:r>
             <a:endParaRPr lang="en-US" dirty="0"/>
           </a:p>
@@ -4532,7 +4534,7 @@
           <a:p>
             <a:r>
               <a:rPr lang="en-US" dirty="0"/>
-              <a:t>We continue with Ogives and Climographs. On this slide we have Climograph of Garoua. Write each point on a new line, with the key term first, and explain it in your own words when we revise. When you finish, we go to the next slide.</a:t>
+              <a:t>We continue with Climographs. Copy the point on Example of Garoua: write the key term first, then its explanation.</a:t>
             </a:r>
             <a:endParaRPr lang="en-US" dirty="0"/>
           </a:p>
@@ -4620,7 +4622,7 @@
           <a:p>
             <a:r>
               <a:rPr lang="en-US" dirty="0"/>
-              <a:t>We continue with Ogives and Climographs. On this slide we have Assessment. Write each point on a new line, with the key term first, and explain it in your own words when we revise.</a:t>
+              <a:t>We continue with Climographs. Copy the point on Assessment: write the key term first, then its explanation.</a:t>
             </a:r>
             <a:endParaRPr lang="en-US" dirty="0"/>
           </a:p>
@@ -4708,7 +4710,7 @@
           <a:p>
             <a:r>
               <a:rPr lang="en-US" dirty="0"/>
-              <a:t>Let us copy Pie Charts and Triangular Graphs. Pie charts and triangular graphs are drawn and used as follows. Copy the point on Pie chart steps on the left, then draw the diagram on the right: a pie chart. Give it a title and label it clearly.</a:t>
+              <a:t>Let us copy Pie Charts. Pie charts are constructed and interpreted as follows. Copy the point on Construction on the left, then draw the diagram on the right: a pie chart. Give it a title and label it clearly.</a:t>
             </a:r>
             <a:endParaRPr lang="en-US" dirty="0"/>
           </a:p>
@@ -4796,7 +4798,7 @@
           <a:p>
             <a:r>
               <a:rPr lang="en-US" dirty="0"/>
-              <a:t>We continue with Pie Charts and Triangular Graphs. On this slide we have Pie chart example. Write each point on a new line, with the key term first, and explain it in your own words when we revise.</a:t>
+              <a:t>We continue with Pie Charts. Copy the point on Example: write the key term first, then its explanation.</a:t>
             </a:r>
             <a:endParaRPr lang="en-US" dirty="0"/>
           </a:p>
@@ -4884,7 +4886,7 @@
           <a:p>
             <a:r>
               <a:rPr lang="en-US" dirty="0"/>
-              <a:t>Copy the point on Triangular graph on the left, then draw the diagram on the right: a triangular graph. Give it a title and label it clearly.</a:t>
+              <a:t>We continue with Pie Charts. Copy the point on Assessment: write the key term first, then its explanation.</a:t>
             </a:r>
             <a:endParaRPr lang="en-US" dirty="0"/>
           </a:p>
@@ -4972,7 +4974,7 @@
           <a:p>
             <a:r>
               <a:rPr lang="en-US" dirty="0"/>
-              <a:t>We continue with Pie Charts and Triangular Graphs. On this slide we have Assessment. Write each point on a new line, with the key term first, and explain it in your own words when we revise.</a:t>
+              <a:t>Let us copy Triangular Graphs. Triangular graphs are constructed and interpreted as follows. Copy the point on Construction on the left, then draw the diagram on the right: a triangular graph. Give it a title and label it clearly.</a:t>
             </a:r>
             <a:endParaRPr lang="en-US" dirty="0"/>
           </a:p>
@@ -5060,7 +5062,7 @@
           <a:p>
             <a:r>
               <a:rPr lang="en-US" dirty="0"/>
-              <a:t>Let us copy Scatter Graphs. Scatter graphs are drawn and used as follows. Copy the point on Steps on the left, then draw the diagram on the right: a positive correlation. Give it a title and label it clearly.</a:t>
+              <a:t>We continue with Triangular Graphs. Copy the point on Example: write the key term first, then its explanation.</a:t>
             </a:r>
             <a:endParaRPr lang="en-US" dirty="0"/>
           </a:p>
@@ -5148,7 +5150,7 @@
           <a:p>
             <a:r>
               <a:rPr lang="en-US" dirty="0"/>
-              <a:t>We continue with Scatter Graphs. On this slide we have Example 1. Write each point on a new line, with the key term first, and explain it in your own words when we revise.</a:t>
+              <a:t>We continue with Triangular Graphs. Copy the point on Assessment: write the key term first, then its explanation.</a:t>
             </a:r>
             <a:endParaRPr lang="en-US" dirty="0"/>
           </a:p>
@@ -5236,7 +5238,7 @@
           <a:p>
             <a:r>
               <a:rPr lang="en-US" dirty="0"/>
-              <a:t>Copy the point on Example 2 on the left, then draw the diagram on the right: altitude and temperature. Give it a title and label it clearly.</a:t>
+              <a:t>Let us copy Scatter Graphs. Scatter graphs are constructed and interpreted as follows. Copy the point on Construction on the left, then draw the diagram on the right: a scatter graph. Give it a title and label it clearly.</a:t>
             </a:r>
             <a:endParaRPr lang="en-US" dirty="0"/>
           </a:p>
@@ -5324,7 +5326,7 @@
           <a:p>
             <a:r>
               <a:rPr lang="en-US" dirty="0"/>
-              <a:t>We continue with Scatter Graphs. On this slide we have Assessment. Write each point on a new line, with the key term first, and explain it in your own words when we revise.</a:t>
+              <a:t>We continue with Scatter Graphs. Copy the point on Example 1: write the key term first, then its explanation.</a:t>
             </a:r>
             <a:endParaRPr lang="en-US" dirty="0"/>
           </a:p>
@@ -5500,7 +5502,7 @@
           <a:p>
             <a:r>
               <a:rPr lang="en-US" dirty="0"/>
-              <a:t>Now let us check what you have understood. Question 1: Which graph would you choose for the percentages of workers in three sectors, and why? Answer in your exercise book.</a:t>
+              <a:t>Copy the point on Example 2 on the left, then draw the diagram on the right: altitude and temperature. Give it a title and label it clearly.</a:t>
             </a:r>
             <a:endParaRPr lang="en-US" dirty="0"/>
           </a:p>
@@ -5588,7 +5590,7 @@
           <a:p>
             <a:r>
               <a:rPr lang="en-US" dirty="0"/>
-              <a:t>The expected answer is: a pie chart (or a triangular graph for several countries), because the parts make a whole of 100 %. If you got it right, well done.</a:t>
+              <a:t>We continue with Scatter Graphs. Copy the point on Assessment: write the key term first, then its explanation.</a:t>
             </a:r>
             <a:endParaRPr lang="en-US" dirty="0"/>
           </a:p>
@@ -5676,7 +5678,7 @@
           <a:p>
             <a:r>
               <a:rPr lang="en-US" dirty="0"/>
-              <a:t>Now let us check what you have understood. Question 2: Give one advantage and one disadvantage of a climograph. Answer in your exercise book.</a:t>
+              <a:t>Now let us check what you have understood. Question 1: Which graph would you choose for the percentages of workers in three sectors, and why? Answer in your exercise book.</a:t>
             </a:r>
             <a:endParaRPr lang="en-US" dirty="0"/>
           </a:p>
@@ -5764,7 +5766,7 @@
           <a:p>
             <a:r>
               <a:rPr lang="en-US" dirty="0"/>
-              <a:t>The expected answer is: advantage: shows rainfall and temperature together; disadvantage: two vertical axes may confuse readers. If you got it right, well done.</a:t>
+              <a:t>The expected answer is: a pie chart (or a triangular graph for several countries), because the parts make a whole of 100 %. If you got it right, well done.</a:t>
             </a:r>
             <a:endParaRPr lang="en-US" dirty="0"/>
           </a:p>
@@ -5852,7 +5854,7 @@
           <a:p>
             <a:r>
               <a:rPr lang="en-US" dirty="0"/>
-              <a:t>For those who need more practice, fill in the blanks in your exercise book. The answers are: number 1, ; number 3, 6; number 2, upper; number 3, bars.</a:t>
+              <a:t>Now let us check what you have understood. Question 2: Give one advantage and one disadvantage of a climograph. Answer in your exercise book.</a:t>
             </a:r>
             <a:endParaRPr lang="en-US" dirty="0"/>
           </a:p>
@@ -5940,7 +5942,7 @@
           <a:p>
             <a:r>
               <a:rPr lang="en-US" dirty="0"/>
-              <a:t>For your homework: Name the instrument that gives geographical coordinates by satellite. We shall correct it at the beginning of our next lesson.</a:t>
+              <a:t>The expected answer is: advantage: shows rainfall and temperature together; disadvantage: two vertical axes may confuse readers. If you got it right, well done.</a:t>
             </a:r>
             <a:endParaRPr lang="en-US" dirty="0"/>
           </a:p>
@@ -6028,7 +6030,7 @@
           <a:p>
             <a:r>
               <a:rPr lang="en-US" dirty="0"/>
-              <a:t>Our next lesson will be on Field Work 1: Getting Geographical Coordinates. Thank you for your attention, and see you next time.</a:t>
+              <a:t>For those who need more practice, fill in the blanks in your exercise book. The answers are: number 1, ; number 3, 6; number 2, upper; number 3, bars.</a:t>
             </a:r>
             <a:endParaRPr lang="en-US" dirty="0"/>
           </a:p>
@@ -6116,7 +6118,7 @@
           <a:p>
             <a:r>
               <a:rPr lang="en-US" dirty="0"/>
-              <a:t>Let us play the bilingual game. I say a word in English, and you give me the French word. Then we do the reverse.</a:t>
+              <a:t>For your homework: Name the instrument that gives geographical coordinates by satellite. We shall correct it at the beginning of our next lesson.</a:t>
             </a:r>
             <a:endParaRPr lang="en-US" dirty="0"/>
           </a:p>
@@ -6204,7 +6206,7 @@
           <a:p>
             <a:r>
               <a:rPr lang="en-US" dirty="0"/>
-              <a:t>I record this information in the official logbook of the class after the lesson.</a:t>
+              <a:t>Our next lesson will be on Field Work 1: Getting Geographical Coordinates. Thank you for your attention, and see you next time.</a:t>
             </a:r>
             <a:endParaRPr lang="en-US" dirty="0"/>
           </a:p>
@@ -6292,7 +6294,7 @@
           <a:p>
             <a:r>
               <a:rPr lang="en-US" dirty="0"/>
-              <a:t>I complete the second page of the logbook: the matter taught, the evaluation, the homework and the attendance.</a:t>
+              <a:t>Let us play the bilingual game. I say a word in English, and you give me the French word. Then we do the reverse.</a:t>
             </a:r>
             <a:endParaRPr lang="en-US" dirty="0"/>
           </a:p>
@@ -6468,7 +6470,7 @@
           <a:p>
             <a:r>
               <a:rPr lang="en-US" dirty="0"/>
-              <a:t>This slide is for me, the teacher: it gives the timing of the lesson and what to do if the projector is not available.</a:t>
+              <a:t>I record this information in the official logbook of the class after the lesson.</a:t>
             </a:r>
             <a:endParaRPr lang="en-US" dirty="0"/>
           </a:p>
@@ -6556,7 +6558,7 @@
           <a:p>
             <a:r>
               <a:rPr lang="en-US" dirty="0"/>
-              <a:t>These are the references and picture credits used to prepare this lesson.</a:t>
+              <a:t>I complete the second page of the logbook: the matter taught, the evaluation, the homework and the attendance.</a:t>
             </a:r>
             <a:endParaRPr lang="en-US" dirty="0"/>
           </a:p>
@@ -6580,6 +6582,182 @@
             <a:fld id="{F7021451-1387-4CA6-816F-3879F97B5CBC}" type="slidenum">
               <a:rPr lang="en-US"/>
               <a:t>71</a:t>
+            </a:fld>
+            <a:endParaRPr lang="en-US"/>
+          </a:p>
+        </p:txBody>
+      </p:sp>
+    </p:spTree>
+    <p:extLst>
+      <p:ext uri="{BB962C8B-B14F-4D97-AF65-F5344CB8AC3E}">
+        <p14:creationId xmlns:p14="http://schemas.microsoft.com/office/powerpoint/2010/main" val="1024086991"/>
+      </p:ext>
+    </p:extLst>
+  </p:cSld>
+  <p:clrMapOvr>
+    <a:masterClrMapping/>
+  </p:clrMapOvr>
+</p:notes>
+</file>
+
+<file path=ppt/notesSlides/notesSlide72.xml><?xml version="1.0" encoding="utf-8"?>
+<p:notes xmlns:a="http://schemas.openxmlformats.org/drawingml/2006/main" xmlns:r="http://schemas.openxmlformats.org/officeDocument/2006/relationships" xmlns:p="http://schemas.openxmlformats.org/presentationml/2006/main">
+  <p:cSld>
+    <p:spTree>
+      <p:nvGrpSpPr>
+        <p:cNvPr id="1" name=""/>
+        <p:cNvGrpSpPr/>
+        <p:nvPr/>
+      </p:nvGrpSpPr>
+      <p:grpSpPr>
+        <a:xfrm>
+          <a:off x="0" y="0"/>
+          <a:ext cx="0" cy="0"/>
+          <a:chOff x="0" y="0"/>
+          <a:chExt cx="0" cy="0"/>
+        </a:xfrm>
+      </p:grpSpPr>
+      <p:sp>
+        <p:nvSpPr>
+          <p:cNvPr id="2" name="Slide Image Placeholder 1"/>
+          <p:cNvSpPr>
+            <a:spLocks noGrp="1" noRot="1" noChangeAspect="1"/>
+          </p:cNvSpPr>
+          <p:nvPr>
+            <p:ph type="sldImg"/>
+          </p:nvPr>
+        </p:nvSpPr>
+        <p:spPr/>
+      </p:sp>
+      <p:sp>
+        <p:nvSpPr>
+          <p:cNvPr id="3" name="Notes Placeholder 2"/>
+          <p:cNvSpPr>
+            <a:spLocks noGrp="1"/>
+          </p:cNvSpPr>
+          <p:nvPr>
+            <p:ph type="body" idx="1"/>
+          </p:nvPr>
+        </p:nvSpPr>
+        <p:spPr/>
+        <p:txBody>
+          <a:bodyPr/>
+          <a:lstStyle/>
+          <a:p>
+            <a:r>
+              <a:rPr lang="en-US" dirty="0"/>
+              <a:t>This slide is for me, the teacher: it gives the timing of the lesson and what to do if the projector is not available.</a:t>
+            </a:r>
+            <a:endParaRPr lang="en-US" dirty="0"/>
+          </a:p>
+        </p:txBody>
+      </p:sp>
+      <p:sp>
+        <p:nvSpPr>
+          <p:cNvPr id="4" name="Slide Number Placeholder 3"/>
+          <p:cNvSpPr>
+            <a:spLocks noGrp="1"/>
+          </p:cNvSpPr>
+          <p:nvPr>
+            <p:ph type="sldNum" sz="quarter" idx="10"/>
+          </p:nvPr>
+        </p:nvSpPr>
+        <p:spPr/>
+        <p:txBody>
+          <a:bodyPr/>
+          <a:lstStyle/>
+          <a:p>
+            <a:fld id="{F7021451-1387-4CA6-816F-3879F97B5CBC}" type="slidenum">
+              <a:rPr lang="en-US"/>
+              <a:t>72</a:t>
+            </a:fld>
+            <a:endParaRPr lang="en-US"/>
+          </a:p>
+        </p:txBody>
+      </p:sp>
+    </p:spTree>
+    <p:extLst>
+      <p:ext uri="{BB962C8B-B14F-4D97-AF65-F5344CB8AC3E}">
+        <p14:creationId xmlns:p14="http://schemas.microsoft.com/office/powerpoint/2010/main" val="1024086991"/>
+      </p:ext>
+    </p:extLst>
+  </p:cSld>
+  <p:clrMapOvr>
+    <a:masterClrMapping/>
+  </p:clrMapOvr>
+</p:notes>
+</file>
+
+<file path=ppt/notesSlides/notesSlide73.xml><?xml version="1.0" encoding="utf-8"?>
+<p:notes xmlns:a="http://schemas.openxmlformats.org/drawingml/2006/main" xmlns:r="http://schemas.openxmlformats.org/officeDocument/2006/relationships" xmlns:p="http://schemas.openxmlformats.org/presentationml/2006/main">
+  <p:cSld>
+    <p:spTree>
+      <p:nvGrpSpPr>
+        <p:cNvPr id="1" name=""/>
+        <p:cNvGrpSpPr/>
+        <p:nvPr/>
+      </p:nvGrpSpPr>
+      <p:grpSpPr>
+        <a:xfrm>
+          <a:off x="0" y="0"/>
+          <a:ext cx="0" cy="0"/>
+          <a:chOff x="0" y="0"/>
+          <a:chExt cx="0" cy="0"/>
+        </a:xfrm>
+      </p:grpSpPr>
+      <p:sp>
+        <p:nvSpPr>
+          <p:cNvPr id="2" name="Slide Image Placeholder 1"/>
+          <p:cNvSpPr>
+            <a:spLocks noGrp="1" noRot="1" noChangeAspect="1"/>
+          </p:cNvSpPr>
+          <p:nvPr>
+            <p:ph type="sldImg"/>
+          </p:nvPr>
+        </p:nvSpPr>
+        <p:spPr/>
+      </p:sp>
+      <p:sp>
+        <p:nvSpPr>
+          <p:cNvPr id="3" name="Notes Placeholder 2"/>
+          <p:cNvSpPr>
+            <a:spLocks noGrp="1"/>
+          </p:cNvSpPr>
+          <p:nvPr>
+            <p:ph type="body" idx="1"/>
+          </p:nvPr>
+        </p:nvSpPr>
+        <p:spPr/>
+        <p:txBody>
+          <a:bodyPr/>
+          <a:lstStyle/>
+          <a:p>
+            <a:r>
+              <a:rPr lang="en-US" dirty="0"/>
+              <a:t>These are the references and picture credits used to prepare this lesson.</a:t>
+            </a:r>
+            <a:endParaRPr lang="en-US" dirty="0"/>
+          </a:p>
+        </p:txBody>
+      </p:sp>
+      <p:sp>
+        <p:nvSpPr>
+          <p:cNvPr id="4" name="Slide Number Placeholder 3"/>
+          <p:cNvSpPr>
+            <a:spLocks noGrp="1"/>
+          </p:cNvSpPr>
+          <p:nvPr>
+            <p:ph type="sldNum" sz="quarter" idx="10"/>
+          </p:nvPr>
+        </p:nvSpPr>
+        <p:spPr/>
+        <p:txBody>
+          <a:bodyPr/>
+          <a:lstStyle/>
+          <a:p>
+            <a:fld id="{F7021451-1387-4CA6-816F-3879F97B5CBC}" type="slidenum">
+              <a:rPr lang="en-US"/>
+              <a:t>73</a:t>
             </a:fld>
             <a:endParaRPr lang="en-US"/>
           </a:p>
@@ -16081,7 +16259,7 @@
         <p:spPr>
           <a:xfrm>
             <a:off x="365760" y="1783080"/>
-            <a:ext cx="4846320" cy="4617720"/>
+            <a:ext cx="6035040" cy="4617720"/>
           </a:xfrm>
           <a:prstGeom prst="rect">
             <a:avLst/>
@@ -16108,7 +16286,7 @@
                 <a:ea typeface="Times New Roman" pitchFamily="34" charset="-122"/>
                 <a:cs typeface="Times New Roman" pitchFamily="34" charset="-120"/>
               </a:rPr>
-              <a:t>Bar graphs are drawn and used as follows:</a:t>
+              <a:t>Bar graphs are constructed and interpreted as follows:</a:t>
             </a:r>
             <a:endParaRPr lang="en-US" sz="3600" dirty="0"/>
           </a:p>
@@ -16145,7 +16323,7 @@
                 <a:ea typeface="Times New Roman" pitchFamily="34" charset="-122"/>
                 <a:cs typeface="Times New Roman" pitchFamily="34" charset="-120"/>
               </a:rPr>
-              <a:t>Vertical bars suit short category names; horizontal bars suit long names.</a:t>
+              <a:t>Vertical bar graphs suit short category names, while horizontal bar graphs suit long names. Both compare separate categories.</a:t>
             </a:r>
             <a:endParaRPr lang="en-US" sz="3600" dirty="0"/>
           </a:p>
@@ -16167,8 +16345,8 @@
         </p:blipFill>
         <p:spPr>
           <a:xfrm>
-            <a:off x="5349240" y="2461422"/>
-            <a:ext cx="6659575" cy="2913564"/>
+            <a:off x="6537960" y="2721454"/>
+            <a:ext cx="5470855" cy="2393499"/>
           </a:xfrm>
           <a:prstGeom prst="rect">
             <a:avLst/>
@@ -16183,8 +16361,8 @@
         </p:nvSpPr>
         <p:spPr>
           <a:xfrm>
-            <a:off x="5349240" y="6089904"/>
-            <a:ext cx="6659575" cy="347472"/>
+            <a:off x="6537960" y="6089904"/>
+            <a:ext cx="5470855" cy="347472"/>
           </a:xfrm>
           <a:prstGeom prst="rect">
             <a:avLst/>
@@ -16343,7 +16521,7 @@
         <p:spPr>
           <a:xfrm>
             <a:off x="0" y="658368"/>
-            <a:ext cx="2468880" cy="5833872"/>
+            <a:ext cx="3840480" cy="5833872"/>
           </a:xfrm>
           <a:prstGeom prst="rect">
             <a:avLst/>
@@ -16358,8 +16536,8 @@
         </p:nvSpPr>
         <p:spPr>
           <a:xfrm>
-            <a:off x="2697480" y="1005840"/>
-            <a:ext cx="9174175" cy="731520"/>
+            <a:off x="4069080" y="1005840"/>
+            <a:ext cx="7802575" cy="731520"/>
           </a:xfrm>
           <a:prstGeom prst="rect">
             <a:avLst/>
@@ -16399,8 +16577,8 @@
         </p:nvSpPr>
         <p:spPr>
           <a:xfrm>
-            <a:off x="2697480" y="1783080"/>
-            <a:ext cx="9174175" cy="4663440"/>
+            <a:off x="4069080" y="1783080"/>
+            <a:ext cx="7802575" cy="4663440"/>
           </a:xfrm>
           <a:prstGeom prst="rect">
             <a:avLst/>
@@ -16427,17 +16605,13 @@
                 <a:ea typeface="Times New Roman" pitchFamily="34" charset="-122"/>
                 <a:cs typeface="Times New Roman" pitchFamily="34" charset="-120"/>
               </a:rPr>
-              <a:t>Steps:</a:t>
-            </a:r>
-            <a:endParaRPr lang="en-US" sz="4000" dirty="0"/>
-          </a:p>
-          <a:p>
-            <a:pPr algn="l" marL="342900" indent="-342900">
+              <a:t>Construction: </a:t>
+            </a:r>
+            <a:pPr algn="l" indent="0" marL="0">
               <a:spcAft>
                 <a:spcPts val="800"/>
               </a:spcAft>
-              <a:buSzPct val="100000"/>
-              <a:buChar char="•"/>
+              <a:buNone/>
             </a:pPr>
             <a:r>
               <a:rPr lang="en-US" sz="4000" dirty="0">
@@ -16448,70 +16622,7 @@
                 <a:ea typeface="Times New Roman" pitchFamily="34" charset="-122"/>
                 <a:cs typeface="Times New Roman" pitchFamily="34" charset="-120"/>
               </a:rPr>
-              <a:t>Choose the data and the type.</a:t>
-            </a:r>
-            <a:endParaRPr lang="en-US" sz="4000" dirty="0"/>
-          </a:p>
-          <a:p>
-            <a:pPr algn="l" marL="342900" indent="-342900">
-              <a:spcAft>
-                <a:spcPts val="800"/>
-              </a:spcAft>
-              <a:buSzPct val="100000"/>
-              <a:buChar char="•"/>
-            </a:pPr>
-            <a:r>
-              <a:rPr lang="en-US" sz="4000" dirty="0">
-                <a:solidFill>
-                  <a:srgbClr val="111111"/>
-                </a:solidFill>
-                <a:latin typeface="Times New Roman" pitchFamily="34" charset="0"/>
-                <a:ea typeface="Times New Roman" pitchFamily="34" charset="-122"/>
-                <a:cs typeface="Times New Roman" pitchFamily="34" charset="-120"/>
-              </a:rPr>
-              <a:t>Draw the axes: categories and values.</a:t>
-            </a:r>
-            <a:endParaRPr lang="en-US" sz="4000" dirty="0"/>
-          </a:p>
-          <a:p>
-            <a:pPr algn="l" marL="342900" indent="-342900">
-              <a:spcAft>
-                <a:spcPts val="800"/>
-              </a:spcAft>
-              <a:buSzPct val="100000"/>
-              <a:buChar char="•"/>
-            </a:pPr>
-            <a:r>
-              <a:rPr lang="en-US" sz="4000" dirty="0">
-                <a:solidFill>
-                  <a:srgbClr val="111111"/>
-                </a:solidFill>
-                <a:latin typeface="Times New Roman" pitchFamily="34" charset="0"/>
-                <a:ea typeface="Times New Roman" pitchFamily="34" charset="-122"/>
-                <a:cs typeface="Times New Roman" pitchFamily="34" charset="-120"/>
-              </a:rPr>
-              <a:t>Choose an even scale.</a:t>
-            </a:r>
-            <a:endParaRPr lang="en-US" sz="4000" dirty="0"/>
-          </a:p>
-          <a:p>
-            <a:pPr algn="l" marL="342900" indent="-342900">
-              <a:spcAft>
-                <a:spcPts val="800"/>
-              </a:spcAft>
-              <a:buSzPct val="100000"/>
-              <a:buChar char="•"/>
-            </a:pPr>
-            <a:r>
-              <a:rPr lang="en-US" sz="4000" dirty="0">
-                <a:solidFill>
-                  <a:srgbClr val="111111"/>
-                </a:solidFill>
-                <a:latin typeface="Times New Roman" pitchFamily="34" charset="0"/>
-                <a:ea typeface="Times New Roman" pitchFamily="34" charset="-122"/>
-                <a:cs typeface="Times New Roman" pitchFamily="34" charset="-120"/>
-              </a:rPr>
-              <a:t>Draw bars of equal width and spacing with a ruler.</a:t>
+              <a:t>Draw the axes, one for the categories and one for the values, and choose an even scale. Draw bars of equal width and spacing with a ruler, then add a title, axis labels with units and a key.</a:t>
             </a:r>
             <a:endParaRPr lang="en-US" sz="4000" dirty="0"/>
           </a:p>
@@ -16868,9 +16979,109 @@
           </a:p>
         </p:txBody>
       </p:sp>
+      <p:sp>
+        <p:nvSpPr>
+          <p:cNvPr id="3" name="Text 1"/>
+          <p:cNvSpPr/>
+          <p:nvPr/>
+        </p:nvSpPr>
+        <p:spPr>
+          <a:xfrm>
+            <a:off x="365760" y="1005840"/>
+            <a:ext cx="11460175" cy="731520"/>
+          </a:xfrm>
+          <a:prstGeom prst="rect">
+            <a:avLst/>
+          </a:prstGeom>
+          <a:noFill/>
+          <a:ln/>
+        </p:spPr>
+        <p:txBody>
+          <a:bodyPr wrap="square" lIns="0" tIns="0" rIns="0" bIns="0" rtlCol="0" anchor="ctr">
+            <a:normAutofit/>
+          </a:bodyPr>
+          <a:lstStyle/>
+          <a:p>
+            <a:pPr algn="ctr" indent="0" marL="0">
+              <a:buNone/>
+            </a:pPr>
+            <a:r>
+              <a:rPr lang="en-US" sz="3600" b="1" dirty="0">
+                <a:solidFill>
+                  <a:srgbClr val="990011"/>
+                </a:solidFill>
+                <a:latin typeface="Times New Roman" pitchFamily="34" charset="0"/>
+                <a:ea typeface="Times New Roman" pitchFamily="34" charset="-122"/>
+                <a:cs typeface="Times New Roman" pitchFamily="34" charset="-120"/>
+              </a:rPr>
+              <a:t>1. Bar Graphs</a:t>
+            </a:r>
+            <a:endParaRPr lang="en-US" sz="3600" dirty="0"/>
+          </a:p>
+        </p:txBody>
+      </p:sp>
+      <p:sp>
+        <p:nvSpPr>
+          <p:cNvPr id="4" name="Text 2"/>
+          <p:cNvSpPr/>
+          <p:nvPr/>
+        </p:nvSpPr>
+        <p:spPr>
+          <a:xfrm>
+            <a:off x="365760" y="1783080"/>
+            <a:ext cx="6035040" cy="4617720"/>
+          </a:xfrm>
+          <a:prstGeom prst="rect">
+            <a:avLst/>
+          </a:prstGeom>
+          <a:noFill/>
+          <a:ln/>
+        </p:spPr>
+        <p:txBody>
+          <a:bodyPr wrap="square" lIns="0" tIns="0" rIns="0" bIns="0" rtlCol="0" anchor="t"/>
+          <a:lstStyle/>
+          <a:p>
+            <a:pPr algn="l" indent="0" marL="0">
+              <a:spcAft>
+                <a:spcPts val="800"/>
+              </a:spcAft>
+              <a:buNone/>
+            </a:pPr>
+            <a:r>
+              <a:rPr lang="en-US" sz="3600" b="1" dirty="0">
+                <a:solidFill>
+                  <a:srgbClr val="111111"/>
+                </a:solidFill>
+                <a:latin typeface="Times New Roman" pitchFamily="34" charset="0"/>
+                <a:ea typeface="Times New Roman" pitchFamily="34" charset="-122"/>
+                <a:cs typeface="Times New Roman" pitchFamily="34" charset="-120"/>
+              </a:rPr>
+              <a:t>Interpretation: </a:t>
+            </a:r>
+            <a:pPr algn="l" indent="0" marL="0">
+              <a:spcAft>
+                <a:spcPts val="800"/>
+              </a:spcAft>
+              <a:buNone/>
+            </a:pPr>
+            <a:r>
+              <a:rPr lang="en-US" sz="3600" dirty="0">
+                <a:solidFill>
+                  <a:srgbClr val="111111"/>
+                </a:solidFill>
+                <a:latin typeface="Times New Roman" pitchFamily="34" charset="0"/>
+                <a:ea typeface="Times New Roman" pitchFamily="34" charset="-122"/>
+                <a:cs typeface="Times New Roman" pitchFamily="34" charset="-120"/>
+              </a:rPr>
+              <a:t>For maize production, the South leads with 200 t and the Centre is lowest with 100 t. For rainfall, City B is the wettest with 700 mm and City A the driest with 450 mm.</a:t>
+            </a:r>
+            <a:endParaRPr lang="en-US" sz="3600" dirty="0"/>
+          </a:p>
+        </p:txBody>
+      </p:sp>
       <p:pic>
         <p:nvPicPr>
-          <p:cNvPr id="3" name="Image 0" descr="/home/claude/f4/img/minesec_sheet.png">    </p:cNvPr>
+          <p:cNvPr id="5" name="Image 0" descr="/home/claude/f4/img/v2/stat2_hbar.png">    </p:cNvPr>
           <p:cNvPicPr>
             <a:picLocks noChangeAspect="1"/>
           </p:cNvPicPr>
@@ -16884,8 +17095,8 @@
         </p:blipFill>
         <p:spPr>
           <a:xfrm>
-            <a:off x="0" y="658368"/>
-            <a:ext cx="5120640" cy="5833872"/>
+            <a:off x="6537960" y="2721454"/>
+            <a:ext cx="5470855" cy="2393499"/>
           </a:xfrm>
           <a:prstGeom prst="rect">
             <a:avLst/>
@@ -16894,14 +17105,14 @@
       </p:pic>
       <p:sp>
         <p:nvSpPr>
-          <p:cNvPr id="4" name="Text 1"/>
+          <p:cNvPr id="6" name="Text 3"/>
           <p:cNvSpPr/>
           <p:nvPr/>
         </p:nvSpPr>
         <p:spPr>
           <a:xfrm>
-            <a:off x="5349240" y="1005840"/>
-            <a:ext cx="6522415" cy="731520"/>
+            <a:off x="6537960" y="6089904"/>
+            <a:ext cx="5470855" cy="347472"/>
           </a:xfrm>
           <a:prstGeom prst="rect">
             <a:avLst/>
@@ -16910,69 +17121,24 @@
           <a:ln/>
         </p:spPr>
         <p:txBody>
-          <a:bodyPr wrap="square" lIns="0" tIns="0" rIns="0" bIns="0" rtlCol="0" anchor="ctr">
-            <a:normAutofit/>
-          </a:bodyPr>
+          <a:bodyPr wrap="square" lIns="0" tIns="0" rIns="0" bIns="0" rtlCol="0" anchor="ctr"/>
           <a:lstStyle/>
           <a:p>
             <a:pPr algn="ctr" indent="0" marL="0">
               <a:buNone/>
             </a:pPr>
             <a:r>
-              <a:rPr lang="en-US" sz="3600" b="1" dirty="0">
-                <a:solidFill>
-                  <a:srgbClr val="990011"/>
+              <a:rPr lang="en-US" sz="1600" i="1" dirty="0">
+                <a:solidFill>
+                  <a:srgbClr val="555555"/>
                 </a:solidFill>
                 <a:latin typeface="Times New Roman" pitchFamily="34" charset="0"/>
                 <a:ea typeface="Times New Roman" pitchFamily="34" charset="-122"/>
                 <a:cs typeface="Times New Roman" pitchFamily="34" charset="-120"/>
               </a:rPr>
-              <a:t>1. Bar Graphs (continued)</a:t>
-            </a:r>
-            <a:endParaRPr lang="en-US" sz="3600" dirty="0"/>
-          </a:p>
-        </p:txBody>
-      </p:sp>
-      <p:sp>
-        <p:nvSpPr>
-          <p:cNvPr id="5" name="Text 2"/>
-          <p:cNvSpPr/>
-          <p:nvPr/>
-        </p:nvSpPr>
-        <p:spPr>
-          <a:xfrm>
-            <a:off x="5349240" y="1783080"/>
-            <a:ext cx="6522415" cy="4663440"/>
-          </a:xfrm>
-          <a:prstGeom prst="rect">
-            <a:avLst/>
-          </a:prstGeom>
-          <a:noFill/>
-          <a:ln/>
-        </p:spPr>
-        <p:txBody>
-          <a:bodyPr wrap="square" lIns="0" tIns="0" rIns="0" bIns="0" rtlCol="0" anchor="t"/>
-          <a:lstStyle/>
-          <a:p>
-            <a:pPr algn="l" marL="342900" indent="-342900">
-              <a:spcAft>
-                <a:spcPts val="800"/>
-              </a:spcAft>
-              <a:buSzPct val="100000"/>
-              <a:buChar char="•"/>
-            </a:pPr>
-            <a:r>
-              <a:rPr lang="en-US" sz="4000" dirty="0">
-                <a:solidFill>
-                  <a:srgbClr val="111111"/>
-                </a:solidFill>
-                <a:latin typeface="Times New Roman" pitchFamily="34" charset="0"/>
-                <a:ea typeface="Times New Roman" pitchFamily="34" charset="-122"/>
-                <a:cs typeface="Times New Roman" pitchFamily="34" charset="-120"/>
-              </a:rPr>
-              <a:t>Add a title, axis labels with units and a key.</a:t>
-            </a:r>
-            <a:endParaRPr lang="en-US" sz="4000" dirty="0"/>
+              <a:t>Illustration: a horizontal bar graph</a:t>
+            </a:r>
+            <a:endParaRPr lang="en-US" sz="1600" dirty="0"/>
           </a:p>
         </p:txBody>
       </p:sp>
@@ -17088,109 +17254,9 @@
           </a:p>
         </p:txBody>
       </p:sp>
-      <p:sp>
-        <p:nvSpPr>
-          <p:cNvPr id="3" name="Text 1"/>
-          <p:cNvSpPr/>
-          <p:nvPr/>
-        </p:nvSpPr>
-        <p:spPr>
-          <a:xfrm>
-            <a:off x="365760" y="1005840"/>
-            <a:ext cx="11460175" cy="731520"/>
-          </a:xfrm>
-          <a:prstGeom prst="rect">
-            <a:avLst/>
-          </a:prstGeom>
-          <a:noFill/>
-          <a:ln/>
-        </p:spPr>
-        <p:txBody>
-          <a:bodyPr wrap="square" lIns="0" tIns="0" rIns="0" bIns="0" rtlCol="0" anchor="ctr">
-            <a:normAutofit/>
-          </a:bodyPr>
-          <a:lstStyle/>
-          <a:p>
-            <a:pPr algn="ctr" indent="0" marL="0">
-              <a:buNone/>
-            </a:pPr>
-            <a:r>
-              <a:rPr lang="en-US" sz="3600" b="1" dirty="0">
-                <a:solidFill>
-                  <a:srgbClr val="990011"/>
-                </a:solidFill>
-                <a:latin typeface="Times New Roman" pitchFamily="34" charset="0"/>
-                <a:ea typeface="Times New Roman" pitchFamily="34" charset="-122"/>
-                <a:cs typeface="Times New Roman" pitchFamily="34" charset="-120"/>
-              </a:rPr>
-              <a:t>1. Bar Graphs</a:t>
-            </a:r>
-            <a:endParaRPr lang="en-US" sz="3600" dirty="0"/>
-          </a:p>
-        </p:txBody>
-      </p:sp>
-      <p:sp>
-        <p:nvSpPr>
-          <p:cNvPr id="4" name="Text 2"/>
-          <p:cNvSpPr/>
-          <p:nvPr/>
-        </p:nvSpPr>
-        <p:spPr>
-          <a:xfrm>
-            <a:off x="365760" y="1783080"/>
-            <a:ext cx="4846320" cy="4617720"/>
-          </a:xfrm>
-          <a:prstGeom prst="rect">
-            <a:avLst/>
-          </a:prstGeom>
-          <a:noFill/>
-          <a:ln/>
-        </p:spPr>
-        <p:txBody>
-          <a:bodyPr wrap="square" lIns="0" tIns="0" rIns="0" bIns="0" rtlCol="0" anchor="t"/>
-          <a:lstStyle/>
-          <a:p>
-            <a:pPr algn="l" indent="0" marL="0">
-              <a:spcAft>
-                <a:spcPts val="800"/>
-              </a:spcAft>
-              <a:buNone/>
-            </a:pPr>
-            <a:r>
-              <a:rPr lang="en-US" sz="3600" b="1" dirty="0">
-                <a:solidFill>
-                  <a:srgbClr val="111111"/>
-                </a:solidFill>
-                <a:latin typeface="Times New Roman" pitchFamily="34" charset="0"/>
-                <a:ea typeface="Times New Roman" pitchFamily="34" charset="-122"/>
-                <a:cs typeface="Times New Roman" pitchFamily="34" charset="-120"/>
-              </a:rPr>
-              <a:t>Interpretation: </a:t>
-            </a:r>
-            <a:pPr algn="l" indent="0" marL="0">
-              <a:spcAft>
-                <a:spcPts val="800"/>
-              </a:spcAft>
-              <a:buNone/>
-            </a:pPr>
-            <a:r>
-              <a:rPr lang="en-US" sz="3600" dirty="0">
-                <a:solidFill>
-                  <a:srgbClr val="111111"/>
-                </a:solidFill>
-                <a:latin typeface="Times New Roman" pitchFamily="34" charset="0"/>
-                <a:ea typeface="Times New Roman" pitchFamily="34" charset="-122"/>
-                <a:cs typeface="Times New Roman" pitchFamily="34" charset="-120"/>
-              </a:rPr>
-              <a:t>Maize: the South leads (200 t) and the Centre is lowest (100 t); rainfall: City B is wettest (700 mm) and City A driest (450 mm).</a:t>
-            </a:r>
-            <a:endParaRPr lang="en-US" sz="3600" dirty="0"/>
-          </a:p>
-        </p:txBody>
-      </p:sp>
       <p:pic>
         <p:nvPicPr>
-          <p:cNvPr id="5" name="Image 0" descr="/home/claude/f4/img/v2/stat2_hbar.png">    </p:cNvPr>
+          <p:cNvPr id="3" name="Image 0" descr="/home/claude/f4/img/minesec_sheet.png">    </p:cNvPr>
           <p:cNvPicPr>
             <a:picLocks noChangeAspect="1"/>
           </p:cNvPicPr>
@@ -17204,8 +17270,8 @@
         </p:blipFill>
         <p:spPr>
           <a:xfrm>
-            <a:off x="5349240" y="2461422"/>
-            <a:ext cx="6659575" cy="2913564"/>
+            <a:off x="0" y="658368"/>
+            <a:ext cx="3840480" cy="5833872"/>
           </a:xfrm>
           <a:prstGeom prst="rect">
             <a:avLst/>
@@ -17214,14 +17280,14 @@
       </p:pic>
       <p:sp>
         <p:nvSpPr>
-          <p:cNvPr id="6" name="Text 3"/>
+          <p:cNvPr id="4" name="Text 1"/>
           <p:cNvSpPr/>
           <p:nvPr/>
         </p:nvSpPr>
         <p:spPr>
           <a:xfrm>
-            <a:off x="5349240" y="6089904"/>
-            <a:ext cx="6659575" cy="347472"/>
+            <a:off x="4069080" y="1005840"/>
+            <a:ext cx="7802575" cy="731520"/>
           </a:xfrm>
           <a:prstGeom prst="rect">
             <a:avLst/>
@@ -17230,24 +17296,85 @@
           <a:ln/>
         </p:spPr>
         <p:txBody>
-          <a:bodyPr wrap="square" lIns="0" tIns="0" rIns="0" bIns="0" rtlCol="0" anchor="ctr"/>
+          <a:bodyPr wrap="square" lIns="0" tIns="0" rIns="0" bIns="0" rtlCol="0" anchor="ctr">
+            <a:normAutofit/>
+          </a:bodyPr>
           <a:lstStyle/>
           <a:p>
             <a:pPr algn="ctr" indent="0" marL="0">
               <a:buNone/>
             </a:pPr>
             <a:r>
-              <a:rPr lang="en-US" sz="1600" i="1" dirty="0">
-                <a:solidFill>
-                  <a:srgbClr val="555555"/>
+              <a:rPr lang="en-US" sz="3600" b="1" dirty="0">
+                <a:solidFill>
+                  <a:srgbClr val="990011"/>
                 </a:solidFill>
                 <a:latin typeface="Times New Roman" pitchFamily="34" charset="0"/>
                 <a:ea typeface="Times New Roman" pitchFamily="34" charset="-122"/>
                 <a:cs typeface="Times New Roman" pitchFamily="34" charset="-120"/>
               </a:rPr>
-              <a:t>Illustration: a horizontal bar graph</a:t>
-            </a:r>
-            <a:endParaRPr lang="en-US" sz="1600" dirty="0"/>
+              <a:t>1. Bar Graphs</a:t>
+            </a:r>
+            <a:endParaRPr lang="en-US" sz="3600" dirty="0"/>
+          </a:p>
+        </p:txBody>
+      </p:sp>
+      <p:sp>
+        <p:nvSpPr>
+          <p:cNvPr id="5" name="Text 2"/>
+          <p:cNvSpPr/>
+          <p:nvPr/>
+        </p:nvSpPr>
+        <p:spPr>
+          <a:xfrm>
+            <a:off x="4069080" y="1783080"/>
+            <a:ext cx="7802575" cy="4663440"/>
+          </a:xfrm>
+          <a:prstGeom prst="rect">
+            <a:avLst/>
+          </a:prstGeom>
+          <a:noFill/>
+          <a:ln/>
+        </p:spPr>
+        <p:txBody>
+          <a:bodyPr wrap="square" lIns="0" tIns="0" rIns="0" bIns="0" rtlCol="0" anchor="t"/>
+          <a:lstStyle/>
+          <a:p>
+            <a:pPr algn="l" indent="0" marL="0">
+              <a:spcAft>
+                <a:spcPts val="800"/>
+              </a:spcAft>
+              <a:buNone/>
+            </a:pPr>
+            <a:r>
+              <a:rPr lang="en-US" sz="4000" b="1" dirty="0">
+                <a:solidFill>
+                  <a:srgbClr val="111111"/>
+                </a:solidFill>
+                <a:latin typeface="Times New Roman" pitchFamily="34" charset="0"/>
+                <a:ea typeface="Times New Roman" pitchFamily="34" charset="-122"/>
+                <a:cs typeface="Times New Roman" pitchFamily="34" charset="-120"/>
+              </a:rPr>
+              <a:t>Assessment: </a:t>
+            </a:r>
+            <a:pPr algn="l" indent="0" marL="0">
+              <a:spcAft>
+                <a:spcPts val="800"/>
+              </a:spcAft>
+              <a:buNone/>
+            </a:pPr>
+            <a:r>
+              <a:rPr lang="en-US" sz="4000" dirty="0">
+                <a:solidFill>
+                  <a:srgbClr val="111111"/>
+                </a:solidFill>
+                <a:latin typeface="Times New Roman" pitchFamily="34" charset="0"/>
+                <a:ea typeface="Times New Roman" pitchFamily="34" charset="-122"/>
+                <a:cs typeface="Times New Roman" pitchFamily="34" charset="-120"/>
+              </a:rPr>
+              <a:t>Bar graphs are easy to draw and read and good for comparing categories. However, they are unsuitable for continuous data and become cluttered with too many bars.</a:t>
+            </a:r>
+            <a:endParaRPr lang="en-US" sz="4000" dirty="0"/>
           </a:p>
         </p:txBody>
       </p:sp>
@@ -17422,7 +17549,7 @@
                 <a:ea typeface="Times New Roman" pitchFamily="34" charset="-122"/>
                 <a:cs typeface="Times New Roman" pitchFamily="34" charset="-120"/>
               </a:rPr>
-              <a:t>1. Bar Graphs</a:t>
+              <a:t>2. Linear Graphs</a:t>
             </a:r>
             <a:endParaRPr lang="en-US" sz="3600" dirty="0"/>
           </a:p>
@@ -17456,7 +17583,7 @@
               <a:buNone/>
             </a:pPr>
             <a:r>
-              <a:rPr lang="en-US" sz="4000" b="1" dirty="0">
+              <a:rPr lang="en-US" sz="4000" i="1" dirty="0">
                 <a:solidFill>
                   <a:srgbClr val="111111"/>
                 </a:solidFill>
@@ -17464,20 +17591,19 @@
                 <a:ea typeface="Times New Roman" pitchFamily="34" charset="-122"/>
                 <a:cs typeface="Times New Roman" pitchFamily="34" charset="-120"/>
               </a:rPr>
-              <a:t>Assessment:</a:t>
+              <a:t>Line graphs are constructed and interpreted as follows:</a:t>
             </a:r>
             <a:endParaRPr lang="en-US" sz="4000" dirty="0"/>
           </a:p>
           <a:p>
-            <a:pPr algn="l" marL="342900" indent="-342900">
+            <a:pPr algn="l" indent="0" marL="0">
               <a:spcAft>
                 <a:spcPts val="800"/>
               </a:spcAft>
-              <a:buSzPct val="100000"/>
-              <a:buChar char="•"/>
-            </a:pPr>
-            <a:r>
-              <a:rPr lang="en-US" sz="4000" dirty="0">
+              <a:buNone/>
+            </a:pPr>
+            <a:r>
+              <a:rPr lang="en-US" sz="4000" b="1" dirty="0">
                 <a:solidFill>
                   <a:srgbClr val="111111"/>
                 </a:solidFill>
@@ -17485,17 +17611,13 @@
                 <a:ea typeface="Times New Roman" pitchFamily="34" charset="-122"/>
                 <a:cs typeface="Times New Roman" pitchFamily="34" charset="-120"/>
               </a:rPr>
-              <a:t>Advantages: easy to draw and read; good for comparing categories.</a:t>
-            </a:r>
-            <a:endParaRPr lang="en-US" sz="4000" dirty="0"/>
-          </a:p>
-          <a:p>
-            <a:pPr algn="l" marL="342900" indent="-342900">
+              <a:t>Types: </a:t>
+            </a:r>
+            <a:pPr algn="l" indent="0" marL="0">
               <a:spcAft>
                 <a:spcPts val="800"/>
               </a:spcAft>
-              <a:buSzPct val="100000"/>
-              <a:buChar char="•"/>
+              <a:buNone/>
             </a:pPr>
             <a:r>
               <a:rPr lang="en-US" sz="4000" dirty="0">
@@ -17506,7 +17628,7 @@
                 <a:ea typeface="Times New Roman" pitchFamily="34" charset="-122"/>
                 <a:cs typeface="Times New Roman" pitchFamily="34" charset="-120"/>
               </a:rPr>
-              <a:t>Disadvantages: unsuitable for continuous data; cluttered with too many bars.</a:t>
+              <a:t>A simple line graph shows one set of data, such as the population of a town over time. A compound line graph shows several sets on the same axes, with a key.</a:t>
             </a:r>
             <a:endParaRPr lang="en-US" sz="4000" dirty="0"/>
           </a:p>
@@ -17624,9 +17746,109 @@
           </a:p>
         </p:txBody>
       </p:sp>
+      <p:sp>
+        <p:nvSpPr>
+          <p:cNvPr id="3" name="Text 1"/>
+          <p:cNvSpPr/>
+          <p:nvPr/>
+        </p:nvSpPr>
+        <p:spPr>
+          <a:xfrm>
+            <a:off x="365760" y="1005840"/>
+            <a:ext cx="11460175" cy="731520"/>
+          </a:xfrm>
+          <a:prstGeom prst="rect">
+            <a:avLst/>
+          </a:prstGeom>
+          <a:noFill/>
+          <a:ln/>
+        </p:spPr>
+        <p:txBody>
+          <a:bodyPr wrap="square" lIns="0" tIns="0" rIns="0" bIns="0" rtlCol="0" anchor="ctr">
+            <a:normAutofit/>
+          </a:bodyPr>
+          <a:lstStyle/>
+          <a:p>
+            <a:pPr algn="ctr" indent="0" marL="0">
+              <a:buNone/>
+            </a:pPr>
+            <a:r>
+              <a:rPr lang="en-US" sz="3600" b="1" dirty="0">
+                <a:solidFill>
+                  <a:srgbClr val="990011"/>
+                </a:solidFill>
+                <a:latin typeface="Times New Roman" pitchFamily="34" charset="0"/>
+                <a:ea typeface="Times New Roman" pitchFamily="34" charset="-122"/>
+                <a:cs typeface="Times New Roman" pitchFamily="34" charset="-120"/>
+              </a:rPr>
+              <a:t>2. Linear Graphs</a:t>
+            </a:r>
+            <a:endParaRPr lang="en-US" sz="3600" dirty="0"/>
+          </a:p>
+        </p:txBody>
+      </p:sp>
+      <p:sp>
+        <p:nvSpPr>
+          <p:cNvPr id="4" name="Text 2"/>
+          <p:cNvSpPr/>
+          <p:nvPr/>
+        </p:nvSpPr>
+        <p:spPr>
+          <a:xfrm>
+            <a:off x="365760" y="1783080"/>
+            <a:ext cx="6035040" cy="4617720"/>
+          </a:xfrm>
+          <a:prstGeom prst="rect">
+            <a:avLst/>
+          </a:prstGeom>
+          <a:noFill/>
+          <a:ln/>
+        </p:spPr>
+        <p:txBody>
+          <a:bodyPr wrap="square" lIns="0" tIns="0" rIns="0" bIns="0" rtlCol="0" anchor="t"/>
+          <a:lstStyle/>
+          <a:p>
+            <a:pPr algn="l" indent="0" marL="0">
+              <a:spcAft>
+                <a:spcPts val="800"/>
+              </a:spcAft>
+              <a:buNone/>
+            </a:pPr>
+            <a:r>
+              <a:rPr lang="en-US" sz="3600" b="1" dirty="0">
+                <a:solidFill>
+                  <a:srgbClr val="111111"/>
+                </a:solidFill>
+                <a:latin typeface="Times New Roman" pitchFamily="34" charset="0"/>
+                <a:ea typeface="Times New Roman" pitchFamily="34" charset="-122"/>
+                <a:cs typeface="Times New Roman" pitchFamily="34" charset="-120"/>
+              </a:rPr>
+              <a:t>Construction: </a:t>
+            </a:r>
+            <a:pPr algn="l" indent="0" marL="0">
+              <a:spcAft>
+                <a:spcPts val="800"/>
+              </a:spcAft>
+              <a:buNone/>
+            </a:pPr>
+            <a:r>
+              <a:rPr lang="en-US" sz="3600" dirty="0">
+                <a:solidFill>
+                  <a:srgbClr val="111111"/>
+                </a:solidFill>
+                <a:latin typeface="Times New Roman" pitchFamily="34" charset="0"/>
+                <a:ea typeface="Times New Roman" pitchFamily="34" charset="-122"/>
+                <a:cs typeface="Times New Roman" pitchFamily="34" charset="-120"/>
+              </a:rPr>
+              <a:t>Put the independent variable, such as time or altitude, on the x-axis and the dependent variable on the y-axis. Plot the points and join them with a ruler.</a:t>
+            </a:r>
+            <a:endParaRPr lang="en-US" sz="3600" dirty="0"/>
+          </a:p>
+        </p:txBody>
+      </p:sp>
       <p:pic>
         <p:nvPicPr>
-          <p:cNvPr id="3" name="Image 0" descr="/home/claude/f4/img/minesec_sheet.png">    </p:cNvPr>
+          <p:cNvPr id="5" name="Image 0" descr="/home/claude/f4/img/v2/stat2_line.png">    </p:cNvPr>
           <p:cNvPicPr>
             <a:picLocks noChangeAspect="1"/>
           </p:cNvPicPr>
@@ -17640,8 +17862,8 @@
         </p:blipFill>
         <p:spPr>
           <a:xfrm>
-            <a:off x="0" y="658368"/>
-            <a:ext cx="5120640" cy="5833872"/>
+            <a:off x="6537960" y="2721454"/>
+            <a:ext cx="5470855" cy="2393499"/>
           </a:xfrm>
           <a:prstGeom prst="rect">
             <a:avLst/>
@@ -17650,14 +17872,14 @@
       </p:pic>
       <p:sp>
         <p:nvSpPr>
-          <p:cNvPr id="4" name="Text 1"/>
+          <p:cNvPr id="6" name="Text 3"/>
           <p:cNvSpPr/>
           <p:nvPr/>
         </p:nvSpPr>
         <p:spPr>
           <a:xfrm>
-            <a:off x="5349240" y="1005840"/>
-            <a:ext cx="6522415" cy="731520"/>
+            <a:off x="6537960" y="6089904"/>
+            <a:ext cx="5470855" cy="347472"/>
           </a:xfrm>
           <a:prstGeom prst="rect">
             <a:avLst/>
@@ -17666,105 +17888,24 @@
           <a:ln/>
         </p:spPr>
         <p:txBody>
-          <a:bodyPr wrap="square" lIns="0" tIns="0" rIns="0" bIns="0" rtlCol="0" anchor="ctr">
-            <a:normAutofit/>
-          </a:bodyPr>
+          <a:bodyPr wrap="square" lIns="0" tIns="0" rIns="0" bIns="0" rtlCol="0" anchor="ctr"/>
           <a:lstStyle/>
           <a:p>
             <a:pPr algn="ctr" indent="0" marL="0">
               <a:buNone/>
             </a:pPr>
             <a:r>
-              <a:rPr lang="en-US" sz="3600" b="1" dirty="0">
-                <a:solidFill>
-                  <a:srgbClr val="990011"/>
+              <a:rPr lang="en-US" sz="1600" i="1" dirty="0">
+                <a:solidFill>
+                  <a:srgbClr val="555555"/>
                 </a:solidFill>
                 <a:latin typeface="Times New Roman" pitchFamily="34" charset="0"/>
                 <a:ea typeface="Times New Roman" pitchFamily="34" charset="-122"/>
                 <a:cs typeface="Times New Roman" pitchFamily="34" charset="-120"/>
               </a:rPr>
-              <a:t>2. Line Graphs</a:t>
-            </a:r>
-            <a:endParaRPr lang="en-US" sz="3600" dirty="0"/>
-          </a:p>
-        </p:txBody>
-      </p:sp>
-      <p:sp>
-        <p:nvSpPr>
-          <p:cNvPr id="5" name="Text 2"/>
-          <p:cNvSpPr/>
-          <p:nvPr/>
-        </p:nvSpPr>
-        <p:spPr>
-          <a:xfrm>
-            <a:off x="5349240" y="1783080"/>
-            <a:ext cx="6522415" cy="4663440"/>
-          </a:xfrm>
-          <a:prstGeom prst="rect">
-            <a:avLst/>
-          </a:prstGeom>
-          <a:noFill/>
-          <a:ln/>
-        </p:spPr>
-        <p:txBody>
-          <a:bodyPr wrap="square" lIns="0" tIns="0" rIns="0" bIns="0" rtlCol="0" anchor="t"/>
-          <a:lstStyle/>
-          <a:p>
-            <a:pPr algn="l" indent="0" marL="0">
-              <a:spcAft>
-                <a:spcPts val="800"/>
-              </a:spcAft>
-              <a:buNone/>
-            </a:pPr>
-            <a:r>
-              <a:rPr lang="en-US" sz="4000" i="1" dirty="0">
-                <a:solidFill>
-                  <a:srgbClr val="111111"/>
-                </a:solidFill>
-                <a:latin typeface="Times New Roman" pitchFamily="34" charset="0"/>
-                <a:ea typeface="Times New Roman" pitchFamily="34" charset="-122"/>
-                <a:cs typeface="Times New Roman" pitchFamily="34" charset="-120"/>
-              </a:rPr>
-              <a:t>Line graphs are drawn and used as follows:</a:t>
-            </a:r>
-            <a:endParaRPr lang="en-US" sz="4000" dirty="0"/>
-          </a:p>
-          <a:p>
-            <a:pPr algn="l" indent="0" marL="0">
-              <a:spcAft>
-                <a:spcPts val="800"/>
-              </a:spcAft>
-              <a:buNone/>
-            </a:pPr>
-            <a:r>
-              <a:rPr lang="en-US" sz="4000" b="1" dirty="0">
-                <a:solidFill>
-                  <a:srgbClr val="111111"/>
-                </a:solidFill>
-                <a:latin typeface="Times New Roman" pitchFamily="34" charset="0"/>
-                <a:ea typeface="Times New Roman" pitchFamily="34" charset="-122"/>
-                <a:cs typeface="Times New Roman" pitchFamily="34" charset="-120"/>
-              </a:rPr>
-              <a:t>Types: </a:t>
-            </a:r>
-            <a:pPr algn="l" indent="0" marL="0">
-              <a:spcAft>
-                <a:spcPts val="800"/>
-              </a:spcAft>
-              <a:buNone/>
-            </a:pPr>
-            <a:r>
-              <a:rPr lang="en-US" sz="4000" dirty="0">
-                <a:solidFill>
-                  <a:srgbClr val="111111"/>
-                </a:solidFill>
-                <a:latin typeface="Times New Roman" pitchFamily="34" charset="0"/>
-                <a:ea typeface="Times New Roman" pitchFamily="34" charset="-122"/>
-                <a:cs typeface="Times New Roman" pitchFamily="34" charset="-120"/>
-              </a:rPr>
-              <a:t>A simple line graph shows one set of data; a compound line graph shows several sets with a key.</a:t>
-            </a:r>
-            <a:endParaRPr lang="en-US" sz="4000" dirty="0"/>
+              <a:t>Illustration: a line graph</a:t>
+            </a:r>
+            <a:endParaRPr lang="en-US" sz="1600" dirty="0"/>
           </a:p>
         </p:txBody>
       </p:sp>
@@ -17880,109 +18021,9 @@
           </a:p>
         </p:txBody>
       </p:sp>
-      <p:sp>
-        <p:nvSpPr>
-          <p:cNvPr id="3" name="Text 1"/>
-          <p:cNvSpPr/>
-          <p:nvPr/>
-        </p:nvSpPr>
-        <p:spPr>
-          <a:xfrm>
-            <a:off x="365760" y="1005840"/>
-            <a:ext cx="11460175" cy="731520"/>
-          </a:xfrm>
-          <a:prstGeom prst="rect">
-            <a:avLst/>
-          </a:prstGeom>
-          <a:noFill/>
-          <a:ln/>
-        </p:spPr>
-        <p:txBody>
-          <a:bodyPr wrap="square" lIns="0" tIns="0" rIns="0" bIns="0" rtlCol="0" anchor="ctr">
-            <a:normAutofit/>
-          </a:bodyPr>
-          <a:lstStyle/>
-          <a:p>
-            <a:pPr algn="ctr" indent="0" marL="0">
-              <a:buNone/>
-            </a:pPr>
-            <a:r>
-              <a:rPr lang="en-US" sz="3600" b="1" dirty="0">
-                <a:solidFill>
-                  <a:srgbClr val="990011"/>
-                </a:solidFill>
-                <a:latin typeface="Times New Roman" pitchFamily="34" charset="0"/>
-                <a:ea typeface="Times New Roman" pitchFamily="34" charset="-122"/>
-                <a:cs typeface="Times New Roman" pitchFamily="34" charset="-120"/>
-              </a:rPr>
-              <a:t>2. Line Graphs</a:t>
-            </a:r>
-            <a:endParaRPr lang="en-US" sz="3600" dirty="0"/>
-          </a:p>
-        </p:txBody>
-      </p:sp>
-      <p:sp>
-        <p:nvSpPr>
-          <p:cNvPr id="4" name="Text 2"/>
-          <p:cNvSpPr/>
-          <p:nvPr/>
-        </p:nvSpPr>
-        <p:spPr>
-          <a:xfrm>
-            <a:off x="365760" y="1783080"/>
-            <a:ext cx="4846320" cy="4617720"/>
-          </a:xfrm>
-          <a:prstGeom prst="rect">
-            <a:avLst/>
-          </a:prstGeom>
-          <a:noFill/>
-          <a:ln/>
-        </p:spPr>
-        <p:txBody>
-          <a:bodyPr wrap="square" lIns="0" tIns="0" rIns="0" bIns="0" rtlCol="0" anchor="t"/>
-          <a:lstStyle/>
-          <a:p>
-            <a:pPr algn="l" indent="0" marL="0">
-              <a:spcAft>
-                <a:spcPts val="800"/>
-              </a:spcAft>
-              <a:buNone/>
-            </a:pPr>
-            <a:r>
-              <a:rPr lang="en-US" sz="3600" b="1" dirty="0">
-                <a:solidFill>
-                  <a:srgbClr val="111111"/>
-                </a:solidFill>
-                <a:latin typeface="Times New Roman" pitchFamily="34" charset="0"/>
-                <a:ea typeface="Times New Roman" pitchFamily="34" charset="-122"/>
-                <a:cs typeface="Times New Roman" pitchFamily="34" charset="-120"/>
-              </a:rPr>
-              <a:t>Steps: </a:t>
-            </a:r>
-            <a:pPr algn="l" indent="0" marL="0">
-              <a:spcAft>
-                <a:spcPts val="800"/>
-              </a:spcAft>
-              <a:buNone/>
-            </a:pPr>
-            <a:r>
-              <a:rPr lang="en-US" sz="3600" dirty="0">
-                <a:solidFill>
-                  <a:srgbClr val="111111"/>
-                </a:solidFill>
-                <a:latin typeface="Times New Roman" pitchFamily="34" charset="0"/>
-                <a:ea typeface="Times New Roman" pitchFamily="34" charset="-122"/>
-                <a:cs typeface="Times New Roman" pitchFamily="34" charset="-120"/>
-              </a:rPr>
-              <a:t>Put the independent variable (time, altitude) on the x-axis and the dependent variable on the y-axis, plot the points and join them with a ruler.</a:t>
-            </a:r>
-            <a:endParaRPr lang="en-US" sz="3600" dirty="0"/>
-          </a:p>
-        </p:txBody>
-      </p:sp>
       <p:pic>
         <p:nvPicPr>
-          <p:cNvPr id="5" name="Image 0" descr="/home/claude/f4/img/v2/stat2_line.png">    </p:cNvPr>
+          <p:cNvPr id="3" name="Image 0" descr="/home/claude/f4/img/minesec_sheet.png">    </p:cNvPr>
           <p:cNvPicPr>
             <a:picLocks noChangeAspect="1"/>
           </p:cNvPicPr>
@@ -17996,8 +18037,8 @@
         </p:blipFill>
         <p:spPr>
           <a:xfrm>
-            <a:off x="5349240" y="2461422"/>
-            <a:ext cx="6659575" cy="2913564"/>
+            <a:off x="0" y="658368"/>
+            <a:ext cx="5120640" cy="5833872"/>
           </a:xfrm>
           <a:prstGeom prst="rect">
             <a:avLst/>
@@ -18006,14 +18047,14 @@
       </p:pic>
       <p:sp>
         <p:nvSpPr>
-          <p:cNvPr id="6" name="Text 3"/>
+          <p:cNvPr id="4" name="Text 1"/>
           <p:cNvSpPr/>
           <p:nvPr/>
         </p:nvSpPr>
         <p:spPr>
           <a:xfrm>
-            <a:off x="5349240" y="6089904"/>
-            <a:ext cx="6659575" cy="347472"/>
+            <a:off x="5349240" y="1005840"/>
+            <a:ext cx="6522415" cy="731520"/>
           </a:xfrm>
           <a:prstGeom prst="rect">
             <a:avLst/>
@@ -18022,24 +18063,85 @@
           <a:ln/>
         </p:spPr>
         <p:txBody>
-          <a:bodyPr wrap="square" lIns="0" tIns="0" rIns="0" bIns="0" rtlCol="0" anchor="ctr"/>
+          <a:bodyPr wrap="square" lIns="0" tIns="0" rIns="0" bIns="0" rtlCol="0" anchor="ctr">
+            <a:normAutofit/>
+          </a:bodyPr>
           <a:lstStyle/>
           <a:p>
             <a:pPr algn="ctr" indent="0" marL="0">
               <a:buNone/>
             </a:pPr>
             <a:r>
-              <a:rPr lang="en-US" sz="1600" i="1" dirty="0">
-                <a:solidFill>
-                  <a:srgbClr val="555555"/>
+              <a:rPr lang="en-US" sz="3600" b="1" dirty="0">
+                <a:solidFill>
+                  <a:srgbClr val="990011"/>
                 </a:solidFill>
                 <a:latin typeface="Times New Roman" pitchFamily="34" charset="0"/>
                 <a:ea typeface="Times New Roman" pitchFamily="34" charset="-122"/>
                 <a:cs typeface="Times New Roman" pitchFamily="34" charset="-120"/>
               </a:rPr>
-              <a:t>Illustration: a simple line graph</a:t>
-            </a:r>
-            <a:endParaRPr lang="en-US" sz="1600" dirty="0"/>
+              <a:t>2. Linear Graphs</a:t>
+            </a:r>
+            <a:endParaRPr lang="en-US" sz="3600" dirty="0"/>
+          </a:p>
+        </p:txBody>
+      </p:sp>
+      <p:sp>
+        <p:nvSpPr>
+          <p:cNvPr id="5" name="Text 2"/>
+          <p:cNvSpPr/>
+          <p:nvPr/>
+        </p:nvSpPr>
+        <p:spPr>
+          <a:xfrm>
+            <a:off x="5349240" y="1783080"/>
+            <a:ext cx="6522415" cy="4663440"/>
+          </a:xfrm>
+          <a:prstGeom prst="rect">
+            <a:avLst/>
+          </a:prstGeom>
+          <a:noFill/>
+          <a:ln/>
+        </p:spPr>
+        <p:txBody>
+          <a:bodyPr wrap="square" lIns="0" tIns="0" rIns="0" bIns="0" rtlCol="0" anchor="t"/>
+          <a:lstStyle/>
+          <a:p>
+            <a:pPr algn="l" indent="0" marL="0">
+              <a:spcAft>
+                <a:spcPts val="800"/>
+              </a:spcAft>
+              <a:buNone/>
+            </a:pPr>
+            <a:r>
+              <a:rPr lang="en-US" sz="4000" b="1" dirty="0">
+                <a:solidFill>
+                  <a:srgbClr val="111111"/>
+                </a:solidFill>
+                <a:latin typeface="Times New Roman" pitchFamily="34" charset="0"/>
+                <a:ea typeface="Times New Roman" pitchFamily="34" charset="-122"/>
+                <a:cs typeface="Times New Roman" pitchFamily="34" charset="-120"/>
+              </a:rPr>
+              <a:t>Example: </a:t>
+            </a:r>
+            <a:pPr algn="l" indent="0" marL="0">
+              <a:spcAft>
+                <a:spcPts val="800"/>
+              </a:spcAft>
+              <a:buNone/>
+            </a:pPr>
+            <a:r>
+              <a:rPr lang="en-US" sz="4000" dirty="0">
+                <a:solidFill>
+                  <a:srgbClr val="111111"/>
+                </a:solidFill>
+                <a:latin typeface="Times New Roman" pitchFamily="34" charset="0"/>
+                <a:ea typeface="Times New Roman" pitchFamily="34" charset="-122"/>
+                <a:cs typeface="Times New Roman" pitchFamily="34" charset="-120"/>
+              </a:rPr>
+              <a:t>Temperature falls from 30 °C at sea level to 15 °C at 1,500 m. The graph shows a regular fall of 5 °C every 500 m.</a:t>
+            </a:r>
+            <a:endParaRPr lang="en-US" sz="4000" dirty="0"/>
           </a:p>
         </p:txBody>
       </p:sp>
@@ -18214,7 +18316,7 @@
                 <a:ea typeface="Times New Roman" pitchFamily="34" charset="-122"/>
                 <a:cs typeface="Times New Roman" pitchFamily="34" charset="-120"/>
               </a:rPr>
-              <a:t>2. Line Graphs</a:t>
+              <a:t>2. Linear Graphs</a:t>
             </a:r>
             <a:endParaRPr lang="en-US" sz="3600" dirty="0"/>
           </a:p>
@@ -18256,7 +18358,7 @@
                 <a:ea typeface="Times New Roman" pitchFamily="34" charset="-122"/>
                 <a:cs typeface="Times New Roman" pitchFamily="34" charset="-120"/>
               </a:rPr>
-              <a:t>Example: </a:t>
+              <a:t>Assessment: </a:t>
             </a:r>
             <a:pPr algn="l" indent="0" marL="0">
               <a:spcAft>
@@ -18273,48 +18375,7 @@
                 <a:ea typeface="Times New Roman" pitchFamily="34" charset="-122"/>
                 <a:cs typeface="Times New Roman" pitchFamily="34" charset="-120"/>
               </a:rPr>
-              <a:t>Temperature falls from 30 °C at sea level to 15 °C at 1,500 m: 5 °C every 500 m.</a:t>
-            </a:r>
-            <a:endParaRPr lang="en-US" sz="4000" dirty="0"/>
-          </a:p>
-          <a:p>
-            <a:pPr algn="l" indent="0" marL="0">
-              <a:spcAft>
-                <a:spcPts val="800"/>
-              </a:spcAft>
-              <a:buNone/>
-            </a:pPr>
-            <a:r>
-              <a:rPr lang="en-US" sz="4000" b="1" dirty="0">
-                <a:solidFill>
-                  <a:srgbClr val="111111"/>
-                </a:solidFill>
-                <a:latin typeface="Times New Roman" pitchFamily="34" charset="0"/>
-                <a:ea typeface="Times New Roman" pitchFamily="34" charset="-122"/>
-                <a:cs typeface="Times New Roman" pitchFamily="34" charset="-120"/>
-              </a:rPr>
-              <a:t>Assessment:</a:t>
-            </a:r>
-            <a:endParaRPr lang="en-US" sz="4000" dirty="0"/>
-          </a:p>
-          <a:p>
-            <a:pPr algn="l" marL="342900" indent="-342900">
-              <a:spcAft>
-                <a:spcPts val="800"/>
-              </a:spcAft>
-              <a:buSzPct val="100000"/>
-              <a:buChar char="•"/>
-            </a:pPr>
-            <a:r>
-              <a:rPr lang="en-US" sz="4000" dirty="0">
-                <a:solidFill>
-                  <a:srgbClr val="111111"/>
-                </a:solidFill>
-                <a:latin typeface="Times New Roman" pitchFamily="34" charset="0"/>
-                <a:ea typeface="Times New Roman" pitchFamily="34" charset="-122"/>
-                <a:cs typeface="Times New Roman" pitchFamily="34" charset="-120"/>
-              </a:rPr>
-              <a:t>Advantages: shows trends and allows prediction.</a:t>
+              <a:t>Line graphs show trends clearly and allow prediction. However, several lines can confuse the reader, and a trend does not show its causes.</a:t>
             </a:r>
             <a:endParaRPr lang="en-US" sz="4000" dirty="0"/>
           </a:p>
@@ -18432,9 +18493,129 @@
           </a:p>
         </p:txBody>
       </p:sp>
+      <p:sp>
+        <p:nvSpPr>
+          <p:cNvPr id="3" name="Text 1"/>
+          <p:cNvSpPr/>
+          <p:nvPr/>
+        </p:nvSpPr>
+        <p:spPr>
+          <a:xfrm>
+            <a:off x="365760" y="1005840"/>
+            <a:ext cx="11460175" cy="731520"/>
+          </a:xfrm>
+          <a:prstGeom prst="rect">
+            <a:avLst/>
+          </a:prstGeom>
+          <a:noFill/>
+          <a:ln/>
+        </p:spPr>
+        <p:txBody>
+          <a:bodyPr wrap="square" lIns="0" tIns="0" rIns="0" bIns="0" rtlCol="0" anchor="ctr">
+            <a:normAutofit/>
+          </a:bodyPr>
+          <a:lstStyle/>
+          <a:p>
+            <a:pPr algn="ctr" indent="0" marL="0">
+              <a:buNone/>
+            </a:pPr>
+            <a:r>
+              <a:rPr lang="en-US" sz="3600" b="1" dirty="0">
+                <a:solidFill>
+                  <a:srgbClr val="990011"/>
+                </a:solidFill>
+                <a:latin typeface="Times New Roman" pitchFamily="34" charset="0"/>
+                <a:ea typeface="Times New Roman" pitchFamily="34" charset="-122"/>
+                <a:cs typeface="Times New Roman" pitchFamily="34" charset="-120"/>
+              </a:rPr>
+              <a:t>3. Cumulative Frequency Curves (Ogives)</a:t>
+            </a:r>
+            <a:endParaRPr lang="en-US" sz="3600" dirty="0"/>
+          </a:p>
+        </p:txBody>
+      </p:sp>
+      <p:sp>
+        <p:nvSpPr>
+          <p:cNvPr id="4" name="Text 2"/>
+          <p:cNvSpPr/>
+          <p:nvPr/>
+        </p:nvSpPr>
+        <p:spPr>
+          <a:xfrm>
+            <a:off x="365760" y="1783080"/>
+            <a:ext cx="6035040" cy="4617720"/>
+          </a:xfrm>
+          <a:prstGeom prst="rect">
+            <a:avLst/>
+          </a:prstGeom>
+          <a:noFill/>
+          <a:ln/>
+        </p:spPr>
+        <p:txBody>
+          <a:bodyPr wrap="square" lIns="0" tIns="0" rIns="0" bIns="0" rtlCol="0" anchor="t"/>
+          <a:lstStyle/>
+          <a:p>
+            <a:pPr algn="l" indent="0" marL="0">
+              <a:spcAft>
+                <a:spcPts val="800"/>
+              </a:spcAft>
+              <a:buNone/>
+            </a:pPr>
+            <a:r>
+              <a:rPr lang="en-US" sz="3200" i="1" dirty="0">
+                <a:solidFill>
+                  <a:srgbClr val="111111"/>
+                </a:solidFill>
+                <a:latin typeface="Times New Roman" pitchFamily="34" charset="0"/>
+                <a:ea typeface="Times New Roman" pitchFamily="34" charset="-122"/>
+                <a:cs typeface="Times New Roman" pitchFamily="34" charset="-120"/>
+              </a:rPr>
+              <a:t>Ogives are constructed and interpreted as follows:</a:t>
+            </a:r>
+            <a:endParaRPr lang="en-US" sz="3200" dirty="0"/>
+          </a:p>
+          <a:p>
+            <a:pPr algn="l" indent="0" marL="0">
+              <a:spcAft>
+                <a:spcPts val="800"/>
+              </a:spcAft>
+              <a:buNone/>
+            </a:pPr>
+            <a:r>
+              <a:rPr lang="en-US" sz="3200" b="1" dirty="0">
+                <a:solidFill>
+                  <a:srgbClr val="111111"/>
+                </a:solidFill>
+                <a:latin typeface="Times New Roman" pitchFamily="34" charset="0"/>
+                <a:ea typeface="Times New Roman" pitchFamily="34" charset="-122"/>
+                <a:cs typeface="Times New Roman" pitchFamily="34" charset="-120"/>
+              </a:rPr>
+              <a:t>Construction: </a:t>
+            </a:r>
+            <a:pPr algn="l" indent="0" marL="0">
+              <a:spcAft>
+                <a:spcPts val="800"/>
+              </a:spcAft>
+              <a:buNone/>
+            </a:pPr>
+            <a:r>
+              <a:rPr lang="en-US" sz="3200" dirty="0">
+                <a:solidFill>
+                  <a:srgbClr val="111111"/>
+                </a:solidFill>
+                <a:latin typeface="Times New Roman" pitchFamily="34" charset="0"/>
+                <a:ea typeface="Times New Roman" pitchFamily="34" charset="-122"/>
+                <a:cs typeface="Times New Roman" pitchFamily="34" charset="-120"/>
+              </a:rPr>
+              <a:t>Make a frequency table and add the frequencies progressively to obtain the cumulative frequencies. Plot each cumulative frequency against the upper limit of its class and join the points with a smooth curve.</a:t>
+            </a:r>
+            <a:endParaRPr lang="en-US" sz="3200" dirty="0"/>
+          </a:p>
+        </p:txBody>
+      </p:sp>
       <p:pic>
         <p:nvPicPr>
-          <p:cNvPr id="3" name="Image 0" descr="/home/claude/f4/img/minesec_sheet.png">    </p:cNvPr>
+          <p:cNvPr id="5" name="Image 0" descr="/home/claude/f4/img/v2/stat2_ogive.png">    </p:cNvPr>
           <p:cNvPicPr>
             <a:picLocks noChangeAspect="1"/>
           </p:cNvPicPr>
@@ -18448,8 +18629,8 @@
         </p:blipFill>
         <p:spPr>
           <a:xfrm>
-            <a:off x="0" y="658368"/>
-            <a:ext cx="5120640" cy="5833872"/>
+            <a:off x="6537960" y="2721454"/>
+            <a:ext cx="5470855" cy="2393499"/>
           </a:xfrm>
           <a:prstGeom prst="rect">
             <a:avLst/>
@@ -18458,14 +18639,14 @@
       </p:pic>
       <p:sp>
         <p:nvSpPr>
-          <p:cNvPr id="4" name="Text 1"/>
+          <p:cNvPr id="6" name="Text 3"/>
           <p:cNvSpPr/>
           <p:nvPr/>
         </p:nvSpPr>
         <p:spPr>
           <a:xfrm>
-            <a:off x="5349240" y="1005840"/>
-            <a:ext cx="6522415" cy="731520"/>
+            <a:off x="6537960" y="6089904"/>
+            <a:ext cx="5470855" cy="347472"/>
           </a:xfrm>
           <a:prstGeom prst="rect">
             <a:avLst/>
@@ -18474,69 +18655,24 @@
           <a:ln/>
         </p:spPr>
         <p:txBody>
-          <a:bodyPr wrap="square" lIns="0" tIns="0" rIns="0" bIns="0" rtlCol="0" anchor="ctr">
-            <a:normAutofit/>
-          </a:bodyPr>
+          <a:bodyPr wrap="square" lIns="0" tIns="0" rIns="0" bIns="0" rtlCol="0" anchor="ctr"/>
           <a:lstStyle/>
           <a:p>
             <a:pPr algn="ctr" indent="0" marL="0">
               <a:buNone/>
             </a:pPr>
             <a:r>
-              <a:rPr lang="en-US" sz="3600" b="1" dirty="0">
-                <a:solidFill>
-                  <a:srgbClr val="990011"/>
+              <a:rPr lang="en-US" sz="1600" i="1" dirty="0">
+                <a:solidFill>
+                  <a:srgbClr val="555555"/>
                 </a:solidFill>
                 <a:latin typeface="Times New Roman" pitchFamily="34" charset="0"/>
                 <a:ea typeface="Times New Roman" pitchFamily="34" charset="-122"/>
                 <a:cs typeface="Times New Roman" pitchFamily="34" charset="-120"/>
               </a:rPr>
-              <a:t>2. Line Graphs (continued)</a:t>
-            </a:r>
-            <a:endParaRPr lang="en-US" sz="3600" dirty="0"/>
-          </a:p>
-        </p:txBody>
-      </p:sp>
-      <p:sp>
-        <p:nvSpPr>
-          <p:cNvPr id="5" name="Text 2"/>
-          <p:cNvSpPr/>
-          <p:nvPr/>
-        </p:nvSpPr>
-        <p:spPr>
-          <a:xfrm>
-            <a:off x="5349240" y="1783080"/>
-            <a:ext cx="6522415" cy="4663440"/>
-          </a:xfrm>
-          <a:prstGeom prst="rect">
-            <a:avLst/>
-          </a:prstGeom>
-          <a:noFill/>
-          <a:ln/>
-        </p:spPr>
-        <p:txBody>
-          <a:bodyPr wrap="square" lIns="0" tIns="0" rIns="0" bIns="0" rtlCol="0" anchor="t"/>
-          <a:lstStyle/>
-          <a:p>
-            <a:pPr algn="l" marL="342900" indent="-342900">
-              <a:spcAft>
-                <a:spcPts val="800"/>
-              </a:spcAft>
-              <a:buSzPct val="100000"/>
-              <a:buChar char="•"/>
-            </a:pPr>
-            <a:r>
-              <a:rPr lang="en-US" sz="4000" dirty="0">
-                <a:solidFill>
-                  <a:srgbClr val="111111"/>
-                </a:solidFill>
-                <a:latin typeface="Times New Roman" pitchFamily="34" charset="0"/>
-                <a:ea typeface="Times New Roman" pitchFamily="34" charset="-122"/>
-                <a:cs typeface="Times New Roman" pitchFamily="34" charset="-120"/>
-              </a:rPr>
-              <a:t>Disadvantages: several lines confuse; it shows trends but not causes.</a:t>
-            </a:r>
-            <a:endParaRPr lang="en-US" sz="4000" dirty="0"/>
+              <a:t>Illustration: an ogive</a:t>
+            </a:r>
+            <a:endParaRPr lang="en-US" sz="1600" dirty="0"/>
           </a:p>
         </p:txBody>
       </p:sp>
@@ -18652,129 +18788,9 @@
           </a:p>
         </p:txBody>
       </p:sp>
-      <p:sp>
-        <p:nvSpPr>
-          <p:cNvPr id="3" name="Text 1"/>
-          <p:cNvSpPr/>
-          <p:nvPr/>
-        </p:nvSpPr>
-        <p:spPr>
-          <a:xfrm>
-            <a:off x="365760" y="1005840"/>
-            <a:ext cx="11460175" cy="731520"/>
-          </a:xfrm>
-          <a:prstGeom prst="rect">
-            <a:avLst/>
-          </a:prstGeom>
-          <a:noFill/>
-          <a:ln/>
-        </p:spPr>
-        <p:txBody>
-          <a:bodyPr wrap="square" lIns="0" tIns="0" rIns="0" bIns="0" rtlCol="0" anchor="ctr">
-            <a:normAutofit/>
-          </a:bodyPr>
-          <a:lstStyle/>
-          <a:p>
-            <a:pPr algn="ctr" indent="0" marL="0">
-              <a:buNone/>
-            </a:pPr>
-            <a:r>
-              <a:rPr lang="en-US" sz="3600" b="1" dirty="0">
-                <a:solidFill>
-                  <a:srgbClr val="990011"/>
-                </a:solidFill>
-                <a:latin typeface="Times New Roman" pitchFamily="34" charset="0"/>
-                <a:ea typeface="Times New Roman" pitchFamily="34" charset="-122"/>
-                <a:cs typeface="Times New Roman" pitchFamily="34" charset="-120"/>
-              </a:rPr>
-              <a:t>3. Ogives and Climographs</a:t>
-            </a:r>
-            <a:endParaRPr lang="en-US" sz="3600" dirty="0"/>
-          </a:p>
-        </p:txBody>
-      </p:sp>
-      <p:sp>
-        <p:nvSpPr>
-          <p:cNvPr id="4" name="Text 2"/>
-          <p:cNvSpPr/>
-          <p:nvPr/>
-        </p:nvSpPr>
-        <p:spPr>
-          <a:xfrm>
-            <a:off x="365760" y="1783080"/>
-            <a:ext cx="4846320" cy="4617720"/>
-          </a:xfrm>
-          <a:prstGeom prst="rect">
-            <a:avLst/>
-          </a:prstGeom>
-          <a:noFill/>
-          <a:ln/>
-        </p:spPr>
-        <p:txBody>
-          <a:bodyPr wrap="square" lIns="0" tIns="0" rIns="0" bIns="0" rtlCol="0" anchor="t"/>
-          <a:lstStyle/>
-          <a:p>
-            <a:pPr algn="l" indent="0" marL="0">
-              <a:spcAft>
-                <a:spcPts val="800"/>
-              </a:spcAft>
-              <a:buNone/>
-            </a:pPr>
-            <a:r>
-              <a:rPr lang="en-US" sz="3200" i="1" dirty="0">
-                <a:solidFill>
-                  <a:srgbClr val="111111"/>
-                </a:solidFill>
-                <a:latin typeface="Times New Roman" pitchFamily="34" charset="0"/>
-                <a:ea typeface="Times New Roman" pitchFamily="34" charset="-122"/>
-                <a:cs typeface="Times New Roman" pitchFamily="34" charset="-120"/>
-              </a:rPr>
-              <a:t>Ogives and climographs are drawn and used as follows:</a:t>
-            </a:r>
-            <a:endParaRPr lang="en-US" sz="3200" dirty="0"/>
-          </a:p>
-          <a:p>
-            <a:pPr algn="l" indent="0" marL="0">
-              <a:spcAft>
-                <a:spcPts val="800"/>
-              </a:spcAft>
-              <a:buNone/>
-            </a:pPr>
-            <a:r>
-              <a:rPr lang="en-US" sz="3200" b="1" dirty="0">
-                <a:solidFill>
-                  <a:srgbClr val="111111"/>
-                </a:solidFill>
-                <a:latin typeface="Times New Roman" pitchFamily="34" charset="0"/>
-                <a:ea typeface="Times New Roman" pitchFamily="34" charset="-122"/>
-                <a:cs typeface="Times New Roman" pitchFamily="34" charset="-120"/>
-              </a:rPr>
-              <a:t>Ogive steps: </a:t>
-            </a:r>
-            <a:pPr algn="l" indent="0" marL="0">
-              <a:spcAft>
-                <a:spcPts val="800"/>
-              </a:spcAft>
-              <a:buNone/>
-            </a:pPr>
-            <a:r>
-              <a:rPr lang="en-US" sz="3200" dirty="0">
-                <a:solidFill>
-                  <a:srgbClr val="111111"/>
-                </a:solidFill>
-                <a:latin typeface="Times New Roman" pitchFamily="34" charset="0"/>
-                <a:ea typeface="Times New Roman" pitchFamily="34" charset="-122"/>
-                <a:cs typeface="Times New Roman" pitchFamily="34" charset="-120"/>
-              </a:rPr>
-              <a:t>Make a frequency table, add frequencies progressively and plot cumulative frequency against the upper class limits.</a:t>
-            </a:r>
-            <a:endParaRPr lang="en-US" sz="3200" dirty="0"/>
-          </a:p>
-        </p:txBody>
-      </p:sp>
       <p:pic>
         <p:nvPicPr>
-          <p:cNvPr id="5" name="Image 0" descr="/home/claude/f4/img/v2/stat2_ogive.png">    </p:cNvPr>
+          <p:cNvPr id="3" name="Image 0" descr="/home/claude/f4/img/minesec_sheet.png">    </p:cNvPr>
           <p:cNvPicPr>
             <a:picLocks noChangeAspect="1"/>
           </p:cNvPicPr>
@@ -18788,8 +18804,8 @@
         </p:blipFill>
         <p:spPr>
           <a:xfrm>
-            <a:off x="5349240" y="2461422"/>
-            <a:ext cx="6659575" cy="2913564"/>
+            <a:off x="0" y="658368"/>
+            <a:ext cx="5120640" cy="5833872"/>
           </a:xfrm>
           <a:prstGeom prst="rect">
             <a:avLst/>
@@ -18798,14 +18814,14 @@
       </p:pic>
       <p:sp>
         <p:nvSpPr>
-          <p:cNvPr id="6" name="Text 3"/>
+          <p:cNvPr id="4" name="Text 1"/>
           <p:cNvSpPr/>
           <p:nvPr/>
         </p:nvSpPr>
         <p:spPr>
           <a:xfrm>
-            <a:off x="5349240" y="6089904"/>
-            <a:ext cx="6659575" cy="347472"/>
+            <a:off x="5349240" y="1005840"/>
+            <a:ext cx="6522415" cy="731520"/>
           </a:xfrm>
           <a:prstGeom prst="rect">
             <a:avLst/>
@@ -18814,24 +18830,85 @@
           <a:ln/>
         </p:spPr>
         <p:txBody>
-          <a:bodyPr wrap="square" lIns="0" tIns="0" rIns="0" bIns="0" rtlCol="0" anchor="ctr"/>
+          <a:bodyPr wrap="square" lIns="0" tIns="0" rIns="0" bIns="0" rtlCol="0" anchor="ctr">
+            <a:normAutofit/>
+          </a:bodyPr>
           <a:lstStyle/>
           <a:p>
             <a:pPr algn="ctr" indent="0" marL="0">
               <a:buNone/>
             </a:pPr>
             <a:r>
-              <a:rPr lang="en-US" sz="1600" i="1" dirty="0">
-                <a:solidFill>
-                  <a:srgbClr val="555555"/>
+              <a:rPr lang="en-US" sz="3600" b="1" dirty="0">
+                <a:solidFill>
+                  <a:srgbClr val="990011"/>
                 </a:solidFill>
                 <a:latin typeface="Times New Roman" pitchFamily="34" charset="0"/>
                 <a:ea typeface="Times New Roman" pitchFamily="34" charset="-122"/>
                 <a:cs typeface="Times New Roman" pitchFamily="34" charset="-120"/>
               </a:rPr>
-              <a:t>Illustration: an ogive</a:t>
-            </a:r>
-            <a:endParaRPr lang="en-US" sz="1600" dirty="0"/>
+              <a:t>3. Cumulative Frequency Curves (Ogives)</a:t>
+            </a:r>
+            <a:endParaRPr lang="en-US" sz="3600" dirty="0"/>
+          </a:p>
+        </p:txBody>
+      </p:sp>
+      <p:sp>
+        <p:nvSpPr>
+          <p:cNvPr id="5" name="Text 2"/>
+          <p:cNvSpPr/>
+          <p:nvPr/>
+        </p:nvSpPr>
+        <p:spPr>
+          <a:xfrm>
+            <a:off x="5349240" y="1783080"/>
+            <a:ext cx="6522415" cy="4663440"/>
+          </a:xfrm>
+          <a:prstGeom prst="rect">
+            <a:avLst/>
+          </a:prstGeom>
+          <a:noFill/>
+          <a:ln/>
+        </p:spPr>
+        <p:txBody>
+          <a:bodyPr wrap="square" lIns="0" tIns="0" rIns="0" bIns="0" rtlCol="0" anchor="t"/>
+          <a:lstStyle/>
+          <a:p>
+            <a:pPr algn="l" indent="0" marL="0">
+              <a:spcAft>
+                <a:spcPts val="800"/>
+              </a:spcAft>
+              <a:buNone/>
+            </a:pPr>
+            <a:r>
+              <a:rPr lang="en-US" sz="4000" b="1" dirty="0">
+                <a:solidFill>
+                  <a:srgbClr val="111111"/>
+                </a:solidFill>
+                <a:latin typeface="Times New Roman" pitchFamily="34" charset="0"/>
+                <a:ea typeface="Times New Roman" pitchFamily="34" charset="-122"/>
+                <a:cs typeface="Times New Roman" pitchFamily="34" charset="-120"/>
+              </a:rPr>
+              <a:t>Example: </a:t>
+            </a:r>
+            <a:pPr algn="l" indent="0" marL="0">
+              <a:spcAft>
+                <a:spcPts val="800"/>
+              </a:spcAft>
+              <a:buNone/>
+            </a:pPr>
+            <a:r>
+              <a:rPr lang="en-US" sz="4000" dirty="0">
+                <a:solidFill>
+                  <a:srgbClr val="111111"/>
+                </a:solidFill>
+                <a:latin typeface="Times New Roman" pitchFamily="34" charset="0"/>
+                <a:ea typeface="Times New Roman" pitchFamily="34" charset="-122"/>
+                <a:cs typeface="Times New Roman" pitchFamily="34" charset="-120"/>
+              </a:rPr>
+              <a:t>The scores of 25 students give the points (10, 2), (20, 7), (30, 15), (40, 21) and (50, 25). The median, read at the 12.5th student, is about 27 marks.</a:t>
+            </a:r>
+            <a:endParaRPr lang="en-US" sz="4000" dirty="0"/>
           </a:p>
         </p:txBody>
       </p:sp>
@@ -19006,7 +19083,7 @@
                 <a:ea typeface="Times New Roman" pitchFamily="34" charset="-122"/>
                 <a:cs typeface="Times New Roman" pitchFamily="34" charset="-120"/>
               </a:rPr>
-              <a:t>3. Ogives and Climographs</a:t>
+              <a:t>3. Cumulative Frequency Curves (Ogives)</a:t>
             </a:r>
             <a:endParaRPr lang="en-US" sz="3600" dirty="0"/>
           </a:p>
@@ -19048,7 +19125,7 @@
                 <a:ea typeface="Times New Roman" pitchFamily="34" charset="-122"/>
                 <a:cs typeface="Times New Roman" pitchFamily="34" charset="-120"/>
               </a:rPr>
-              <a:t>Ogive example: </a:t>
+              <a:t>Assessment: </a:t>
             </a:r>
             <a:pPr algn="l" indent="0" marL="0">
               <a:spcAft>
@@ -19065,7 +19142,7 @@
                 <a:ea typeface="Times New Roman" pitchFamily="34" charset="-122"/>
                 <a:cs typeface="Times New Roman" pitchFamily="34" charset="-120"/>
               </a:rPr>
-              <a:t>Scores of 25 students give points (10, 2), (20, 7), (30, 15), (40, 21) and (50, 25); the median (12.5th student) is about 27 marks.</a:t>
+              <a:t>Ogives allow the median and quartiles to be read quickly from the graph. However, they hide the frequency of each class.</a:t>
             </a:r>
             <a:endParaRPr lang="en-US" sz="4000" dirty="0"/>
           </a:p>
@@ -19218,7 +19295,7 @@
                 <a:ea typeface="Times New Roman" pitchFamily="34" charset="-122"/>
                 <a:cs typeface="Times New Roman" pitchFamily="34" charset="-120"/>
               </a:rPr>
-              <a:t>3. Ogives and Climographs</a:t>
+              <a:t>4. Climographs</a:t>
             </a:r>
             <a:endParaRPr lang="en-US" sz="3600" dirty="0"/>
           </a:p>
@@ -19233,7 +19310,7 @@
         <p:spPr>
           <a:xfrm>
             <a:off x="365760" y="1783080"/>
-            <a:ext cx="4846320" cy="4617720"/>
+            <a:ext cx="6035040" cy="4617720"/>
           </a:xfrm>
           <a:prstGeom prst="rect">
             <a:avLst/>
@@ -19252,7 +19329,7 @@
               <a:buNone/>
             </a:pPr>
             <a:r>
-              <a:rPr lang="en-US" sz="3600" b="1" dirty="0">
+              <a:rPr lang="en-US" sz="3600" i="1" dirty="0">
                 <a:solidFill>
                   <a:srgbClr val="111111"/>
                 </a:solidFill>
@@ -19260,8 +19337,11 @@
                 <a:ea typeface="Times New Roman" pitchFamily="34" charset="-122"/>
                 <a:cs typeface="Times New Roman" pitchFamily="34" charset="-120"/>
               </a:rPr>
-              <a:t>Climograph steps: </a:t>
-            </a:r>
+              <a:t>Climographs are constructed and interpreted as follows:</a:t>
+            </a:r>
+            <a:endParaRPr lang="en-US" sz="3600" dirty="0"/>
+          </a:p>
+          <a:p>
             <a:pPr algn="l" indent="0" marL="0">
               <a:spcAft>
                 <a:spcPts val="800"/>
@@ -19269,7 +19349,7 @@
               <a:buNone/>
             </a:pPr>
             <a:r>
-              <a:rPr lang="en-US" sz="3600" dirty="0">
+              <a:rPr lang="en-US" sz="3600" b="1" dirty="0">
                 <a:solidFill>
                   <a:srgbClr val="111111"/>
                 </a:solidFill>
@@ -19277,7 +19357,24 @@
                 <a:ea typeface="Times New Roman" pitchFamily="34" charset="-122"/>
                 <a:cs typeface="Times New Roman" pitchFamily="34" charset="-120"/>
               </a:rPr>
-              <a:t>Months on the x-axis, rainfall as bars on one y-axis and temperature as a line on the other.</a:t>
+              <a:t>Construction: </a:t>
+            </a:r>
+            <a:pPr algn="l" indent="0" marL="0">
+              <a:spcAft>
+                <a:spcPts val="800"/>
+              </a:spcAft>
+              <a:buNone/>
+            </a:pPr>
+            <a:r>
+              <a:rPr lang="en-US" sz="3600" dirty="0">
+                <a:solidFill>
+                  <a:srgbClr val="111111"/>
+                </a:solidFill>
+                <a:latin typeface="Times New Roman" pitchFamily="34" charset="0"/>
+                <a:ea typeface="Times New Roman" pitchFamily="34" charset="-122"/>
+                <a:cs typeface="Times New Roman" pitchFamily="34" charset="-120"/>
+              </a:rPr>
+              <a:t>Put the months on the x-axis, rainfall as bars on the left y-axis and temperature as a line on the right y-axis. Each axis must have its own scale and units.</a:t>
             </a:r>
             <a:endParaRPr lang="en-US" sz="3600" dirty="0"/>
           </a:p>
@@ -19299,8 +19396,8 @@
         </p:blipFill>
         <p:spPr>
           <a:xfrm>
-            <a:off x="5349240" y="2461422"/>
-            <a:ext cx="6659575" cy="2913564"/>
+            <a:off x="6537960" y="2721454"/>
+            <a:ext cx="5470855" cy="2393499"/>
           </a:xfrm>
           <a:prstGeom prst="rect">
             <a:avLst/>
@@ -19315,8 +19412,8 @@
         </p:nvSpPr>
         <p:spPr>
           <a:xfrm>
-            <a:off x="5349240" y="6089904"/>
-            <a:ext cx="6659575" cy="347472"/>
+            <a:off x="6537960" y="6089904"/>
+            <a:ext cx="5470855" cy="347472"/>
           </a:xfrm>
           <a:prstGeom prst="rect">
             <a:avLst/>
@@ -19694,7 +19791,7 @@
         <p:spPr>
           <a:xfrm>
             <a:off x="0" y="658368"/>
-            <a:ext cx="5120640" cy="5833872"/>
+            <a:ext cx="3840480" cy="5833872"/>
           </a:xfrm>
           <a:prstGeom prst="rect">
             <a:avLst/>
@@ -19709,8 +19806,8 @@
         </p:nvSpPr>
         <p:spPr>
           <a:xfrm>
-            <a:off x="5349240" y="1005840"/>
-            <a:ext cx="6522415" cy="731520"/>
+            <a:off x="4069080" y="1005840"/>
+            <a:ext cx="7802575" cy="731520"/>
           </a:xfrm>
           <a:prstGeom prst="rect">
             <a:avLst/>
@@ -19736,7 +19833,7 @@
                 <a:ea typeface="Times New Roman" pitchFamily="34" charset="-122"/>
                 <a:cs typeface="Times New Roman" pitchFamily="34" charset="-120"/>
               </a:rPr>
-              <a:t>3. Ogives and Climographs</a:t>
+              <a:t>4. Climographs</a:t>
             </a:r>
             <a:endParaRPr lang="en-US" sz="3600" dirty="0"/>
           </a:p>
@@ -19750,8 +19847,8 @@
         </p:nvSpPr>
         <p:spPr>
           <a:xfrm>
-            <a:off x="5349240" y="1783080"/>
-            <a:ext cx="6522415" cy="4663440"/>
+            <a:off x="4069080" y="1783080"/>
+            <a:ext cx="7802575" cy="4663440"/>
           </a:xfrm>
           <a:prstGeom prst="rect">
             <a:avLst/>
@@ -19778,7 +19875,7 @@
                 <a:ea typeface="Times New Roman" pitchFamily="34" charset="-122"/>
                 <a:cs typeface="Times New Roman" pitchFamily="34" charset="-120"/>
               </a:rPr>
-              <a:t>Climograph of Garoua: </a:t>
+              <a:t>Example of Garoua: </a:t>
             </a:r>
             <a:pPr algn="l" indent="0" marL="0">
               <a:spcAft>
@@ -19795,7 +19892,7 @@
                 <a:ea typeface="Times New Roman" pitchFamily="34" charset="-122"/>
                 <a:cs typeface="Times New Roman" pitchFamily="34" charset="-120"/>
               </a:rPr>
-              <a:t>It shows a rainy season from May to September–October with a peak in August, and a hot dry season with a maximum in March–April.</a:t>
+              <a:t>The climograph of Garoua shows a rainy season from May to October with a peak in August. It also shows a hot dry season with the highest temperatures in March and April.</a:t>
             </a:r>
             <a:endParaRPr lang="en-US" sz="4000" dirty="0"/>
           </a:p>
@@ -19930,7 +20027,7 @@
         <p:spPr>
           <a:xfrm>
             <a:off x="0" y="658368"/>
-            <a:ext cx="1463040" cy="5833872"/>
+            <a:ext cx="5120640" cy="5833872"/>
           </a:xfrm>
           <a:prstGeom prst="rect">
             <a:avLst/>
@@ -19945,8 +20042,8 @@
         </p:nvSpPr>
         <p:spPr>
           <a:xfrm>
-            <a:off x="1691640" y="1005840"/>
-            <a:ext cx="10180015" cy="731520"/>
+            <a:off x="5349240" y="1005840"/>
+            <a:ext cx="6522415" cy="731520"/>
           </a:xfrm>
           <a:prstGeom prst="rect">
             <a:avLst/>
@@ -19972,7 +20069,7 @@
                 <a:ea typeface="Times New Roman" pitchFamily="34" charset="-122"/>
                 <a:cs typeface="Times New Roman" pitchFamily="34" charset="-120"/>
               </a:rPr>
-              <a:t>3. Ogives and Climographs (continued)</a:t>
+              <a:t>4. Climographs</a:t>
             </a:r>
             <a:endParaRPr lang="en-US" sz="3600" dirty="0"/>
           </a:p>
@@ -19986,8 +20083,8 @@
         </p:nvSpPr>
         <p:spPr>
           <a:xfrm>
-            <a:off x="1691640" y="1783080"/>
-            <a:ext cx="10180015" cy="4663440"/>
+            <a:off x="5349240" y="1783080"/>
+            <a:ext cx="6522415" cy="4663440"/>
           </a:xfrm>
           <a:prstGeom prst="rect">
             <a:avLst/>
@@ -20014,17 +20111,13 @@
                 <a:ea typeface="Times New Roman" pitchFamily="34" charset="-122"/>
                 <a:cs typeface="Times New Roman" pitchFamily="34" charset="-120"/>
               </a:rPr>
-              <a:t>Assessment:</a:t>
-            </a:r>
-            <a:endParaRPr lang="en-US" sz="4000" dirty="0"/>
-          </a:p>
-          <a:p>
-            <a:pPr algn="l" marL="342900" indent="-342900">
+              <a:t>Assessment: </a:t>
+            </a:r>
+            <a:pPr algn="l" indent="0" marL="0">
               <a:spcAft>
                 <a:spcPts val="800"/>
               </a:spcAft>
-              <a:buSzPct val="100000"/>
-              <a:buChar char="•"/>
+              <a:buNone/>
             </a:pPr>
             <a:r>
               <a:rPr lang="en-US" sz="4000" dirty="0">
@@ -20035,28 +20128,7 @@
                 <a:ea typeface="Times New Roman" pitchFamily="34" charset="-122"/>
                 <a:cs typeface="Times New Roman" pitchFamily="34" charset="-120"/>
               </a:rPr>
-              <a:t>Advantages: ogives give medians and quartiles; climographs compare rainfall and temperature month by month.</a:t>
-            </a:r>
-            <a:endParaRPr lang="en-US" sz="4000" dirty="0"/>
-          </a:p>
-          <a:p>
-            <a:pPr algn="l" marL="342900" indent="-342900">
-              <a:spcAft>
-                <a:spcPts val="800"/>
-              </a:spcAft>
-              <a:buSzPct val="100000"/>
-              <a:buChar char="•"/>
-            </a:pPr>
-            <a:r>
-              <a:rPr lang="en-US" sz="4000" dirty="0">
-                <a:solidFill>
-                  <a:srgbClr val="111111"/>
-                </a:solidFill>
-                <a:latin typeface="Times New Roman" pitchFamily="34" charset="0"/>
-                <a:ea typeface="Times New Roman" pitchFamily="34" charset="-122"/>
-                <a:cs typeface="Times New Roman" pitchFamily="34" charset="-120"/>
-              </a:rPr>
-              <a:t>Disadvantages: ogives hide class frequencies; two axes may confuse readers.</a:t>
+              <a:t>Climographs compare rainfall and temperature month by month on one graph. However, the two axes may confuse beginners.</a:t>
             </a:r>
             <a:endParaRPr lang="en-US" sz="4000" dirty="0"/>
           </a:p>
@@ -20209,7 +20281,7 @@
                 <a:ea typeface="Times New Roman" pitchFamily="34" charset="-122"/>
                 <a:cs typeface="Times New Roman" pitchFamily="34" charset="-120"/>
               </a:rPr>
-              <a:t>4. Pie Charts and Triangular Graphs</a:t>
+              <a:t>5. Pie Charts</a:t>
             </a:r>
             <a:endParaRPr lang="en-US" sz="3600" dirty="0"/>
           </a:p>
@@ -20224,7 +20296,7 @@
         <p:spPr>
           <a:xfrm>
             <a:off x="365760" y="1783080"/>
-            <a:ext cx="4846320" cy="4617720"/>
+            <a:ext cx="6035040" cy="4617720"/>
           </a:xfrm>
           <a:prstGeom prst="rect">
             <a:avLst/>
@@ -20243,7 +20315,7 @@
               <a:buNone/>
             </a:pPr>
             <a:r>
-              <a:rPr lang="en-US" sz="3200" i="1" dirty="0">
+              <a:rPr lang="en-US" sz="3600" i="1" dirty="0">
                 <a:solidFill>
                   <a:srgbClr val="111111"/>
                 </a:solidFill>
@@ -20251,9 +20323,9 @@
                 <a:ea typeface="Times New Roman" pitchFamily="34" charset="-122"/>
                 <a:cs typeface="Times New Roman" pitchFamily="34" charset="-120"/>
               </a:rPr>
-              <a:t>Pie charts and triangular graphs are drawn and used as follows:</a:t>
-            </a:r>
-            <a:endParaRPr lang="en-US" sz="3200" dirty="0"/>
+              <a:t>Pie charts are constructed and interpreted as follows:</a:t>
+            </a:r>
+            <a:endParaRPr lang="en-US" sz="3600" dirty="0"/>
           </a:p>
           <a:p>
             <a:pPr algn="l" indent="0" marL="0">
@@ -20263,7 +20335,7 @@
               <a:buNone/>
             </a:pPr>
             <a:r>
-              <a:rPr lang="en-US" sz="3200" b="1" dirty="0">
+              <a:rPr lang="en-US" sz="3600" b="1" dirty="0">
                 <a:solidFill>
                   <a:srgbClr val="111111"/>
                 </a:solidFill>
@@ -20271,7 +20343,7 @@
                 <a:ea typeface="Times New Roman" pitchFamily="34" charset="-122"/>
                 <a:cs typeface="Times New Roman" pitchFamily="34" charset="-120"/>
               </a:rPr>
-              <a:t>Pie chart steps: </a:t>
+              <a:t>Construction: </a:t>
             </a:r>
             <a:pPr algn="l" indent="0" marL="0">
               <a:spcAft>
@@ -20280,7 +20352,7 @@
               <a:buNone/>
             </a:pPr>
             <a:r>
-              <a:rPr lang="en-US" sz="3200" dirty="0">
+              <a:rPr lang="en-US" sz="3600" dirty="0">
                 <a:solidFill>
                   <a:srgbClr val="111111"/>
                 </a:solidFill>
@@ -20288,9 +20360,9 @@
                 <a:ea typeface="Times New Roman" pitchFamily="34" charset="-122"/>
                 <a:cs typeface="Times New Roman" pitchFamily="34" charset="-120"/>
               </a:rPr>
-              <a:t>Convert values to percentages, then to degrees (% × 3.6), and draw the sectors with a protractor.</a:t>
-            </a:r>
-            <a:endParaRPr lang="en-US" sz="3200" dirty="0"/>
+              <a:t>Convert the values to percentages, then to degrees by multiplying by 3.6. Draw the sectors with a protractor, starting from the top, and add a key.</a:t>
+            </a:r>
+            <a:endParaRPr lang="en-US" sz="3600" dirty="0"/>
           </a:p>
         </p:txBody>
       </p:sp>
@@ -20310,8 +20382,8 @@
         </p:blipFill>
         <p:spPr>
           <a:xfrm>
-            <a:off x="5349240" y="2461422"/>
-            <a:ext cx="6659575" cy="2913564"/>
+            <a:off x="6537960" y="2721454"/>
+            <a:ext cx="5470855" cy="2393499"/>
           </a:xfrm>
           <a:prstGeom prst="rect">
             <a:avLst/>
@@ -20326,8 +20398,8 @@
         </p:nvSpPr>
         <p:spPr>
           <a:xfrm>
-            <a:off x="5349240" y="6089904"/>
-            <a:ext cx="6659575" cy="347472"/>
+            <a:off x="6537960" y="6089904"/>
+            <a:ext cx="5470855" cy="347472"/>
           </a:xfrm>
           <a:prstGeom prst="rect">
             <a:avLst/>
@@ -20528,7 +20600,7 @@
                 <a:ea typeface="Times New Roman" pitchFamily="34" charset="-122"/>
                 <a:cs typeface="Times New Roman" pitchFamily="34" charset="-120"/>
               </a:rPr>
-              <a:t>4. Pie Charts and Triangular Graphs</a:t>
+              <a:t>5. Pie Charts</a:t>
             </a:r>
             <a:endParaRPr lang="en-US" sz="3600" dirty="0"/>
           </a:p>
@@ -20570,7 +20642,7 @@
                 <a:ea typeface="Times New Roman" pitchFamily="34" charset="-122"/>
                 <a:cs typeface="Times New Roman" pitchFamily="34" charset="-120"/>
               </a:rPr>
-              <a:t>Pie chart example: </a:t>
+              <a:t>Example: </a:t>
             </a:r>
             <a:pPr algn="l" indent="0" marL="0">
               <a:spcAft>
@@ -20587,7 +20659,7 @@
                 <a:ea typeface="Times New Roman" pitchFamily="34" charset="-122"/>
                 <a:cs typeface="Times New Roman" pitchFamily="34" charset="-120"/>
               </a:rPr>
-              <a:t>At the Ebolowa agricultural show, cereals 30 % (108°), processed food 25 % (90°), livestock 20 % (72°), tubers 15 % (54°) and others 10 % (36°).</a:t>
+              <a:t>At the Ebolowa agricultural show, cereals were 30 % (108°), processed food 25 % (90°) and livestock 20 % (72°). Tubers were 15 % (54°) and others 10 % (36°).</a:t>
             </a:r>
             <a:endParaRPr lang="en-US" sz="4000" dirty="0"/>
           </a:p>
@@ -20705,109 +20777,9 @@
           </a:p>
         </p:txBody>
       </p:sp>
-      <p:sp>
-        <p:nvSpPr>
-          <p:cNvPr id="3" name="Text 1"/>
-          <p:cNvSpPr/>
-          <p:nvPr/>
-        </p:nvSpPr>
-        <p:spPr>
-          <a:xfrm>
-            <a:off x="365760" y="1005840"/>
-            <a:ext cx="11460175" cy="731520"/>
-          </a:xfrm>
-          <a:prstGeom prst="rect">
-            <a:avLst/>
-          </a:prstGeom>
-          <a:noFill/>
-          <a:ln/>
-        </p:spPr>
-        <p:txBody>
-          <a:bodyPr wrap="square" lIns="0" tIns="0" rIns="0" bIns="0" rtlCol="0" anchor="ctr">
-            <a:normAutofit/>
-          </a:bodyPr>
-          <a:lstStyle/>
-          <a:p>
-            <a:pPr algn="ctr" indent="0" marL="0">
-              <a:buNone/>
-            </a:pPr>
-            <a:r>
-              <a:rPr lang="en-US" sz="3600" b="1" dirty="0">
-                <a:solidFill>
-                  <a:srgbClr val="990011"/>
-                </a:solidFill>
-                <a:latin typeface="Times New Roman" pitchFamily="34" charset="0"/>
-                <a:ea typeface="Times New Roman" pitchFamily="34" charset="-122"/>
-                <a:cs typeface="Times New Roman" pitchFamily="34" charset="-120"/>
-              </a:rPr>
-              <a:t>4. Pie Charts and Triangular Graphs</a:t>
-            </a:r>
-            <a:endParaRPr lang="en-US" sz="3600" dirty="0"/>
-          </a:p>
-        </p:txBody>
-      </p:sp>
-      <p:sp>
-        <p:nvSpPr>
-          <p:cNvPr id="4" name="Text 2"/>
-          <p:cNvSpPr/>
-          <p:nvPr/>
-        </p:nvSpPr>
-        <p:spPr>
-          <a:xfrm>
-            <a:off x="365760" y="1783080"/>
-            <a:ext cx="4846320" cy="4617720"/>
-          </a:xfrm>
-          <a:prstGeom prst="rect">
-            <a:avLst/>
-          </a:prstGeom>
-          <a:noFill/>
-          <a:ln/>
-        </p:spPr>
-        <p:txBody>
-          <a:bodyPr wrap="square" lIns="0" tIns="0" rIns="0" bIns="0" rtlCol="0" anchor="t"/>
-          <a:lstStyle/>
-          <a:p>
-            <a:pPr algn="l" indent="0" marL="0">
-              <a:spcAft>
-                <a:spcPts val="800"/>
-              </a:spcAft>
-              <a:buNone/>
-            </a:pPr>
-            <a:r>
-              <a:rPr lang="en-US" sz="3600" b="1" dirty="0">
-                <a:solidFill>
-                  <a:srgbClr val="111111"/>
-                </a:solidFill>
-                <a:latin typeface="Times New Roman" pitchFamily="34" charset="0"/>
-                <a:ea typeface="Times New Roman" pitchFamily="34" charset="-122"/>
-                <a:cs typeface="Times New Roman" pitchFamily="34" charset="-120"/>
-              </a:rPr>
-              <a:t>Triangular graph: </a:t>
-            </a:r>
-            <a:pPr algn="l" indent="0" marL="0">
-              <a:spcAft>
-                <a:spcPts val="800"/>
-              </a:spcAft>
-              <a:buNone/>
-            </a:pPr>
-            <a:r>
-              <a:rPr lang="en-US" sz="3600" dirty="0">
-                <a:solidFill>
-                  <a:srgbClr val="111111"/>
-                </a:solidFill>
-                <a:latin typeface="Times New Roman" pitchFamily="34" charset="0"/>
-                <a:ea typeface="Times New Roman" pitchFamily="34" charset="-122"/>
-                <a:cs typeface="Times New Roman" pitchFamily="34" charset="-120"/>
-              </a:rPr>
-              <a:t>It shows three components that total 100 %, such as a rock of 50 % quartz, 30 % feldspar and 20 % mica, or soil texture.</a:t>
-            </a:r>
-            <a:endParaRPr lang="en-US" sz="3600" dirty="0"/>
-          </a:p>
-        </p:txBody>
-      </p:sp>
       <p:pic>
         <p:nvPicPr>
-          <p:cNvPr id="5" name="Image 0" descr="/home/claude/f4/img/v2/stat2_triangle.png">    </p:cNvPr>
+          <p:cNvPr id="3" name="Image 0" descr="/home/claude/f4/img/minesec_sheet.png">    </p:cNvPr>
           <p:cNvPicPr>
             <a:picLocks noChangeAspect="1"/>
           </p:cNvPicPr>
@@ -20821,8 +20793,8 @@
         </p:blipFill>
         <p:spPr>
           <a:xfrm>
-            <a:off x="5349240" y="2617506"/>
-            <a:ext cx="6659575" cy="2601397"/>
+            <a:off x="0" y="658368"/>
+            <a:ext cx="5120640" cy="5833872"/>
           </a:xfrm>
           <a:prstGeom prst="rect">
             <a:avLst/>
@@ -20831,14 +20803,14 @@
       </p:pic>
       <p:sp>
         <p:nvSpPr>
-          <p:cNvPr id="6" name="Text 3"/>
+          <p:cNvPr id="4" name="Text 1"/>
           <p:cNvSpPr/>
           <p:nvPr/>
         </p:nvSpPr>
         <p:spPr>
           <a:xfrm>
-            <a:off x="5349240" y="6089904"/>
-            <a:ext cx="6659575" cy="347472"/>
+            <a:off x="5349240" y="1005840"/>
+            <a:ext cx="6522415" cy="731520"/>
           </a:xfrm>
           <a:prstGeom prst="rect">
             <a:avLst/>
@@ -20847,24 +20819,85 @@
           <a:ln/>
         </p:spPr>
         <p:txBody>
-          <a:bodyPr wrap="square" lIns="0" tIns="0" rIns="0" bIns="0" rtlCol="0" anchor="ctr"/>
+          <a:bodyPr wrap="square" lIns="0" tIns="0" rIns="0" bIns="0" rtlCol="0" anchor="ctr">
+            <a:normAutofit/>
+          </a:bodyPr>
           <a:lstStyle/>
           <a:p>
             <a:pPr algn="ctr" indent="0" marL="0">
               <a:buNone/>
             </a:pPr>
             <a:r>
-              <a:rPr lang="en-US" sz="1600" i="1" dirty="0">
-                <a:solidFill>
-                  <a:srgbClr val="555555"/>
+              <a:rPr lang="en-US" sz="3600" b="1" dirty="0">
+                <a:solidFill>
+                  <a:srgbClr val="990011"/>
                 </a:solidFill>
                 <a:latin typeface="Times New Roman" pitchFamily="34" charset="0"/>
                 <a:ea typeface="Times New Roman" pitchFamily="34" charset="-122"/>
                 <a:cs typeface="Times New Roman" pitchFamily="34" charset="-120"/>
               </a:rPr>
-              <a:t>Illustration: a triangular graph</a:t>
-            </a:r>
-            <a:endParaRPr lang="en-US" sz="1600" dirty="0"/>
+              <a:t>5. Pie Charts</a:t>
+            </a:r>
+            <a:endParaRPr lang="en-US" sz="3600" dirty="0"/>
+          </a:p>
+        </p:txBody>
+      </p:sp>
+      <p:sp>
+        <p:nvSpPr>
+          <p:cNvPr id="5" name="Text 2"/>
+          <p:cNvSpPr/>
+          <p:nvPr/>
+        </p:nvSpPr>
+        <p:spPr>
+          <a:xfrm>
+            <a:off x="5349240" y="1783080"/>
+            <a:ext cx="6522415" cy="4663440"/>
+          </a:xfrm>
+          <a:prstGeom prst="rect">
+            <a:avLst/>
+          </a:prstGeom>
+          <a:noFill/>
+          <a:ln/>
+        </p:spPr>
+        <p:txBody>
+          <a:bodyPr wrap="square" lIns="0" tIns="0" rIns="0" bIns="0" rtlCol="0" anchor="t"/>
+          <a:lstStyle/>
+          <a:p>
+            <a:pPr algn="l" indent="0" marL="0">
+              <a:spcAft>
+                <a:spcPts val="800"/>
+              </a:spcAft>
+              <a:buNone/>
+            </a:pPr>
+            <a:r>
+              <a:rPr lang="en-US" sz="4000" b="1" dirty="0">
+                <a:solidFill>
+                  <a:srgbClr val="111111"/>
+                </a:solidFill>
+                <a:latin typeface="Times New Roman" pitchFamily="34" charset="0"/>
+                <a:ea typeface="Times New Roman" pitchFamily="34" charset="-122"/>
+                <a:cs typeface="Times New Roman" pitchFamily="34" charset="-120"/>
+              </a:rPr>
+              <a:t>Assessment: </a:t>
+            </a:r>
+            <a:pPr algn="l" indent="0" marL="0">
+              <a:spcAft>
+                <a:spcPts val="800"/>
+              </a:spcAft>
+              <a:buNone/>
+            </a:pPr>
+            <a:r>
+              <a:rPr lang="en-US" sz="4000" dirty="0">
+                <a:solidFill>
+                  <a:srgbClr val="111111"/>
+                </a:solidFill>
+                <a:latin typeface="Times New Roman" pitchFamily="34" charset="0"/>
+                <a:ea typeface="Times New Roman" pitchFamily="34" charset="-122"/>
+                <a:cs typeface="Times New Roman" pitchFamily="34" charset="-120"/>
+              </a:rPr>
+              <a:t>Pie charts show clearly the share of each part in a whole. However, they are poor for many categories or small differences.</a:t>
+            </a:r>
+            <a:endParaRPr lang="en-US" sz="4000" dirty="0"/>
           </a:p>
         </p:txBody>
       </p:sp>
@@ -20980,9 +21013,129 @@
           </a:p>
         </p:txBody>
       </p:sp>
+      <p:sp>
+        <p:nvSpPr>
+          <p:cNvPr id="3" name="Text 1"/>
+          <p:cNvSpPr/>
+          <p:nvPr/>
+        </p:nvSpPr>
+        <p:spPr>
+          <a:xfrm>
+            <a:off x="365760" y="1005840"/>
+            <a:ext cx="11460175" cy="731520"/>
+          </a:xfrm>
+          <a:prstGeom prst="rect">
+            <a:avLst/>
+          </a:prstGeom>
+          <a:noFill/>
+          <a:ln/>
+        </p:spPr>
+        <p:txBody>
+          <a:bodyPr wrap="square" lIns="0" tIns="0" rIns="0" bIns="0" rtlCol="0" anchor="ctr">
+            <a:normAutofit/>
+          </a:bodyPr>
+          <a:lstStyle/>
+          <a:p>
+            <a:pPr algn="ctr" indent="0" marL="0">
+              <a:buNone/>
+            </a:pPr>
+            <a:r>
+              <a:rPr lang="en-US" sz="3600" b="1" dirty="0">
+                <a:solidFill>
+                  <a:srgbClr val="990011"/>
+                </a:solidFill>
+                <a:latin typeface="Times New Roman" pitchFamily="34" charset="0"/>
+                <a:ea typeface="Times New Roman" pitchFamily="34" charset="-122"/>
+                <a:cs typeface="Times New Roman" pitchFamily="34" charset="-120"/>
+              </a:rPr>
+              <a:t>6. Triangular Graphs</a:t>
+            </a:r>
+            <a:endParaRPr lang="en-US" sz="3600" dirty="0"/>
+          </a:p>
+        </p:txBody>
+      </p:sp>
+      <p:sp>
+        <p:nvSpPr>
+          <p:cNvPr id="4" name="Text 2"/>
+          <p:cNvSpPr/>
+          <p:nvPr/>
+        </p:nvSpPr>
+        <p:spPr>
+          <a:xfrm>
+            <a:off x="365760" y="1783080"/>
+            <a:ext cx="6035040" cy="4617720"/>
+          </a:xfrm>
+          <a:prstGeom prst="rect">
+            <a:avLst/>
+          </a:prstGeom>
+          <a:noFill/>
+          <a:ln/>
+        </p:spPr>
+        <p:txBody>
+          <a:bodyPr wrap="square" lIns="0" tIns="0" rIns="0" bIns="0" rtlCol="0" anchor="t"/>
+          <a:lstStyle/>
+          <a:p>
+            <a:pPr algn="l" indent="0" marL="0">
+              <a:spcAft>
+                <a:spcPts val="800"/>
+              </a:spcAft>
+              <a:buNone/>
+            </a:pPr>
+            <a:r>
+              <a:rPr lang="en-US" sz="3200" i="1" dirty="0">
+                <a:solidFill>
+                  <a:srgbClr val="111111"/>
+                </a:solidFill>
+                <a:latin typeface="Times New Roman" pitchFamily="34" charset="0"/>
+                <a:ea typeface="Times New Roman" pitchFamily="34" charset="-122"/>
+                <a:cs typeface="Times New Roman" pitchFamily="34" charset="-120"/>
+              </a:rPr>
+              <a:t>Triangular graphs are constructed and interpreted as follows:</a:t>
+            </a:r>
+            <a:endParaRPr lang="en-US" sz="3200" dirty="0"/>
+          </a:p>
+          <a:p>
+            <a:pPr algn="l" indent="0" marL="0">
+              <a:spcAft>
+                <a:spcPts val="800"/>
+              </a:spcAft>
+              <a:buNone/>
+            </a:pPr>
+            <a:r>
+              <a:rPr lang="en-US" sz="3200" b="1" dirty="0">
+                <a:solidFill>
+                  <a:srgbClr val="111111"/>
+                </a:solidFill>
+                <a:latin typeface="Times New Roman" pitchFamily="34" charset="0"/>
+                <a:ea typeface="Times New Roman" pitchFamily="34" charset="-122"/>
+                <a:cs typeface="Times New Roman" pitchFamily="34" charset="-120"/>
+              </a:rPr>
+              <a:t>Construction: </a:t>
+            </a:r>
+            <a:pPr algn="l" indent="0" marL="0">
+              <a:spcAft>
+                <a:spcPts val="800"/>
+              </a:spcAft>
+              <a:buNone/>
+            </a:pPr>
+            <a:r>
+              <a:rPr lang="en-US" sz="3200" dirty="0">
+                <a:solidFill>
+                  <a:srgbClr val="111111"/>
+                </a:solidFill>
+                <a:latin typeface="Times New Roman" pitchFamily="34" charset="0"/>
+                <a:ea typeface="Times New Roman" pitchFamily="34" charset="-122"/>
+                <a:cs typeface="Times New Roman" pitchFamily="34" charset="-120"/>
+              </a:rPr>
+              <a:t>Each side of an equilateral triangle is a scale from 0 to 100 % for one of three components that add up to 100 %. Each sample is plotted as one point where the three values meet.</a:t>
+            </a:r>
+            <a:endParaRPr lang="en-US" sz="3200" dirty="0"/>
+          </a:p>
+        </p:txBody>
+      </p:sp>
       <p:pic>
         <p:nvPicPr>
-          <p:cNvPr id="3" name="Image 0" descr="/home/claude/f4/img/minesec_sheet.png">    </p:cNvPr>
+          <p:cNvPr id="5" name="Image 0" descr="/home/claude/f4/img/v2/stat2_triangle.png">    </p:cNvPr>
           <p:cNvPicPr>
             <a:picLocks noChangeAspect="1"/>
           </p:cNvPicPr>
@@ -20996,8 +21149,8 @@
         </p:blipFill>
         <p:spPr>
           <a:xfrm>
-            <a:off x="0" y="658368"/>
-            <a:ext cx="2468880" cy="5833872"/>
+            <a:off x="6537960" y="2849678"/>
+            <a:ext cx="5470855" cy="2137053"/>
           </a:xfrm>
           <a:prstGeom prst="rect">
             <a:avLst/>
@@ -21006,14 +21159,14 @@
       </p:pic>
       <p:sp>
         <p:nvSpPr>
-          <p:cNvPr id="4" name="Text 1"/>
+          <p:cNvPr id="6" name="Text 3"/>
           <p:cNvSpPr/>
           <p:nvPr/>
         </p:nvSpPr>
         <p:spPr>
           <a:xfrm>
-            <a:off x="2697480" y="1005840"/>
-            <a:ext cx="9174175" cy="731520"/>
+            <a:off x="6537960" y="6089904"/>
+            <a:ext cx="5470855" cy="347472"/>
           </a:xfrm>
           <a:prstGeom prst="rect">
             <a:avLst/>
@@ -21022,110 +21175,24 @@
           <a:ln/>
         </p:spPr>
         <p:txBody>
-          <a:bodyPr wrap="square" lIns="0" tIns="0" rIns="0" bIns="0" rtlCol="0" anchor="ctr">
-            <a:normAutofit/>
-          </a:bodyPr>
+          <a:bodyPr wrap="square" lIns="0" tIns="0" rIns="0" bIns="0" rtlCol="0" anchor="ctr"/>
           <a:lstStyle/>
           <a:p>
             <a:pPr algn="ctr" indent="0" marL="0">
               <a:buNone/>
             </a:pPr>
             <a:r>
-              <a:rPr lang="en-US" sz="3600" b="1" dirty="0">
-                <a:solidFill>
-                  <a:srgbClr val="990011"/>
+              <a:rPr lang="en-US" sz="1600" i="1" dirty="0">
+                <a:solidFill>
+                  <a:srgbClr val="555555"/>
                 </a:solidFill>
                 <a:latin typeface="Times New Roman" pitchFamily="34" charset="0"/>
                 <a:ea typeface="Times New Roman" pitchFamily="34" charset="-122"/>
                 <a:cs typeface="Times New Roman" pitchFamily="34" charset="-120"/>
               </a:rPr>
-              <a:t>4. Pie Charts and Triangular Graphs</a:t>
-            </a:r>
-            <a:endParaRPr lang="en-US" sz="3600" dirty="0"/>
-          </a:p>
-        </p:txBody>
-      </p:sp>
-      <p:sp>
-        <p:nvSpPr>
-          <p:cNvPr id="5" name="Text 2"/>
-          <p:cNvSpPr/>
-          <p:nvPr/>
-        </p:nvSpPr>
-        <p:spPr>
-          <a:xfrm>
-            <a:off x="2697480" y="1783080"/>
-            <a:ext cx="9174175" cy="4663440"/>
-          </a:xfrm>
-          <a:prstGeom prst="rect">
-            <a:avLst/>
-          </a:prstGeom>
-          <a:noFill/>
-          <a:ln/>
-        </p:spPr>
-        <p:txBody>
-          <a:bodyPr wrap="square" lIns="0" tIns="0" rIns="0" bIns="0" rtlCol="0" anchor="t"/>
-          <a:lstStyle/>
-          <a:p>
-            <a:pPr algn="l" indent="0" marL="0">
-              <a:spcAft>
-                <a:spcPts val="800"/>
-              </a:spcAft>
-              <a:buNone/>
-            </a:pPr>
-            <a:r>
-              <a:rPr lang="en-US" sz="4000" b="1" dirty="0">
-                <a:solidFill>
-                  <a:srgbClr val="111111"/>
-                </a:solidFill>
-                <a:latin typeface="Times New Roman" pitchFamily="34" charset="0"/>
-                <a:ea typeface="Times New Roman" pitchFamily="34" charset="-122"/>
-                <a:cs typeface="Times New Roman" pitchFamily="34" charset="-120"/>
-              </a:rPr>
-              <a:t>Assessment:</a:t>
-            </a:r>
-            <a:endParaRPr lang="en-US" sz="4000" dirty="0"/>
-          </a:p>
-          <a:p>
-            <a:pPr algn="l" marL="342900" indent="-342900">
-              <a:spcAft>
-                <a:spcPts val="800"/>
-              </a:spcAft>
-              <a:buSzPct val="100000"/>
-              <a:buChar char="•"/>
-            </a:pPr>
-            <a:r>
-              <a:rPr lang="en-US" sz="4000" dirty="0">
-                <a:solidFill>
-                  <a:srgbClr val="111111"/>
-                </a:solidFill>
-                <a:latin typeface="Times New Roman" pitchFamily="34" charset="0"/>
-                <a:ea typeface="Times New Roman" pitchFamily="34" charset="-122"/>
-                <a:cs typeface="Times New Roman" pitchFamily="34" charset="-120"/>
-              </a:rPr>
-              <a:t>Advantages: pie charts show shares of a whole; triangular graphs compare many samples of three parts.</a:t>
-            </a:r>
-            <a:endParaRPr lang="en-US" sz="4000" dirty="0"/>
-          </a:p>
-          <a:p>
-            <a:pPr algn="l" marL="342900" indent="-342900">
-              <a:spcAft>
-                <a:spcPts val="800"/>
-              </a:spcAft>
-              <a:buSzPct val="100000"/>
-              <a:buChar char="•"/>
-            </a:pPr>
-            <a:r>
-              <a:rPr lang="en-US" sz="4000" dirty="0">
-                <a:solidFill>
-                  <a:srgbClr val="111111"/>
-                </a:solidFill>
-                <a:latin typeface="Times New Roman" pitchFamily="34" charset="0"/>
-                <a:ea typeface="Times New Roman" pitchFamily="34" charset="-122"/>
-                <a:cs typeface="Times New Roman" pitchFamily="34" charset="-120"/>
-              </a:rPr>
-              <a:t>Disadvantages: pies are poor for many categories; triangular graphs are hard for beginners.</a:t>
-            </a:r>
-            <a:endParaRPr lang="en-US" sz="4000" dirty="0"/>
+              <a:t>Illustration: a triangular graph</a:t>
+            </a:r>
+            <a:endParaRPr lang="en-US" sz="1600" dirty="0"/>
           </a:p>
         </p:txBody>
       </p:sp>
@@ -21241,129 +21308,9 @@
           </a:p>
         </p:txBody>
       </p:sp>
-      <p:sp>
-        <p:nvSpPr>
-          <p:cNvPr id="3" name="Text 1"/>
-          <p:cNvSpPr/>
-          <p:nvPr/>
-        </p:nvSpPr>
-        <p:spPr>
-          <a:xfrm>
-            <a:off x="365760" y="1005840"/>
-            <a:ext cx="11460175" cy="731520"/>
-          </a:xfrm>
-          <a:prstGeom prst="rect">
-            <a:avLst/>
-          </a:prstGeom>
-          <a:noFill/>
-          <a:ln/>
-        </p:spPr>
-        <p:txBody>
-          <a:bodyPr wrap="square" lIns="0" tIns="0" rIns="0" bIns="0" rtlCol="0" anchor="ctr">
-            <a:normAutofit/>
-          </a:bodyPr>
-          <a:lstStyle/>
-          <a:p>
-            <a:pPr algn="ctr" indent="0" marL="0">
-              <a:buNone/>
-            </a:pPr>
-            <a:r>
-              <a:rPr lang="en-US" sz="3600" b="1" dirty="0">
-                <a:solidFill>
-                  <a:srgbClr val="990011"/>
-                </a:solidFill>
-                <a:latin typeface="Times New Roman" pitchFamily="34" charset="0"/>
-                <a:ea typeface="Times New Roman" pitchFamily="34" charset="-122"/>
-                <a:cs typeface="Times New Roman" pitchFamily="34" charset="-120"/>
-              </a:rPr>
-              <a:t>5. Scatter Graphs</a:t>
-            </a:r>
-            <a:endParaRPr lang="en-US" sz="3600" dirty="0"/>
-          </a:p>
-        </p:txBody>
-      </p:sp>
-      <p:sp>
-        <p:nvSpPr>
-          <p:cNvPr id="4" name="Text 2"/>
-          <p:cNvSpPr/>
-          <p:nvPr/>
-        </p:nvSpPr>
-        <p:spPr>
-          <a:xfrm>
-            <a:off x="365760" y="1783080"/>
-            <a:ext cx="4846320" cy="4617720"/>
-          </a:xfrm>
-          <a:prstGeom prst="rect">
-            <a:avLst/>
-          </a:prstGeom>
-          <a:noFill/>
-          <a:ln/>
-        </p:spPr>
-        <p:txBody>
-          <a:bodyPr wrap="square" lIns="0" tIns="0" rIns="0" bIns="0" rtlCol="0" anchor="t"/>
-          <a:lstStyle/>
-          <a:p>
-            <a:pPr algn="l" indent="0" marL="0">
-              <a:spcAft>
-                <a:spcPts val="800"/>
-              </a:spcAft>
-              <a:buNone/>
-            </a:pPr>
-            <a:r>
-              <a:rPr lang="en-US" sz="3200" i="1" dirty="0">
-                <a:solidFill>
-                  <a:srgbClr val="111111"/>
-                </a:solidFill>
-                <a:latin typeface="Times New Roman" pitchFamily="34" charset="0"/>
-                <a:ea typeface="Times New Roman" pitchFamily="34" charset="-122"/>
-                <a:cs typeface="Times New Roman" pitchFamily="34" charset="-120"/>
-              </a:rPr>
-              <a:t>Scatter graphs are drawn and used as follows:</a:t>
-            </a:r>
-            <a:endParaRPr lang="en-US" sz="3200" dirty="0"/>
-          </a:p>
-          <a:p>
-            <a:pPr algn="l" indent="0" marL="0">
-              <a:spcAft>
-                <a:spcPts val="800"/>
-              </a:spcAft>
-              <a:buNone/>
-            </a:pPr>
-            <a:r>
-              <a:rPr lang="en-US" sz="3200" b="1" dirty="0">
-                <a:solidFill>
-                  <a:srgbClr val="111111"/>
-                </a:solidFill>
-                <a:latin typeface="Times New Roman" pitchFamily="34" charset="0"/>
-                <a:ea typeface="Times New Roman" pitchFamily="34" charset="-122"/>
-                <a:cs typeface="Times New Roman" pitchFamily="34" charset="-120"/>
-              </a:rPr>
-              <a:t>Steps: </a:t>
-            </a:r>
-            <a:pPr algn="l" indent="0" marL="0">
-              <a:spcAft>
-                <a:spcPts val="800"/>
-              </a:spcAft>
-              <a:buNone/>
-            </a:pPr>
-            <a:r>
-              <a:rPr lang="en-US" sz="3200" dirty="0">
-                <a:solidFill>
-                  <a:srgbClr val="111111"/>
-                </a:solidFill>
-                <a:latin typeface="Times New Roman" pitchFamily="34" charset="0"/>
-                <a:ea typeface="Times New Roman" pitchFamily="34" charset="-122"/>
-                <a:cs typeface="Times New Roman" pitchFamily="34" charset="-120"/>
-              </a:rPr>
-              <a:t>Put the independent variable on the x-axis, plot each pair as a dot, and draw a line of best fit by eye with equal points on both sides.</a:t>
-            </a:r>
-            <a:endParaRPr lang="en-US" sz="3200" dirty="0"/>
-          </a:p>
-        </p:txBody>
-      </p:sp>
       <p:pic>
         <p:nvPicPr>
-          <p:cNvPr id="5" name="Image 0" descr="/home/claude/f4/img/v2/stat2_scatter.png">    </p:cNvPr>
+          <p:cNvPr id="3" name="Image 0" descr="/home/claude/f4/img/minesec_sheet.png">    </p:cNvPr>
           <p:cNvPicPr>
             <a:picLocks noChangeAspect="1"/>
           </p:cNvPicPr>
@@ -21377,8 +21324,8 @@
         </p:blipFill>
         <p:spPr>
           <a:xfrm>
-            <a:off x="5349240" y="2461422"/>
-            <a:ext cx="6659575" cy="2913564"/>
+            <a:off x="0" y="658368"/>
+            <a:ext cx="5120640" cy="5833872"/>
           </a:xfrm>
           <a:prstGeom prst="rect">
             <a:avLst/>
@@ -21387,14 +21334,14 @@
       </p:pic>
       <p:sp>
         <p:nvSpPr>
-          <p:cNvPr id="6" name="Text 3"/>
+          <p:cNvPr id="4" name="Text 1"/>
           <p:cNvSpPr/>
           <p:nvPr/>
         </p:nvSpPr>
         <p:spPr>
           <a:xfrm>
-            <a:off x="5349240" y="6089904"/>
-            <a:ext cx="6659575" cy="347472"/>
+            <a:off x="5349240" y="1005840"/>
+            <a:ext cx="6522415" cy="731520"/>
           </a:xfrm>
           <a:prstGeom prst="rect">
             <a:avLst/>
@@ -21403,24 +21350,85 @@
           <a:ln/>
         </p:spPr>
         <p:txBody>
-          <a:bodyPr wrap="square" lIns="0" tIns="0" rIns="0" bIns="0" rtlCol="0" anchor="ctr"/>
+          <a:bodyPr wrap="square" lIns="0" tIns="0" rIns="0" bIns="0" rtlCol="0" anchor="ctr">
+            <a:normAutofit/>
+          </a:bodyPr>
           <a:lstStyle/>
           <a:p>
             <a:pPr algn="ctr" indent="0" marL="0">
               <a:buNone/>
             </a:pPr>
             <a:r>
-              <a:rPr lang="en-US" sz="1600" i="1" dirty="0">
-                <a:solidFill>
-                  <a:srgbClr val="555555"/>
+              <a:rPr lang="en-US" sz="3600" b="1" dirty="0">
+                <a:solidFill>
+                  <a:srgbClr val="990011"/>
                 </a:solidFill>
                 <a:latin typeface="Times New Roman" pitchFamily="34" charset="0"/>
                 <a:ea typeface="Times New Roman" pitchFamily="34" charset="-122"/>
                 <a:cs typeface="Times New Roman" pitchFamily="34" charset="-120"/>
               </a:rPr>
-              <a:t>Illustration: a positive correlation</a:t>
-            </a:r>
-            <a:endParaRPr lang="en-US" sz="1600" dirty="0"/>
+              <a:t>6. Triangular Graphs</a:t>
+            </a:r>
+            <a:endParaRPr lang="en-US" sz="3600" dirty="0"/>
+          </a:p>
+        </p:txBody>
+      </p:sp>
+      <p:sp>
+        <p:nvSpPr>
+          <p:cNvPr id="5" name="Text 2"/>
+          <p:cNvSpPr/>
+          <p:nvPr/>
+        </p:nvSpPr>
+        <p:spPr>
+          <a:xfrm>
+            <a:off x="5349240" y="1783080"/>
+            <a:ext cx="6522415" cy="4663440"/>
+          </a:xfrm>
+          <a:prstGeom prst="rect">
+            <a:avLst/>
+          </a:prstGeom>
+          <a:noFill/>
+          <a:ln/>
+        </p:spPr>
+        <p:txBody>
+          <a:bodyPr wrap="square" lIns="0" tIns="0" rIns="0" bIns="0" rtlCol="0" anchor="t"/>
+          <a:lstStyle/>
+          <a:p>
+            <a:pPr algn="l" indent="0" marL="0">
+              <a:spcAft>
+                <a:spcPts val="800"/>
+              </a:spcAft>
+              <a:buNone/>
+            </a:pPr>
+            <a:r>
+              <a:rPr lang="en-US" sz="4000" b="1" dirty="0">
+                <a:solidFill>
+                  <a:srgbClr val="111111"/>
+                </a:solidFill>
+                <a:latin typeface="Times New Roman" pitchFamily="34" charset="0"/>
+                <a:ea typeface="Times New Roman" pitchFamily="34" charset="-122"/>
+                <a:cs typeface="Times New Roman" pitchFamily="34" charset="-120"/>
+              </a:rPr>
+              <a:t>Example: </a:t>
+            </a:r>
+            <a:pPr algn="l" indent="0" marL="0">
+              <a:spcAft>
+                <a:spcPts val="800"/>
+              </a:spcAft>
+              <a:buNone/>
+            </a:pPr>
+            <a:r>
+              <a:rPr lang="en-US" sz="4000" dirty="0">
+                <a:solidFill>
+                  <a:srgbClr val="111111"/>
+                </a:solidFill>
+                <a:latin typeface="Times New Roman" pitchFamily="34" charset="0"/>
+                <a:ea typeface="Times New Roman" pitchFamily="34" charset="-122"/>
+                <a:cs typeface="Times New Roman" pitchFamily="34" charset="-120"/>
+              </a:rPr>
+              <a:t>A rock made of 50 % quartz, 30 % feldspar and 20 % mica is shown by one point. Soil texture, with its shares of sand, silt and clay, is also shown in this way.</a:t>
+            </a:r>
+            <a:endParaRPr lang="en-US" sz="4000" dirty="0"/>
           </a:p>
         </p:txBody>
       </p:sp>
@@ -21595,7 +21603,7 @@
                 <a:ea typeface="Times New Roman" pitchFamily="34" charset="-122"/>
                 <a:cs typeface="Times New Roman" pitchFamily="34" charset="-120"/>
               </a:rPr>
-              <a:t>5. Scatter Graphs</a:t>
+              <a:t>6. Triangular Graphs</a:t>
             </a:r>
             <a:endParaRPr lang="en-US" sz="3600" dirty="0"/>
           </a:p>
@@ -21637,7 +21645,7 @@
                 <a:ea typeface="Times New Roman" pitchFamily="34" charset="-122"/>
                 <a:cs typeface="Times New Roman" pitchFamily="34" charset="-120"/>
               </a:rPr>
-              <a:t>Example 1: </a:t>
+              <a:t>Assessment: </a:t>
             </a:r>
             <a:pPr algn="l" indent="0" marL="0">
               <a:spcAft>
@@ -21654,7 +21662,7 @@
                 <a:ea typeface="Times New Roman" pitchFamily="34" charset="-122"/>
                 <a:cs typeface="Times New Roman" pitchFamily="34" charset="-120"/>
               </a:rPr>
-              <a:t>Moisture and organic content of soils rise together: a positive correlation, with one anomaly.</a:t>
+              <a:t>Triangular graphs compare many samples of three parts on one graph and show groups of similar samples. However, they are hard to read for beginners.</a:t>
             </a:r>
             <a:endParaRPr lang="en-US" sz="4000" dirty="0"/>
           </a:p>
@@ -21807,7 +21815,7 @@
                 <a:ea typeface="Times New Roman" pitchFamily="34" charset="-122"/>
                 <a:cs typeface="Times New Roman" pitchFamily="34" charset="-120"/>
               </a:rPr>
-              <a:t>5. Scatter Graphs</a:t>
+              <a:t>7. Scatter Graphs</a:t>
             </a:r>
             <a:endParaRPr lang="en-US" sz="3600" dirty="0"/>
           </a:p>
@@ -21822,7 +21830,7 @@
         <p:spPr>
           <a:xfrm>
             <a:off x="365760" y="1783080"/>
-            <a:ext cx="4846320" cy="4617720"/>
+            <a:ext cx="6035040" cy="4617720"/>
           </a:xfrm>
           <a:prstGeom prst="rect">
             <a:avLst/>
@@ -21841,7 +21849,7 @@
               <a:buNone/>
             </a:pPr>
             <a:r>
-              <a:rPr lang="en-US" sz="3600" b="1" dirty="0">
+              <a:rPr lang="en-US" sz="3200" i="1" dirty="0">
                 <a:solidFill>
                   <a:srgbClr val="111111"/>
                 </a:solidFill>
@@ -21849,8 +21857,11 @@
                 <a:ea typeface="Times New Roman" pitchFamily="34" charset="-122"/>
                 <a:cs typeface="Times New Roman" pitchFamily="34" charset="-120"/>
               </a:rPr>
-              <a:t>Example 2: </a:t>
-            </a:r>
+              <a:t>Scatter graphs are constructed and interpreted as follows:</a:t>
+            </a:r>
+            <a:endParaRPr lang="en-US" sz="3200" dirty="0"/>
+          </a:p>
+          <a:p>
             <a:pPr algn="l" indent="0" marL="0">
               <a:spcAft>
                 <a:spcPts val="800"/>
@@ -21858,7 +21869,7 @@
               <a:buNone/>
             </a:pPr>
             <a:r>
-              <a:rPr lang="en-US" sz="3600" dirty="0">
+              <a:rPr lang="en-US" sz="3200" b="1" dirty="0">
                 <a:solidFill>
                   <a:srgbClr val="111111"/>
                 </a:solidFill>
@@ -21866,15 +21877,32 @@
                 <a:ea typeface="Times New Roman" pitchFamily="34" charset="-122"/>
                 <a:cs typeface="Times New Roman" pitchFamily="34" charset="-120"/>
               </a:rPr>
-              <a:t>Altitude and temperature: Nairobi (1,770 m) and Lubango have 17 °C, while Lagos and Cape Coast at sea level have 27 °C: a strong negative correlation.</a:t>
-            </a:r>
-            <a:endParaRPr lang="en-US" sz="3600" dirty="0"/>
+              <a:t>Construction: </a:t>
+            </a:r>
+            <a:pPr algn="l" indent="0" marL="0">
+              <a:spcAft>
+                <a:spcPts val="800"/>
+              </a:spcAft>
+              <a:buNone/>
+            </a:pPr>
+            <a:r>
+              <a:rPr lang="en-US" sz="3200" dirty="0">
+                <a:solidFill>
+                  <a:srgbClr val="111111"/>
+                </a:solidFill>
+                <a:latin typeface="Times New Roman" pitchFamily="34" charset="0"/>
+                <a:ea typeface="Times New Roman" pitchFamily="34" charset="-122"/>
+                <a:cs typeface="Times New Roman" pitchFamily="34" charset="-120"/>
+              </a:rPr>
+              <a:t>Put the independent variable on the x-axis and the dependent variable on the y-axis, and plot each pair of values as a dot. Draw a line of best fit by eye, with about the same number of points on each side.</a:t>
+            </a:r>
+            <a:endParaRPr lang="en-US" sz="3200" dirty="0"/>
           </a:p>
         </p:txBody>
       </p:sp>
       <p:pic>
         <p:nvPicPr>
-          <p:cNvPr id="5" name="Image 0" descr="/home/claude/f4/img/v2/stat2_scatter_alt.png">    </p:cNvPr>
+          <p:cNvPr id="5" name="Image 0" descr="/home/claude/f4/img/v2/stat2_scatter.png">    </p:cNvPr>
           <p:cNvPicPr>
             <a:picLocks noChangeAspect="1"/>
           </p:cNvPicPr>
@@ -21888,8 +21916,8 @@
         </p:blipFill>
         <p:spPr>
           <a:xfrm>
-            <a:off x="5349240" y="2461422"/>
-            <a:ext cx="6659575" cy="2913564"/>
+            <a:off x="6537960" y="2721454"/>
+            <a:ext cx="5470855" cy="2393499"/>
           </a:xfrm>
           <a:prstGeom prst="rect">
             <a:avLst/>
@@ -21904,8 +21932,8 @@
         </p:nvSpPr>
         <p:spPr>
           <a:xfrm>
-            <a:off x="5349240" y="6089904"/>
-            <a:ext cx="6659575" cy="347472"/>
+            <a:off x="6537960" y="6089904"/>
+            <a:ext cx="5470855" cy="347472"/>
           </a:xfrm>
           <a:prstGeom prst="rect">
             <a:avLst/>
@@ -21929,7 +21957,7 @@
                 <a:ea typeface="Times New Roman" pitchFamily="34" charset="-122"/>
                 <a:cs typeface="Times New Roman" pitchFamily="34" charset="-120"/>
               </a:rPr>
-              <a:t>Illustration: altitude and temperature</a:t>
+              <a:t>Illustration: a scatter graph</a:t>
             </a:r>
             <a:endParaRPr lang="en-US" sz="1600" dirty="0"/>
           </a:p>
@@ -22064,7 +22092,7 @@
         <p:spPr>
           <a:xfrm>
             <a:off x="0" y="658368"/>
-            <a:ext cx="3840480" cy="5833872"/>
+            <a:ext cx="5120640" cy="5833872"/>
           </a:xfrm>
           <a:prstGeom prst="rect">
             <a:avLst/>
@@ -22079,8 +22107,8 @@
         </p:nvSpPr>
         <p:spPr>
           <a:xfrm>
-            <a:off x="4069080" y="1005840"/>
-            <a:ext cx="7802575" cy="731520"/>
+            <a:off x="5349240" y="1005840"/>
+            <a:ext cx="6522415" cy="731520"/>
           </a:xfrm>
           <a:prstGeom prst="rect">
             <a:avLst/>
@@ -22106,7 +22134,7 @@
                 <a:ea typeface="Times New Roman" pitchFamily="34" charset="-122"/>
                 <a:cs typeface="Times New Roman" pitchFamily="34" charset="-120"/>
               </a:rPr>
-              <a:t>5. Scatter Graphs</a:t>
+              <a:t>7. Scatter Graphs</a:t>
             </a:r>
             <a:endParaRPr lang="en-US" sz="3600" dirty="0"/>
           </a:p>
@@ -22120,8 +22148,8 @@
         </p:nvSpPr>
         <p:spPr>
           <a:xfrm>
-            <a:off x="4069080" y="1783080"/>
-            <a:ext cx="7802575" cy="4663440"/>
+            <a:off x="5349240" y="1783080"/>
+            <a:ext cx="6522415" cy="4663440"/>
           </a:xfrm>
           <a:prstGeom prst="rect">
             <a:avLst/>
@@ -22148,17 +22176,13 @@
                 <a:ea typeface="Times New Roman" pitchFamily="34" charset="-122"/>
                 <a:cs typeface="Times New Roman" pitchFamily="34" charset="-120"/>
               </a:rPr>
-              <a:t>Assessment:</a:t>
-            </a:r>
-            <a:endParaRPr lang="en-US" sz="4000" dirty="0"/>
-          </a:p>
-          <a:p>
-            <a:pPr algn="l" marL="342900" indent="-342900">
+              <a:t>Example 1: </a:t>
+            </a:r>
+            <a:pPr algn="l" indent="0" marL="0">
               <a:spcAft>
                 <a:spcPts val="800"/>
               </a:spcAft>
-              <a:buSzPct val="100000"/>
-              <a:buChar char="•"/>
+              <a:buNone/>
             </a:pPr>
             <a:r>
               <a:rPr lang="en-US" sz="4000" dirty="0">
@@ -22169,28 +22193,7 @@
                 <a:ea typeface="Times New Roman" pitchFamily="34" charset="-122"/>
                 <a:cs typeface="Times New Roman" pitchFamily="34" charset="-120"/>
               </a:rPr>
-              <a:t>Advantages: shows direction and strength of relationships and outliers.</a:t>
-            </a:r>
-            <a:endParaRPr lang="en-US" sz="4000" dirty="0"/>
-          </a:p>
-          <a:p>
-            <a:pPr algn="l" marL="342900" indent="-342900">
-              <a:spcAft>
-                <a:spcPts val="800"/>
-              </a:spcAft>
-              <a:buSzPct val="100000"/>
-              <a:buChar char="•"/>
-            </a:pPr>
-            <a:r>
-              <a:rPr lang="en-US" sz="4000" dirty="0">
-                <a:solidFill>
-                  <a:srgbClr val="111111"/>
-                </a:solidFill>
-                <a:latin typeface="Times New Roman" pitchFamily="34" charset="0"/>
-                <a:ea typeface="Times New Roman" pitchFamily="34" charset="-122"/>
-                <a:cs typeface="Times New Roman" pitchFamily="34" charset="-120"/>
-              </a:rPr>
-              <a:t>Disadvantages: only two variables; a trend does not prove a cause.</a:t>
+              <a:t>The moisture and organic content of soils rise together, which shows a positive correlation. One point lies far from the line and is an anomaly.</a:t>
             </a:r>
             <a:endParaRPr lang="en-US" sz="4000" dirty="0"/>
           </a:p>
@@ -22633,15 +22636,115 @@
                 <a:ea typeface="Calibri" pitchFamily="34" charset="-122"/>
                 <a:cs typeface="Calibri" pitchFamily="34" charset="-120"/>
               </a:rPr>
-              <a:t>FORMATIVE EVALUATION</a:t>
+              <a:t>BOARD SUMMARY</a:t>
             </a:r>
             <a:endParaRPr lang="en-US" sz="1400" dirty="0"/>
+          </a:p>
+        </p:txBody>
+      </p:sp>
+      <p:sp>
+        <p:nvSpPr>
+          <p:cNvPr id="3" name="Text 1"/>
+          <p:cNvSpPr/>
+          <p:nvPr/>
+        </p:nvSpPr>
+        <p:spPr>
+          <a:xfrm>
+            <a:off x="365760" y="1005840"/>
+            <a:ext cx="11460175" cy="731520"/>
+          </a:xfrm>
+          <a:prstGeom prst="rect">
+            <a:avLst/>
+          </a:prstGeom>
+          <a:noFill/>
+          <a:ln/>
+        </p:spPr>
+        <p:txBody>
+          <a:bodyPr wrap="square" lIns="0" tIns="0" rIns="0" bIns="0" rtlCol="0" anchor="ctr">
+            <a:normAutofit/>
+          </a:bodyPr>
+          <a:lstStyle/>
+          <a:p>
+            <a:pPr algn="ctr" indent="0" marL="0">
+              <a:buNone/>
+            </a:pPr>
+            <a:r>
+              <a:rPr lang="en-US" sz="3600" b="1" dirty="0">
+                <a:solidFill>
+                  <a:srgbClr val="990011"/>
+                </a:solidFill>
+                <a:latin typeface="Times New Roman" pitchFamily="34" charset="0"/>
+                <a:ea typeface="Times New Roman" pitchFamily="34" charset="-122"/>
+                <a:cs typeface="Times New Roman" pitchFamily="34" charset="-120"/>
+              </a:rPr>
+              <a:t>7. Scatter Graphs</a:t>
+            </a:r>
+            <a:endParaRPr lang="en-US" sz="3600" dirty="0"/>
+          </a:p>
+        </p:txBody>
+      </p:sp>
+      <p:sp>
+        <p:nvSpPr>
+          <p:cNvPr id="4" name="Text 2"/>
+          <p:cNvSpPr/>
+          <p:nvPr/>
+        </p:nvSpPr>
+        <p:spPr>
+          <a:xfrm>
+            <a:off x="365760" y="1783080"/>
+            <a:ext cx="6035040" cy="4617720"/>
+          </a:xfrm>
+          <a:prstGeom prst="rect">
+            <a:avLst/>
+          </a:prstGeom>
+          <a:noFill/>
+          <a:ln/>
+        </p:spPr>
+        <p:txBody>
+          <a:bodyPr wrap="square" lIns="0" tIns="0" rIns="0" bIns="0" rtlCol="0" anchor="t"/>
+          <a:lstStyle/>
+          <a:p>
+            <a:pPr algn="l" indent="0" marL="0">
+              <a:spcAft>
+                <a:spcPts val="800"/>
+              </a:spcAft>
+              <a:buNone/>
+            </a:pPr>
+            <a:r>
+              <a:rPr lang="en-US" sz="3600" b="1" dirty="0">
+                <a:solidFill>
+                  <a:srgbClr val="111111"/>
+                </a:solidFill>
+                <a:latin typeface="Times New Roman" pitchFamily="34" charset="0"/>
+                <a:ea typeface="Times New Roman" pitchFamily="34" charset="-122"/>
+                <a:cs typeface="Times New Roman" pitchFamily="34" charset="-120"/>
+              </a:rPr>
+              <a:t>Example 2: </a:t>
+            </a:r>
+            <a:pPr algn="l" indent="0" marL="0">
+              <a:spcAft>
+                <a:spcPts val="800"/>
+              </a:spcAft>
+              <a:buNone/>
+            </a:pPr>
+            <a:r>
+              <a:rPr lang="en-US" sz="3600" dirty="0">
+                <a:solidFill>
+                  <a:srgbClr val="111111"/>
+                </a:solidFill>
+                <a:latin typeface="Times New Roman" pitchFamily="34" charset="0"/>
+                <a:ea typeface="Times New Roman" pitchFamily="34" charset="-122"/>
+                <a:cs typeface="Times New Roman" pitchFamily="34" charset="-120"/>
+              </a:rPr>
+              <a:t>Nairobi (1,770 m) and Lubango have about 17 °C, while Lagos and Cape Coast at sea level have about 27 °C. The graph shows a strong negative correlation between altitude and temperature.</a:t>
+            </a:r>
+            <a:endParaRPr lang="en-US" sz="3600" dirty="0"/>
           </a:p>
         </p:txBody>
       </p:sp>
       <p:pic>
         <p:nvPicPr>
-          <p:cNvPr id="3" name="Image 0" descr="/home/claude/f4/img/minesec_sheet.png">    </p:cNvPr>
+          <p:cNvPr id="5" name="Image 0" descr="/home/claude/f4/img/v2/stat2_scatter_alt.png">    </p:cNvPr>
           <p:cNvPicPr>
             <a:picLocks noChangeAspect="1"/>
           </p:cNvPicPr>
@@ -22655,8 +22758,8 @@
         </p:blipFill>
         <p:spPr>
           <a:xfrm>
-            <a:off x="0" y="658368"/>
-            <a:ext cx="5120640" cy="5833872"/>
+            <a:off x="6537960" y="2721454"/>
+            <a:ext cx="5470855" cy="2393499"/>
           </a:xfrm>
           <a:prstGeom prst="rect">
             <a:avLst/>
@@ -22665,14 +22768,14 @@
       </p:pic>
       <p:sp>
         <p:nvSpPr>
-          <p:cNvPr id="4" name="Text 1"/>
+          <p:cNvPr id="6" name="Text 3"/>
           <p:cNvSpPr/>
           <p:nvPr/>
         </p:nvSpPr>
         <p:spPr>
           <a:xfrm>
-            <a:off x="5349240" y="1005840"/>
-            <a:ext cx="6522415" cy="731520"/>
+            <a:off x="6537960" y="6089904"/>
+            <a:ext cx="5470855" cy="347472"/>
           </a:xfrm>
           <a:prstGeom prst="rect">
             <a:avLst/>
@@ -22681,68 +22784,24 @@
           <a:ln/>
         </p:spPr>
         <p:txBody>
-          <a:bodyPr wrap="square" lIns="0" tIns="0" rIns="0" bIns="0" rtlCol="0" anchor="ctr">
-            <a:normAutofit/>
-          </a:bodyPr>
+          <a:bodyPr wrap="square" lIns="0" tIns="0" rIns="0" bIns="0" rtlCol="0" anchor="ctr"/>
           <a:lstStyle/>
           <a:p>
             <a:pPr algn="ctr" indent="0" marL="0">
               <a:buNone/>
             </a:pPr>
             <a:r>
-              <a:rPr lang="en-US" sz="3600" b="1" dirty="0">
-                <a:solidFill>
-                  <a:srgbClr val="990011"/>
+              <a:rPr lang="en-US" sz="1600" i="1" dirty="0">
+                <a:solidFill>
+                  <a:srgbClr val="555555"/>
                 </a:solidFill>
                 <a:latin typeface="Times New Roman" pitchFamily="34" charset="0"/>
                 <a:ea typeface="Times New Roman" pitchFamily="34" charset="-122"/>
                 <a:cs typeface="Times New Roman" pitchFamily="34" charset="-120"/>
               </a:rPr>
-              <a:t>Evaluation 1</a:t>
-            </a:r>
-            <a:endParaRPr lang="en-US" sz="3600" dirty="0"/>
-          </a:p>
-        </p:txBody>
-      </p:sp>
-      <p:sp>
-        <p:nvSpPr>
-          <p:cNvPr id="5" name="Text 2"/>
-          <p:cNvSpPr/>
-          <p:nvPr/>
-        </p:nvSpPr>
-        <p:spPr>
-          <a:xfrm>
-            <a:off x="5349240" y="1783080"/>
-            <a:ext cx="6522415" cy="4663440"/>
-          </a:xfrm>
-          <a:prstGeom prst="rect">
-            <a:avLst/>
-          </a:prstGeom>
-          <a:noFill/>
-          <a:ln/>
-        </p:spPr>
-        <p:txBody>
-          <a:bodyPr wrap="square" lIns="0" tIns="0" rIns="0" bIns="0" rtlCol="0" anchor="t"/>
-          <a:lstStyle/>
-          <a:p>
-            <a:pPr algn="l" indent="0" marL="0">
-              <a:spcAft>
-                <a:spcPts val="800"/>
-              </a:spcAft>
-              <a:buNone/>
-            </a:pPr>
-            <a:r>
-              <a:rPr lang="en-US" sz="4000" dirty="0">
-                <a:solidFill>
-                  <a:srgbClr val="111111"/>
-                </a:solidFill>
-                <a:latin typeface="Times New Roman" pitchFamily="34" charset="0"/>
-                <a:ea typeface="Times New Roman" pitchFamily="34" charset="-122"/>
-                <a:cs typeface="Times New Roman" pitchFamily="34" charset="-120"/>
-              </a:rPr>
-              <a:t>Which graph would you choose for the percentages of workers in three sectors, and why?</a:t>
-            </a:r>
-            <a:endParaRPr lang="en-US" sz="4000" dirty="0"/>
+              <a:t>Illustration: altitude and temperature</a:t>
+            </a:r>
+            <a:endParaRPr lang="en-US" sz="1600" dirty="0"/>
           </a:p>
         </p:txBody>
       </p:sp>
@@ -22852,7 +22911,7 @@
                 <a:ea typeface="Calibri" pitchFamily="34" charset="-122"/>
                 <a:cs typeface="Calibri" pitchFamily="34" charset="-120"/>
               </a:rPr>
-              <a:t>FORMATIVE EVALUATION</a:t>
+              <a:t>BOARD SUMMARY</a:t>
             </a:r>
             <a:endParaRPr lang="en-US" sz="1400" dirty="0"/>
           </a:p>
@@ -22917,7 +22976,7 @@
                 <a:ea typeface="Times New Roman" pitchFamily="34" charset="-122"/>
                 <a:cs typeface="Times New Roman" pitchFamily="34" charset="-120"/>
               </a:rPr>
-              <a:t>Expected Answer</a:t>
+              <a:t>7. Scatter Graphs</a:t>
             </a:r>
             <a:endParaRPr lang="en-US" sz="3600" dirty="0"/>
           </a:p>
@@ -22951,7 +23010,7 @@
               <a:buNone/>
             </a:pPr>
             <a:r>
-              <a:rPr lang="en-US" sz="4000" dirty="0">
+              <a:rPr lang="en-US" sz="4000" b="1" dirty="0">
                 <a:solidFill>
                   <a:srgbClr val="111111"/>
                 </a:solidFill>
@@ -22959,7 +23018,24 @@
                 <a:ea typeface="Times New Roman" pitchFamily="34" charset="-122"/>
                 <a:cs typeface="Times New Roman" pitchFamily="34" charset="-120"/>
               </a:rPr>
-              <a:t>A pie chart (or a triangular graph for several countries), because the parts make a whole of 100 %.</a:t>
+              <a:t>Assessment: </a:t>
+            </a:r>
+            <a:pPr algn="l" indent="0" marL="0">
+              <a:spcAft>
+                <a:spcPts val="800"/>
+              </a:spcAft>
+              <a:buNone/>
+            </a:pPr>
+            <a:r>
+              <a:rPr lang="en-US" sz="4000" dirty="0">
+                <a:solidFill>
+                  <a:srgbClr val="111111"/>
+                </a:solidFill>
+                <a:latin typeface="Times New Roman" pitchFamily="34" charset="0"/>
+                <a:ea typeface="Times New Roman" pitchFamily="34" charset="-122"/>
+                <a:cs typeface="Times New Roman" pitchFamily="34" charset="-120"/>
+              </a:rPr>
+              <a:t>Scatter graphs show the direction and strength of a relationship and reveal outliers. However, they show only two variables, and a trend does not prove a cause.</a:t>
             </a:r>
             <a:endParaRPr lang="en-US" sz="4000" dirty="0"/>
           </a:p>
@@ -23136,7 +23212,7 @@
                 <a:ea typeface="Times New Roman" pitchFamily="34" charset="-122"/>
                 <a:cs typeface="Times New Roman" pitchFamily="34" charset="-120"/>
               </a:rPr>
-              <a:t>Evaluation 2</a:t>
+              <a:t>Evaluation 1</a:t>
             </a:r>
             <a:endParaRPr lang="en-US" sz="3600" dirty="0"/>
           </a:p>
@@ -23178,7 +23254,7 @@
                 <a:ea typeface="Times New Roman" pitchFamily="34" charset="-122"/>
                 <a:cs typeface="Times New Roman" pitchFamily="34" charset="-120"/>
               </a:rPr>
-              <a:t>Give one advantage and one disadvantage of a climograph.</a:t>
+              <a:t>Which graph would you choose for the percentages of workers in three sectors, and why?</a:t>
             </a:r>
             <a:endParaRPr lang="en-US" sz="4000" dirty="0"/>
           </a:p>
@@ -23397,7 +23473,7 @@
                 <a:ea typeface="Times New Roman" pitchFamily="34" charset="-122"/>
                 <a:cs typeface="Times New Roman" pitchFamily="34" charset="-120"/>
               </a:rPr>
-              <a:t>Advantage: shows rainfall and temperature together; disadvantage: two vertical axes may confuse readers.</a:t>
+              <a:t>A pie chart (or a triangular graph for several countries), because the parts make a whole of 100 %.</a:t>
             </a:r>
             <a:endParaRPr lang="en-US" sz="4000" dirty="0"/>
           </a:p>
@@ -23509,7 +23585,7 @@
                 <a:ea typeface="Calibri" pitchFamily="34" charset="-122"/>
                 <a:cs typeface="Calibri" pitchFamily="34" charset="-120"/>
               </a:rPr>
-              <a:t>REMEDIATION</a:t>
+              <a:t>FORMATIVE EVALUATION</a:t>
             </a:r>
             <a:endParaRPr lang="en-US" sz="1400" dirty="0"/>
           </a:p>
@@ -23532,7 +23608,7 @@
         <p:spPr>
           <a:xfrm>
             <a:off x="0" y="658368"/>
-            <a:ext cx="3840480" cy="5833872"/>
+            <a:ext cx="5120640" cy="5833872"/>
           </a:xfrm>
           <a:prstGeom prst="rect">
             <a:avLst/>
@@ -23547,8 +23623,8 @@
         </p:nvSpPr>
         <p:spPr>
           <a:xfrm>
-            <a:off x="4069080" y="1005840"/>
-            <a:ext cx="7802575" cy="731520"/>
+            <a:off x="5349240" y="1005840"/>
+            <a:ext cx="6522415" cy="731520"/>
           </a:xfrm>
           <a:prstGeom prst="rect">
             <a:avLst/>
@@ -23574,7 +23650,7 @@
                 <a:ea typeface="Times New Roman" pitchFamily="34" charset="-122"/>
                 <a:cs typeface="Times New Roman" pitchFamily="34" charset="-120"/>
               </a:rPr>
-              <a:t>Remediation</a:t>
+              <a:t>Evaluation 2</a:t>
             </a:r>
             <a:endParaRPr lang="en-US" sz="3600" dirty="0"/>
           </a:p>
@@ -23588,8 +23664,8 @@
         </p:nvSpPr>
         <p:spPr>
           <a:xfrm>
-            <a:off x="4069080" y="1783080"/>
-            <a:ext cx="7802575" cy="4663440"/>
+            <a:off x="5349240" y="1783080"/>
+            <a:ext cx="6522415" cy="4663440"/>
           </a:xfrm>
           <a:prstGeom prst="rect">
             <a:avLst/>
@@ -23608,7 +23684,7 @@
               <a:buNone/>
             </a:pPr>
             <a:r>
-              <a:rPr lang="en-US" sz="4000" b="1" dirty="0">
+              <a:rPr lang="en-US" sz="4000" dirty="0">
                 <a:solidFill>
                   <a:srgbClr val="111111"/>
                 </a:solidFill>
@@ -23616,73 +23692,7 @@
                 <a:ea typeface="Times New Roman" pitchFamily="34" charset="-122"/>
                 <a:cs typeface="Times New Roman" pitchFamily="34" charset="-120"/>
               </a:rPr>
-              <a:t>Fill in the blanks:</a:t>
-            </a:r>
-            <a:endParaRPr lang="en-US" sz="4000" dirty="0"/>
-          </a:p>
-          <a:p>
-            <a:pPr algn="l" marL="342900" indent="-342900">
-              <a:spcAft>
-                <a:spcPts val="800"/>
-              </a:spcAft>
-              <a:buSzPct val="100000"/>
-              <a:buFont typeface="+mj-lt"/>
-              <a:buAutoNum type="arabicPeriod" startAt="1"/>
-            </a:pPr>
-            <a:r>
-              <a:rPr lang="en-US" sz="4000" dirty="0">
-                <a:solidFill>
-                  <a:srgbClr val="111111"/>
-                </a:solidFill>
-                <a:latin typeface="Times New Roman" pitchFamily="34" charset="0"/>
-                <a:ea typeface="Times New Roman" pitchFamily="34" charset="-122"/>
-                <a:cs typeface="Times New Roman" pitchFamily="34" charset="-120"/>
-              </a:rPr>
-              <a:t>In a pie chart, 1 % = ______°.</a:t>
-            </a:r>
-            <a:endParaRPr lang="en-US" sz="4000" dirty="0"/>
-          </a:p>
-          <a:p>
-            <a:pPr algn="l" marL="342900" indent="-342900">
-              <a:spcAft>
-                <a:spcPts val="800"/>
-              </a:spcAft>
-              <a:buSzPct val="100000"/>
-              <a:buFont typeface="+mj-lt"/>
-              <a:buAutoNum type="arabicPeriod" startAt="1"/>
-            </a:pPr>
-            <a:r>
-              <a:rPr lang="en-US" sz="4000" dirty="0">
-                <a:solidFill>
-                  <a:srgbClr val="111111"/>
-                </a:solidFill>
-                <a:latin typeface="Times New Roman" pitchFamily="34" charset="0"/>
-                <a:ea typeface="Times New Roman" pitchFamily="34" charset="-122"/>
-                <a:cs typeface="Times New Roman" pitchFamily="34" charset="-120"/>
-              </a:rPr>
-              <a:t>An ogive uses the ______ class limits.</a:t>
-            </a:r>
-            <a:endParaRPr lang="en-US" sz="4000" dirty="0"/>
-          </a:p>
-          <a:p>
-            <a:pPr algn="l" marL="342900" indent="-342900">
-              <a:spcAft>
-                <a:spcPts val="800"/>
-              </a:spcAft>
-              <a:buSzPct val="100000"/>
-              <a:buFont typeface="+mj-lt"/>
-              <a:buAutoNum type="arabicPeriod" startAt="1"/>
-            </a:pPr>
-            <a:r>
-              <a:rPr lang="en-US" sz="4000" dirty="0">
-                <a:solidFill>
-                  <a:srgbClr val="111111"/>
-                </a:solidFill>
-                <a:latin typeface="Times New Roman" pitchFamily="34" charset="0"/>
-                <a:ea typeface="Times New Roman" pitchFamily="34" charset="-122"/>
-                <a:cs typeface="Times New Roman" pitchFamily="34" charset="-120"/>
-              </a:rPr>
-              <a:t>On a climograph, rainfall is shown by ______.</a:t>
+              <a:t>Give one advantage and one disadvantage of a climograph.</a:t>
             </a:r>
             <a:endParaRPr lang="en-US" sz="4000" dirty="0"/>
           </a:p>
@@ -23794,7 +23804,7 @@
                 <a:ea typeface="Calibri" pitchFamily="34" charset="-122"/>
                 <a:cs typeface="Calibri" pitchFamily="34" charset="-120"/>
               </a:rPr>
-              <a:t>HOMEWORK</a:t>
+              <a:t>FORMATIVE EVALUATION</a:t>
             </a:r>
             <a:endParaRPr lang="en-US" sz="1400" dirty="0"/>
           </a:p>
@@ -23859,7 +23869,7 @@
                 <a:ea typeface="Times New Roman" pitchFamily="34" charset="-122"/>
                 <a:cs typeface="Times New Roman" pitchFamily="34" charset="-120"/>
               </a:rPr>
-              <a:t>Homework</a:t>
+              <a:t>Expected Answer</a:t>
             </a:r>
             <a:endParaRPr lang="en-US" sz="3600" dirty="0"/>
           </a:p>
@@ -23901,7 +23911,7 @@
                 <a:ea typeface="Times New Roman" pitchFamily="34" charset="-122"/>
                 <a:cs typeface="Times New Roman" pitchFamily="34" charset="-120"/>
               </a:rPr>
-              <a:t>Name the instrument that gives geographical coordinates by satellite.</a:t>
+              <a:t>Advantage: shows rainfall and temperature together; disadvantage: two vertical axes may confuse readers.</a:t>
             </a:r>
             <a:endParaRPr lang="en-US" sz="4000" dirty="0"/>
           </a:p>
@@ -24013,7 +24023,7 @@
                 <a:ea typeface="Calibri" pitchFamily="34" charset="-122"/>
                 <a:cs typeface="Calibri" pitchFamily="34" charset="-120"/>
               </a:rPr>
-              <a:t>NEXT LESSON</a:t>
+              <a:t>REMEDIATION</a:t>
             </a:r>
             <a:endParaRPr lang="en-US" sz="1400" dirty="0"/>
           </a:p>
@@ -24036,7 +24046,7 @@
         <p:spPr>
           <a:xfrm>
             <a:off x="0" y="658368"/>
-            <a:ext cx="5120640" cy="5833872"/>
+            <a:ext cx="3840480" cy="5833872"/>
           </a:xfrm>
           <a:prstGeom prst="rect">
             <a:avLst/>
@@ -24051,8 +24061,8 @@
         </p:nvSpPr>
         <p:spPr>
           <a:xfrm>
-            <a:off x="5349240" y="1005840"/>
-            <a:ext cx="6522415" cy="731520"/>
+            <a:off x="4069080" y="1005840"/>
+            <a:ext cx="7802575" cy="731520"/>
           </a:xfrm>
           <a:prstGeom prst="rect">
             <a:avLst/>
@@ -24078,7 +24088,7 @@
                 <a:ea typeface="Times New Roman" pitchFamily="34" charset="-122"/>
                 <a:cs typeface="Times New Roman" pitchFamily="34" charset="-120"/>
               </a:rPr>
-              <a:t>Next Lesson</a:t>
+              <a:t>Remediation</a:t>
             </a:r>
             <a:endParaRPr lang="en-US" sz="3600" dirty="0"/>
           </a:p>
@@ -24092,8 +24102,8 @@
         </p:nvSpPr>
         <p:spPr>
           <a:xfrm>
-            <a:off x="5349240" y="1783080"/>
-            <a:ext cx="6522415" cy="4663440"/>
+            <a:off x="4069080" y="1783080"/>
+            <a:ext cx="7802575" cy="4663440"/>
           </a:xfrm>
           <a:prstGeom prst="rect">
             <a:avLst/>
@@ -24102,10 +24112,10 @@
           <a:ln/>
         </p:spPr>
         <p:txBody>
-          <a:bodyPr wrap="square" lIns="0" tIns="0" rIns="0" bIns="0" rtlCol="0" anchor="ctr"/>
-          <a:lstStyle/>
-          <a:p>
-            <a:pPr algn="ctr" indent="0" marL="0">
+          <a:bodyPr wrap="square" lIns="0" tIns="0" rIns="0" bIns="0" rtlCol="0" anchor="t"/>
+          <a:lstStyle/>
+          <a:p>
+            <a:pPr algn="l" indent="0" marL="0">
               <a:spcAft>
                 <a:spcPts val="800"/>
               </a:spcAft>
@@ -24120,27 +24130,73 @@
                 <a:ea typeface="Times New Roman" pitchFamily="34" charset="-122"/>
                 <a:cs typeface="Times New Roman" pitchFamily="34" charset="-120"/>
               </a:rPr>
-              <a:t>Our next lesson will be on:</a:t>
+              <a:t>Fill in the blanks:</a:t>
             </a:r>
             <a:endParaRPr lang="en-US" sz="4000" dirty="0"/>
           </a:p>
           <a:p>
-            <a:pPr algn="ctr" indent="0" marL="0">
+            <a:pPr algn="l" marL="342900" indent="-342900">
               <a:spcAft>
                 <a:spcPts val="800"/>
               </a:spcAft>
-              <a:buNone/>
-            </a:pPr>
-            <a:r>
-              <a:rPr lang="en-US" sz="4000" b="1" dirty="0">
-                <a:solidFill>
-                  <a:srgbClr val="990011"/>
+              <a:buSzPct val="100000"/>
+              <a:buFont typeface="+mj-lt"/>
+              <a:buAutoNum type="arabicPeriod" startAt="1"/>
+            </a:pPr>
+            <a:r>
+              <a:rPr lang="en-US" sz="4000" dirty="0">
+                <a:solidFill>
+                  <a:srgbClr val="111111"/>
                 </a:solidFill>
                 <a:latin typeface="Times New Roman" pitchFamily="34" charset="0"/>
                 <a:ea typeface="Times New Roman" pitchFamily="34" charset="-122"/>
                 <a:cs typeface="Times New Roman" pitchFamily="34" charset="-120"/>
               </a:rPr>
-              <a:t>Field Work 1: Getting Geographical Coordinates</a:t>
+              <a:t>In a pie chart, 1 % = ______°.</a:t>
+            </a:r>
+            <a:endParaRPr lang="en-US" sz="4000" dirty="0"/>
+          </a:p>
+          <a:p>
+            <a:pPr algn="l" marL="342900" indent="-342900">
+              <a:spcAft>
+                <a:spcPts val="800"/>
+              </a:spcAft>
+              <a:buSzPct val="100000"/>
+              <a:buFont typeface="+mj-lt"/>
+              <a:buAutoNum type="arabicPeriod" startAt="1"/>
+            </a:pPr>
+            <a:r>
+              <a:rPr lang="en-US" sz="4000" dirty="0">
+                <a:solidFill>
+                  <a:srgbClr val="111111"/>
+                </a:solidFill>
+                <a:latin typeface="Times New Roman" pitchFamily="34" charset="0"/>
+                <a:ea typeface="Times New Roman" pitchFamily="34" charset="-122"/>
+                <a:cs typeface="Times New Roman" pitchFamily="34" charset="-120"/>
+              </a:rPr>
+              <a:t>An ogive uses the ______ class limits.</a:t>
+            </a:r>
+            <a:endParaRPr lang="en-US" sz="4000" dirty="0"/>
+          </a:p>
+          <a:p>
+            <a:pPr algn="l" marL="342900" indent="-342900">
+              <a:spcAft>
+                <a:spcPts val="800"/>
+              </a:spcAft>
+              <a:buSzPct val="100000"/>
+              <a:buFont typeface="+mj-lt"/>
+              <a:buAutoNum type="arabicPeriod" startAt="1"/>
+            </a:pPr>
+            <a:r>
+              <a:rPr lang="en-US" sz="4000" dirty="0">
+                <a:solidFill>
+                  <a:srgbClr val="111111"/>
+                </a:solidFill>
+                <a:latin typeface="Times New Roman" pitchFamily="34" charset="0"/>
+                <a:ea typeface="Times New Roman" pitchFamily="34" charset="-122"/>
+                <a:cs typeface="Times New Roman" pitchFamily="34" charset="-120"/>
+              </a:rPr>
+              <a:t>On a climograph, rainfall is shown by ______.</a:t>
             </a:r>
             <a:endParaRPr lang="en-US" sz="4000" dirty="0"/>
           </a:p>
@@ -24252,22 +24308,46 @@
                 <a:ea typeface="Calibri" pitchFamily="34" charset="-122"/>
                 <a:cs typeface="Calibri" pitchFamily="34" charset="-120"/>
               </a:rPr>
-              <a:t>BILINGUAL GAME</a:t>
+              <a:t>HOMEWORK</a:t>
             </a:r>
             <a:endParaRPr lang="en-US" sz="1400" dirty="0"/>
           </a:p>
         </p:txBody>
       </p:sp>
-      <p:sp>
-        <p:nvSpPr>
-          <p:cNvPr id="3" name="Text 1"/>
+      <p:pic>
+        <p:nvPicPr>
+          <p:cNvPr id="3" name="Image 0" descr="/home/claude/f4/img/minesec_sheet.png">    </p:cNvPr>
+          <p:cNvPicPr>
+            <a:picLocks noChangeAspect="1"/>
+          </p:cNvPicPr>
+          <p:nvPr/>
+        </p:nvPicPr>
+        <p:blipFill>
+          <a:blip r:embed="rId1"/>
+          <a:stretch>
+            <a:fillRect/>
+          </a:stretch>
+        </p:blipFill>
+        <p:spPr>
+          <a:xfrm>
+            <a:off x="0" y="658368"/>
+            <a:ext cx="5120640" cy="5833872"/>
+          </a:xfrm>
+          <a:prstGeom prst="rect">
+            <a:avLst/>
+          </a:prstGeom>
+        </p:spPr>
+      </p:pic>
+      <p:sp>
+        <p:nvSpPr>
+          <p:cNvPr id="4" name="Text 1"/>
           <p:cNvSpPr/>
           <p:nvPr/>
         </p:nvSpPr>
         <p:spPr>
           <a:xfrm>
-            <a:off x="457200" y="1005840"/>
-            <a:ext cx="11277295" cy="731520"/>
+            <a:off x="5349240" y="1005840"/>
+            <a:ext cx="6522415" cy="731520"/>
           </a:xfrm>
           <a:prstGeom prst="rect">
             <a:avLst/>
@@ -24276,7 +24356,9 @@
           <a:ln/>
         </p:spPr>
         <p:txBody>
-          <a:bodyPr wrap="square" lIns="0" tIns="0" rIns="0" bIns="0" rtlCol="0" anchor="ctr"/>
+          <a:bodyPr wrap="square" lIns="0" tIns="0" rIns="0" bIns="0" rtlCol="0" anchor="ctr">
+            <a:normAutofit/>
+          </a:bodyPr>
           <a:lstStyle/>
           <a:p>
             <a:pPr algn="ctr" indent="0" marL="0">
@@ -24291,6 +24373,438 @@
                 <a:ea typeface="Times New Roman" pitchFamily="34" charset="-122"/>
                 <a:cs typeface="Times New Roman" pitchFamily="34" charset="-120"/>
               </a:rPr>
+              <a:t>Homework</a:t>
+            </a:r>
+            <a:endParaRPr lang="en-US" sz="3600" dirty="0"/>
+          </a:p>
+        </p:txBody>
+      </p:sp>
+      <p:sp>
+        <p:nvSpPr>
+          <p:cNvPr id="5" name="Text 2"/>
+          <p:cNvSpPr/>
+          <p:nvPr/>
+        </p:nvSpPr>
+        <p:spPr>
+          <a:xfrm>
+            <a:off x="5349240" y="1783080"/>
+            <a:ext cx="6522415" cy="4663440"/>
+          </a:xfrm>
+          <a:prstGeom prst="rect">
+            <a:avLst/>
+          </a:prstGeom>
+          <a:noFill/>
+          <a:ln/>
+        </p:spPr>
+        <p:txBody>
+          <a:bodyPr wrap="square" lIns="0" tIns="0" rIns="0" bIns="0" rtlCol="0" anchor="t"/>
+          <a:lstStyle/>
+          <a:p>
+            <a:pPr algn="l" indent="0" marL="0">
+              <a:spcAft>
+                <a:spcPts val="800"/>
+              </a:spcAft>
+              <a:buNone/>
+            </a:pPr>
+            <a:r>
+              <a:rPr lang="en-US" sz="4000" dirty="0">
+                <a:solidFill>
+                  <a:srgbClr val="111111"/>
+                </a:solidFill>
+                <a:latin typeface="Times New Roman" pitchFamily="34" charset="0"/>
+                <a:ea typeface="Times New Roman" pitchFamily="34" charset="-122"/>
+                <a:cs typeface="Times New Roman" pitchFamily="34" charset="-120"/>
+              </a:rPr>
+              <a:t>Name the instrument that gives geographical coordinates by satellite.</a:t>
+            </a:r>
+            <a:endParaRPr lang="en-US" sz="4000" dirty="0"/>
+          </a:p>
+        </p:txBody>
+      </p:sp>
+      <p:sp>
+        <p:nvSpPr>
+          <p:cNvPr id="25" name="Slide Number Placeholder 0"/>
+          <p:cNvSpPr>
+            <a:spLocks noGrp="1"/>
+          </p:cNvSpPr>
+          <p:nvPr>
+            <p:ph type="sldNum" sz="quarter" idx="4294967295"/>
+          </p:nvPr>
+        </p:nvSpPr>
+        <p:spPr>
+          <a:xfrm>
+            <a:off x="27432" y="91440"/>
+            <a:ext cx="585216" cy="475488"/>
+          </a:xfrm>
+          <a:prstGeom prst="rect">
+            <a:avLst/>
+          </a:prstGeom>
+          <a:extLst>
+            <a:ext uri="{C572A759-6A51-4108-AA02-DFA0A04FC94B}">
+              <ma14:wrappingTextBoxFlag xmlns:ma14="http://schemas.microsoft.com/office/mac/drawingml/2011/main" val="0"/>
+            </a:ext>
+          </a:extLst>
+        </p:spPr>
+        <p:txBody>
+          <a:bodyPr/>
+          <a:lstStyle>
+            <a:lvl1pPr>
+              <a:defRPr sz="2000">
+                <a:solidFill>
+                  <a:srgbClr val="FFFFFF"/>
+                </a:solidFill>
+                <a:latin typeface="Calibri"/>
+                <a:ea typeface="Calibri"/>
+                <a:cs typeface="Calibri"/>
+              </a:defRPr>
+            </a:lvl1pPr>
+          </a:lstStyle>
+          <a:p>
+            <a:pPr algn="ctr"/>
+            <a:fld id="{F7021451-1387-4CA6-816F-3879F97B5CBC}" type="slidenum">
+              <a:rPr b="1" lang="en-US"/>
+              <a:t>67</a:t>
+            </a:fld>
+            <a:endParaRPr lang="en-US"/>
+          </a:p>
+        </p:txBody>
+      </p:sp>
+    </p:spTree>
+  </p:cSld>
+  <p:clrMapOvr>
+    <a:masterClrMapping/>
+  </p:clrMapOvr>
+</p:sld>
+</file>
+
+<file path=ppt/slides/slide68.xml><?xml version="1.0" encoding="utf-8"?>
+<p:sld xmlns:a="http://schemas.openxmlformats.org/drawingml/2006/main" xmlns:r="http://schemas.openxmlformats.org/officeDocument/2006/relationships" xmlns:p="http://schemas.openxmlformats.org/presentationml/2006/main">
+  <p:cSld name="Slide 68">
+    <p:spTree>
+      <p:nvGrpSpPr>
+        <p:cNvPr id="1" name=""/>
+        <p:cNvGrpSpPr/>
+        <p:nvPr/>
+      </p:nvGrpSpPr>
+      <p:grpSpPr>
+        <a:xfrm>
+          <a:off x="0" y="0"/>
+          <a:ext cx="0" cy="0"/>
+          <a:chOff x="0" y="0"/>
+          <a:chExt cx="0" cy="0"/>
+        </a:xfrm>
+      </p:grpSpPr>
+      <p:sp>
+        <p:nvSpPr>
+          <p:cNvPr id="2" name="Text 0"/>
+          <p:cNvSpPr/>
+          <p:nvPr/>
+        </p:nvSpPr>
+        <p:spPr>
+          <a:xfrm>
+            <a:off x="457200" y="713232"/>
+            <a:ext cx="11368735" cy="274320"/>
+          </a:xfrm>
+          <a:prstGeom prst="rect">
+            <a:avLst/>
+          </a:prstGeom>
+          <a:noFill/>
+          <a:ln/>
+        </p:spPr>
+        <p:txBody>
+          <a:bodyPr wrap="square" lIns="0" tIns="0" rIns="0" bIns="0" rtlCol="0" anchor="ctr"/>
+          <a:lstStyle/>
+          <a:p>
+            <a:pPr algn="r" indent="0" marL="0">
+              <a:buNone/>
+            </a:pPr>
+            <a:r>
+              <a:rPr lang="en-US" sz="1400" b="1" dirty="0">
+                <a:solidFill>
+                  <a:srgbClr val="1C3F6E"/>
+                </a:solidFill>
+                <a:latin typeface="Calibri" pitchFamily="34" charset="0"/>
+                <a:ea typeface="Calibri" pitchFamily="34" charset="-122"/>
+                <a:cs typeface="Calibri" pitchFamily="34" charset="-120"/>
+              </a:rPr>
+              <a:t>NEXT LESSON</a:t>
+            </a:r>
+            <a:endParaRPr lang="en-US" sz="1400" dirty="0"/>
+          </a:p>
+        </p:txBody>
+      </p:sp>
+      <p:pic>
+        <p:nvPicPr>
+          <p:cNvPr id="3" name="Image 0" descr="/home/claude/f4/img/minesec_sheet.png">    </p:cNvPr>
+          <p:cNvPicPr>
+            <a:picLocks noChangeAspect="1"/>
+          </p:cNvPicPr>
+          <p:nvPr/>
+        </p:nvPicPr>
+        <p:blipFill>
+          <a:blip r:embed="rId1"/>
+          <a:stretch>
+            <a:fillRect/>
+          </a:stretch>
+        </p:blipFill>
+        <p:spPr>
+          <a:xfrm>
+            <a:off x="0" y="658368"/>
+            <a:ext cx="5120640" cy="5833872"/>
+          </a:xfrm>
+          <a:prstGeom prst="rect">
+            <a:avLst/>
+          </a:prstGeom>
+        </p:spPr>
+      </p:pic>
+      <p:sp>
+        <p:nvSpPr>
+          <p:cNvPr id="4" name="Text 1"/>
+          <p:cNvSpPr/>
+          <p:nvPr/>
+        </p:nvSpPr>
+        <p:spPr>
+          <a:xfrm>
+            <a:off x="5349240" y="1005840"/>
+            <a:ext cx="6522415" cy="731520"/>
+          </a:xfrm>
+          <a:prstGeom prst="rect">
+            <a:avLst/>
+          </a:prstGeom>
+          <a:noFill/>
+          <a:ln/>
+        </p:spPr>
+        <p:txBody>
+          <a:bodyPr wrap="square" lIns="0" tIns="0" rIns="0" bIns="0" rtlCol="0" anchor="ctr">
+            <a:normAutofit/>
+          </a:bodyPr>
+          <a:lstStyle/>
+          <a:p>
+            <a:pPr algn="ctr" indent="0" marL="0">
+              <a:buNone/>
+            </a:pPr>
+            <a:r>
+              <a:rPr lang="en-US" sz="3600" b="1" dirty="0">
+                <a:solidFill>
+                  <a:srgbClr val="990011"/>
+                </a:solidFill>
+                <a:latin typeface="Times New Roman" pitchFamily="34" charset="0"/>
+                <a:ea typeface="Times New Roman" pitchFamily="34" charset="-122"/>
+                <a:cs typeface="Times New Roman" pitchFamily="34" charset="-120"/>
+              </a:rPr>
+              <a:t>Next Lesson</a:t>
+            </a:r>
+            <a:endParaRPr lang="en-US" sz="3600" dirty="0"/>
+          </a:p>
+        </p:txBody>
+      </p:sp>
+      <p:sp>
+        <p:nvSpPr>
+          <p:cNvPr id="5" name="Text 2"/>
+          <p:cNvSpPr/>
+          <p:nvPr/>
+        </p:nvSpPr>
+        <p:spPr>
+          <a:xfrm>
+            <a:off x="5349240" y="1783080"/>
+            <a:ext cx="6522415" cy="4663440"/>
+          </a:xfrm>
+          <a:prstGeom prst="rect">
+            <a:avLst/>
+          </a:prstGeom>
+          <a:noFill/>
+          <a:ln/>
+        </p:spPr>
+        <p:txBody>
+          <a:bodyPr wrap="square" lIns="0" tIns="0" rIns="0" bIns="0" rtlCol="0" anchor="ctr"/>
+          <a:lstStyle/>
+          <a:p>
+            <a:pPr algn="ctr" indent="0" marL="0">
+              <a:spcAft>
+                <a:spcPts val="800"/>
+              </a:spcAft>
+              <a:buNone/>
+            </a:pPr>
+            <a:r>
+              <a:rPr lang="en-US" sz="4000" b="1" dirty="0">
+                <a:solidFill>
+                  <a:srgbClr val="111111"/>
+                </a:solidFill>
+                <a:latin typeface="Times New Roman" pitchFamily="34" charset="0"/>
+                <a:ea typeface="Times New Roman" pitchFamily="34" charset="-122"/>
+                <a:cs typeface="Times New Roman" pitchFamily="34" charset="-120"/>
+              </a:rPr>
+              <a:t>Our next lesson will be on:</a:t>
+            </a:r>
+            <a:endParaRPr lang="en-US" sz="4000" dirty="0"/>
+          </a:p>
+          <a:p>
+            <a:pPr algn="ctr" indent="0" marL="0">
+              <a:spcAft>
+                <a:spcPts val="800"/>
+              </a:spcAft>
+              <a:buNone/>
+            </a:pPr>
+            <a:r>
+              <a:rPr lang="en-US" sz="4000" b="1" dirty="0">
+                <a:solidFill>
+                  <a:srgbClr val="990011"/>
+                </a:solidFill>
+                <a:latin typeface="Times New Roman" pitchFamily="34" charset="0"/>
+                <a:ea typeface="Times New Roman" pitchFamily="34" charset="-122"/>
+                <a:cs typeface="Times New Roman" pitchFamily="34" charset="-120"/>
+              </a:rPr>
+              <a:t>Field Work 1: Getting Geographical Coordinates</a:t>
+            </a:r>
+            <a:endParaRPr lang="en-US" sz="4000" dirty="0"/>
+          </a:p>
+        </p:txBody>
+      </p:sp>
+      <p:sp>
+        <p:nvSpPr>
+          <p:cNvPr id="25" name="Slide Number Placeholder 0"/>
+          <p:cNvSpPr>
+            <a:spLocks noGrp="1"/>
+          </p:cNvSpPr>
+          <p:nvPr>
+            <p:ph type="sldNum" sz="quarter" idx="4294967295"/>
+          </p:nvPr>
+        </p:nvSpPr>
+        <p:spPr>
+          <a:xfrm>
+            <a:off x="27432" y="91440"/>
+            <a:ext cx="585216" cy="475488"/>
+          </a:xfrm>
+          <a:prstGeom prst="rect">
+            <a:avLst/>
+          </a:prstGeom>
+          <a:extLst>
+            <a:ext uri="{C572A759-6A51-4108-AA02-DFA0A04FC94B}">
+              <ma14:wrappingTextBoxFlag xmlns:ma14="http://schemas.microsoft.com/office/mac/drawingml/2011/main" val="0"/>
+            </a:ext>
+          </a:extLst>
+        </p:spPr>
+        <p:txBody>
+          <a:bodyPr/>
+          <a:lstStyle>
+            <a:lvl1pPr>
+              <a:defRPr sz="2000">
+                <a:solidFill>
+                  <a:srgbClr val="FFFFFF"/>
+                </a:solidFill>
+                <a:latin typeface="Calibri"/>
+                <a:ea typeface="Calibri"/>
+                <a:cs typeface="Calibri"/>
+              </a:defRPr>
+            </a:lvl1pPr>
+          </a:lstStyle>
+          <a:p>
+            <a:pPr algn="ctr"/>
+            <a:fld id="{F7021451-1387-4CA6-816F-3879F97B5CBC}" type="slidenum">
+              <a:rPr b="1" lang="en-US"/>
+              <a:t>68</a:t>
+            </a:fld>
+            <a:endParaRPr lang="en-US"/>
+          </a:p>
+        </p:txBody>
+      </p:sp>
+    </p:spTree>
+  </p:cSld>
+  <p:clrMapOvr>
+    <a:masterClrMapping/>
+  </p:clrMapOvr>
+</p:sld>
+</file>
+
+<file path=ppt/slides/slide69.xml><?xml version="1.0" encoding="utf-8"?>
+<p:sld xmlns:a="http://schemas.openxmlformats.org/drawingml/2006/main" xmlns:r="http://schemas.openxmlformats.org/officeDocument/2006/relationships" xmlns:p="http://schemas.openxmlformats.org/presentationml/2006/main">
+  <p:cSld name="Slide 69">
+    <p:spTree>
+      <p:nvGrpSpPr>
+        <p:cNvPr id="1" name=""/>
+        <p:cNvGrpSpPr/>
+        <p:nvPr/>
+      </p:nvGrpSpPr>
+      <p:grpSpPr>
+        <a:xfrm>
+          <a:off x="0" y="0"/>
+          <a:ext cx="0" cy="0"/>
+          <a:chOff x="0" y="0"/>
+          <a:chExt cx="0" cy="0"/>
+        </a:xfrm>
+      </p:grpSpPr>
+      <p:sp>
+        <p:nvSpPr>
+          <p:cNvPr id="2" name="Text 0"/>
+          <p:cNvSpPr/>
+          <p:nvPr/>
+        </p:nvSpPr>
+        <p:spPr>
+          <a:xfrm>
+            <a:off x="457200" y="713232"/>
+            <a:ext cx="11368735" cy="274320"/>
+          </a:xfrm>
+          <a:prstGeom prst="rect">
+            <a:avLst/>
+          </a:prstGeom>
+          <a:noFill/>
+          <a:ln/>
+        </p:spPr>
+        <p:txBody>
+          <a:bodyPr wrap="square" lIns="0" tIns="0" rIns="0" bIns="0" rtlCol="0" anchor="ctr"/>
+          <a:lstStyle/>
+          <a:p>
+            <a:pPr algn="r" indent="0" marL="0">
+              <a:buNone/>
+            </a:pPr>
+            <a:r>
+              <a:rPr lang="en-US" sz="1400" b="1" dirty="0">
+                <a:solidFill>
+                  <a:srgbClr val="1C3F6E"/>
+                </a:solidFill>
+                <a:latin typeface="Calibri" pitchFamily="34" charset="0"/>
+                <a:ea typeface="Calibri" pitchFamily="34" charset="-122"/>
+                <a:cs typeface="Calibri" pitchFamily="34" charset="-120"/>
+              </a:rPr>
+              <a:t>BILINGUAL GAME</a:t>
+            </a:r>
+            <a:endParaRPr lang="en-US" sz="1400" dirty="0"/>
+          </a:p>
+        </p:txBody>
+      </p:sp>
+      <p:sp>
+        <p:nvSpPr>
+          <p:cNvPr id="3" name="Text 1"/>
+          <p:cNvSpPr/>
+          <p:nvPr/>
+        </p:nvSpPr>
+        <p:spPr>
+          <a:xfrm>
+            <a:off x="457200" y="1005840"/>
+            <a:ext cx="11277295" cy="731520"/>
+          </a:xfrm>
+          <a:prstGeom prst="rect">
+            <a:avLst/>
+          </a:prstGeom>
+          <a:noFill/>
+          <a:ln/>
+        </p:spPr>
+        <p:txBody>
+          <a:bodyPr wrap="square" lIns="0" tIns="0" rIns="0" bIns="0" rtlCol="0" anchor="ctr"/>
+          <a:lstStyle/>
+          <a:p>
+            <a:pPr algn="ctr" indent="0" marL="0">
+              <a:buNone/>
+            </a:pPr>
+            <a:r>
+              <a:rPr lang="en-US" sz="3600" b="1" dirty="0">
+                <a:solidFill>
+                  <a:srgbClr val="990011"/>
+                </a:solidFill>
+                <a:latin typeface="Times New Roman" pitchFamily="34" charset="0"/>
+                <a:ea typeface="Times New Roman" pitchFamily="34" charset="-122"/>
+                <a:cs typeface="Times New Roman" pitchFamily="34" charset="-120"/>
+              </a:rPr>
               <a:t>Bilingual Game (Jeu Bilingue)</a:t>
             </a:r>
             <a:endParaRPr lang="en-US" sz="3600" dirty="0"/>
@@ -24299,7 +24813,7 @@
       </p:sp>
       <p:graphicFrame>
         <p:nvGraphicFramePr>
-          <p:cNvPr id="68" name="Table 0"/>
+          <p:cNvPr id="70" name="Table 0"/>
           <p:cNvGraphicFramePr>
             <a:graphicFrameLocks noGrp="1"/>
           </p:cNvGraphicFramePr>
@@ -25335,7 +25849,7 @@
             <a:pPr algn="ctr"/>
             <a:fld id="{F7021451-1387-4CA6-816F-3879F97B5CBC}" type="slidenum">
               <a:rPr b="1" lang="en-US"/>
-              <a:t>67</a:t>
+              <a:t>69</a:t>
             </a:fld>
             <a:endParaRPr lang="en-US"/>
           </a:p>
@@ -25349,9 +25863,9 @@
 </p:sld>
 </file>
 
-<file path=ppt/slides/slide68.xml><?xml version="1.0" encoding="utf-8"?>
+<file path=ppt/slides/slide7.xml><?xml version="1.0" encoding="utf-8"?>
 <p:sld xmlns:a="http://schemas.openxmlformats.org/drawingml/2006/main" xmlns:r="http://schemas.openxmlformats.org/officeDocument/2006/relationships" xmlns:p="http://schemas.openxmlformats.org/presentationml/2006/main">
-  <p:cSld name="Slide 68">
+  <p:cSld name="Slide 7">
     <p:spTree>
       <p:nvGrpSpPr>
         <p:cNvPr id="1" name=""/>
@@ -25399,22 +25913,46 @@
                 <a:ea typeface="Calibri" pitchFamily="34" charset="-122"/>
                 <a:cs typeface="Calibri" pitchFamily="34" charset="-120"/>
               </a:rPr>
-              <a:t>LOGBOOK</a:t>
+              <a:t>OBJECTIVES</a:t>
             </a:r>
             <a:endParaRPr lang="en-US" sz="1400" dirty="0"/>
           </a:p>
         </p:txBody>
       </p:sp>
-      <p:sp>
-        <p:nvSpPr>
-          <p:cNvPr id="3" name="Text 1"/>
+      <p:pic>
+        <p:nvPicPr>
+          <p:cNvPr id="3" name="Image 0" descr="/home/claude/f4/img/minesec_sheet.png">    </p:cNvPr>
+          <p:cNvPicPr>
+            <a:picLocks noChangeAspect="1"/>
+          </p:cNvPicPr>
+          <p:nvPr/>
+        </p:nvPicPr>
+        <p:blipFill>
+          <a:blip r:embed="rId1"/>
+          <a:stretch>
+            <a:fillRect/>
+          </a:stretch>
+        </p:blipFill>
+        <p:spPr>
+          <a:xfrm>
+            <a:off x="0" y="658368"/>
+            <a:ext cx="5120640" cy="5833872"/>
+          </a:xfrm>
+          <a:prstGeom prst="rect">
+            <a:avLst/>
+          </a:prstGeom>
+        </p:spPr>
+      </p:pic>
+      <p:sp>
+        <p:nvSpPr>
+          <p:cNvPr id="4" name="Text 1"/>
           <p:cNvSpPr/>
           <p:nvPr/>
         </p:nvSpPr>
         <p:spPr>
           <a:xfrm>
-            <a:off x="457200" y="1005840"/>
-            <a:ext cx="11277295" cy="731520"/>
+            <a:off x="5349240" y="1005840"/>
+            <a:ext cx="6522415" cy="731520"/>
           </a:xfrm>
           <a:prstGeom prst="rect">
             <a:avLst/>
@@ -25423,7 +25961,9 @@
           <a:ln/>
         </p:spPr>
         <p:txBody>
-          <a:bodyPr wrap="square" lIns="0" tIns="0" rIns="0" bIns="0" rtlCol="0" anchor="ctr"/>
+          <a:bodyPr wrap="square" lIns="0" tIns="0" rIns="0" bIns="0" rtlCol="0" anchor="ctr">
+            <a:normAutofit/>
+          </a:bodyPr>
           <a:lstStyle/>
           <a:p>
             <a:pPr algn="ctr" indent="0" marL="0">
@@ -25438,6 +25978,243 @@
                 <a:ea typeface="Times New Roman" pitchFamily="34" charset="-122"/>
                 <a:cs typeface="Times New Roman" pitchFamily="34" charset="-120"/>
               </a:rPr>
+              <a:t>Objectives</a:t>
+            </a:r>
+            <a:endParaRPr lang="en-US" sz="3600" dirty="0"/>
+          </a:p>
+        </p:txBody>
+      </p:sp>
+      <p:sp>
+        <p:nvSpPr>
+          <p:cNvPr id="5" name="Text 2"/>
+          <p:cNvSpPr/>
+          <p:nvPr/>
+        </p:nvSpPr>
+        <p:spPr>
+          <a:xfrm>
+            <a:off x="5349240" y="1783080"/>
+            <a:ext cx="6522415" cy="4663440"/>
+          </a:xfrm>
+          <a:prstGeom prst="rect">
+            <a:avLst/>
+          </a:prstGeom>
+          <a:noFill/>
+          <a:ln/>
+        </p:spPr>
+        <p:txBody>
+          <a:bodyPr wrap="square" lIns="0" tIns="0" rIns="0" bIns="0" rtlCol="0" anchor="t"/>
+          <a:lstStyle/>
+          <a:p>
+            <a:pPr algn="l" indent="0" marL="0">
+              <a:spcAft>
+                <a:spcPts val="800"/>
+              </a:spcAft>
+              <a:buNone/>
+            </a:pPr>
+            <a:r>
+              <a:rPr lang="en-US" sz="4000" b="1" dirty="0">
+                <a:solidFill>
+                  <a:srgbClr val="111111"/>
+                </a:solidFill>
+                <a:latin typeface="Times New Roman" pitchFamily="34" charset="0"/>
+                <a:ea typeface="Times New Roman" pitchFamily="34" charset="-122"/>
+                <a:cs typeface="Times New Roman" pitchFamily="34" charset="-120"/>
+              </a:rPr>
+              <a:t>By the end of this lesson, you should be able to:</a:t>
+            </a:r>
+            <a:endParaRPr lang="en-US" sz="4000" dirty="0"/>
+          </a:p>
+          <a:p>
+            <a:pPr algn="l" marL="342900" indent="-342900">
+              <a:spcAft>
+                <a:spcPts val="800"/>
+              </a:spcAft>
+              <a:buSzPct val="100000"/>
+              <a:buFont typeface="+mj-lt"/>
+              <a:buAutoNum type="arabicPeriod" startAt="1"/>
+            </a:pPr>
+            <a:r>
+              <a:rPr lang="en-US" sz="4000" dirty="0">
+                <a:solidFill>
+                  <a:srgbClr val="111111"/>
+                </a:solidFill>
+                <a:latin typeface="Times New Roman" pitchFamily="34" charset="0"/>
+                <a:ea typeface="Times New Roman" pitchFamily="34" charset="-122"/>
+                <a:cs typeface="Times New Roman" pitchFamily="34" charset="-120"/>
+              </a:rPr>
+              <a:t>Draw and interpret vertical and horizontal bar graphs.</a:t>
+            </a:r>
+            <a:endParaRPr lang="en-US" sz="4000" dirty="0"/>
+          </a:p>
+          <a:p>
+            <a:pPr algn="l" marL="342900" indent="-342900">
+              <a:spcAft>
+                <a:spcPts val="800"/>
+              </a:spcAft>
+              <a:buSzPct val="100000"/>
+              <a:buFont typeface="+mj-lt"/>
+              <a:buAutoNum type="arabicPeriod" startAt="1"/>
+            </a:pPr>
+            <a:r>
+              <a:rPr lang="en-US" sz="4000" dirty="0">
+                <a:solidFill>
+                  <a:srgbClr val="111111"/>
+                </a:solidFill>
+                <a:latin typeface="Times New Roman" pitchFamily="34" charset="0"/>
+                <a:ea typeface="Times New Roman" pitchFamily="34" charset="-122"/>
+                <a:cs typeface="Times New Roman" pitchFamily="34" charset="-120"/>
+              </a:rPr>
+              <a:t>Draw and interpret simple and compound line graphs.</a:t>
+            </a:r>
+            <a:endParaRPr lang="en-US" sz="4000" dirty="0"/>
+          </a:p>
+        </p:txBody>
+      </p:sp>
+      <p:sp>
+        <p:nvSpPr>
+          <p:cNvPr id="25" name="Slide Number Placeholder 0"/>
+          <p:cNvSpPr>
+            <a:spLocks noGrp="1"/>
+          </p:cNvSpPr>
+          <p:nvPr>
+            <p:ph type="sldNum" sz="quarter" idx="4294967295"/>
+          </p:nvPr>
+        </p:nvSpPr>
+        <p:spPr>
+          <a:xfrm>
+            <a:off x="27432" y="91440"/>
+            <a:ext cx="585216" cy="475488"/>
+          </a:xfrm>
+          <a:prstGeom prst="rect">
+            <a:avLst/>
+          </a:prstGeom>
+          <a:extLst>
+            <a:ext uri="{C572A759-6A51-4108-AA02-DFA0A04FC94B}">
+              <ma14:wrappingTextBoxFlag xmlns:ma14="http://schemas.microsoft.com/office/mac/drawingml/2011/main" val="0"/>
+            </a:ext>
+          </a:extLst>
+        </p:spPr>
+        <p:txBody>
+          <a:bodyPr/>
+          <a:lstStyle>
+            <a:lvl1pPr>
+              <a:defRPr sz="2000">
+                <a:solidFill>
+                  <a:srgbClr val="FFFFFF"/>
+                </a:solidFill>
+                <a:latin typeface="Calibri"/>
+                <a:ea typeface="Calibri"/>
+                <a:cs typeface="Calibri"/>
+              </a:defRPr>
+            </a:lvl1pPr>
+          </a:lstStyle>
+          <a:p>
+            <a:pPr algn="ctr"/>
+            <a:fld id="{F7021451-1387-4CA6-816F-3879F97B5CBC}" type="slidenum">
+              <a:rPr b="1" lang="en-US"/>
+              <a:t>7</a:t>
+            </a:fld>
+            <a:endParaRPr lang="en-US"/>
+          </a:p>
+        </p:txBody>
+      </p:sp>
+    </p:spTree>
+  </p:cSld>
+  <p:clrMapOvr>
+    <a:masterClrMapping/>
+  </p:clrMapOvr>
+</p:sld>
+</file>
+
+<file path=ppt/slides/slide70.xml><?xml version="1.0" encoding="utf-8"?>
+<p:sld xmlns:a="http://schemas.openxmlformats.org/drawingml/2006/main" xmlns:r="http://schemas.openxmlformats.org/officeDocument/2006/relationships" xmlns:p="http://schemas.openxmlformats.org/presentationml/2006/main">
+  <p:cSld name="Slide 70">
+    <p:spTree>
+      <p:nvGrpSpPr>
+        <p:cNvPr id="1" name=""/>
+        <p:cNvGrpSpPr/>
+        <p:nvPr/>
+      </p:nvGrpSpPr>
+      <p:grpSpPr>
+        <a:xfrm>
+          <a:off x="0" y="0"/>
+          <a:ext cx="0" cy="0"/>
+          <a:chOff x="0" y="0"/>
+          <a:chExt cx="0" cy="0"/>
+        </a:xfrm>
+      </p:grpSpPr>
+      <p:sp>
+        <p:nvSpPr>
+          <p:cNvPr id="2" name="Text 0"/>
+          <p:cNvSpPr/>
+          <p:nvPr/>
+        </p:nvSpPr>
+        <p:spPr>
+          <a:xfrm>
+            <a:off x="457200" y="713232"/>
+            <a:ext cx="11368735" cy="274320"/>
+          </a:xfrm>
+          <a:prstGeom prst="rect">
+            <a:avLst/>
+          </a:prstGeom>
+          <a:noFill/>
+          <a:ln/>
+        </p:spPr>
+        <p:txBody>
+          <a:bodyPr wrap="square" lIns="0" tIns="0" rIns="0" bIns="0" rtlCol="0" anchor="ctr"/>
+          <a:lstStyle/>
+          <a:p>
+            <a:pPr algn="r" indent="0" marL="0">
+              <a:buNone/>
+            </a:pPr>
+            <a:r>
+              <a:rPr lang="en-US" sz="1400" b="1" dirty="0">
+                <a:solidFill>
+                  <a:srgbClr val="1C3F6E"/>
+                </a:solidFill>
+                <a:latin typeface="Calibri" pitchFamily="34" charset="0"/>
+                <a:ea typeface="Calibri" pitchFamily="34" charset="-122"/>
+                <a:cs typeface="Calibri" pitchFamily="34" charset="-120"/>
+              </a:rPr>
+              <a:t>LOGBOOK</a:t>
+            </a:r>
+            <a:endParaRPr lang="en-US" sz="1400" dirty="0"/>
+          </a:p>
+        </p:txBody>
+      </p:sp>
+      <p:sp>
+        <p:nvSpPr>
+          <p:cNvPr id="3" name="Text 1"/>
+          <p:cNvSpPr/>
+          <p:nvPr/>
+        </p:nvSpPr>
+        <p:spPr>
+          <a:xfrm>
+            <a:off x="457200" y="1005840"/>
+            <a:ext cx="11277295" cy="731520"/>
+          </a:xfrm>
+          <a:prstGeom prst="rect">
+            <a:avLst/>
+          </a:prstGeom>
+          <a:noFill/>
+          <a:ln/>
+        </p:spPr>
+        <p:txBody>
+          <a:bodyPr wrap="square" lIns="0" tIns="0" rIns="0" bIns="0" rtlCol="0" anchor="ctr"/>
+          <a:lstStyle/>
+          <a:p>
+            <a:pPr algn="ctr" indent="0" marL="0">
+              <a:buNone/>
+            </a:pPr>
+            <a:r>
+              <a:rPr lang="en-US" sz="3600" b="1" dirty="0">
+                <a:solidFill>
+                  <a:srgbClr val="990011"/>
+                </a:solidFill>
+                <a:latin typeface="Times New Roman" pitchFamily="34" charset="0"/>
+                <a:ea typeface="Times New Roman" pitchFamily="34" charset="-122"/>
+                <a:cs typeface="Times New Roman" pitchFamily="34" charset="-120"/>
+              </a:rPr>
               <a:t>Official Logbook (1/2)</a:t>
             </a:r>
             <a:endParaRPr lang="en-US" sz="3600" dirty="0"/>
@@ -25446,7 +26223,7 @@
       </p:sp>
       <p:graphicFrame>
         <p:nvGraphicFramePr>
-          <p:cNvPr id="69" name="Table 0"/>
+          <p:cNvPr id="71" name="Table 0"/>
           <p:cNvGraphicFramePr>
             <a:graphicFrameLocks noGrp="1"/>
           </p:cNvGraphicFramePr>
@@ -26068,7 +26845,7 @@
             <a:pPr algn="ctr"/>
             <a:fld id="{F7021451-1387-4CA6-816F-3879F97B5CBC}" type="slidenum">
               <a:rPr b="1" lang="en-US"/>
-              <a:t>68</a:t>
+              <a:t>70</a:t>
             </a:fld>
             <a:endParaRPr lang="en-US"/>
           </a:p>
@@ -26082,9 +26859,9 @@
 </p:sld>
 </file>
 
-<file path=ppt/slides/slide69.xml><?xml version="1.0" encoding="utf-8"?>
+<file path=ppt/slides/slide71.xml><?xml version="1.0" encoding="utf-8"?>
 <p:sld xmlns:a="http://schemas.openxmlformats.org/drawingml/2006/main" xmlns:r="http://schemas.openxmlformats.org/officeDocument/2006/relationships" xmlns:p="http://schemas.openxmlformats.org/presentationml/2006/main">
-  <p:cSld name="Slide 69">
+  <p:cSld name="Slide 71">
     <p:spTree>
       <p:nvGrpSpPr>
         <p:cNvPr id="1" name=""/>
@@ -26179,7 +26956,7 @@
       </p:sp>
       <p:graphicFrame>
         <p:nvGraphicFramePr>
-          <p:cNvPr id="70" name="Table 0"/>
+          <p:cNvPr id="72" name="Table 0"/>
           <p:cNvGraphicFramePr>
             <a:graphicFrameLocks noGrp="1"/>
           </p:cNvGraphicFramePr>
@@ -26289,7 +27066,7 @@
                           <a:ea typeface="Calibri" pitchFamily="34" charset="-122"/>
                           <a:cs typeface="Calibri" pitchFamily="34" charset="-120"/>
                         </a:rPr>
-                        <a:t>DEFINITIONS; Bar Graphs; Line Graphs; Ogives and Climographs; Pie Charts and Triangular Graphs; Scatter Graphs.</a:t>
+                        <a:t>DEFINITIONS; Bar Graphs; Linear Graphs; Cumulative Frequency Curves (Ogives); Climographs; Pie Charts; Triangular Graphs; Scatter Graphs.</a:t>
                       </a:r>
                       <a:endParaRPr lang="en-US" sz="1600" dirty="0">
                         <a:latin typeface="Calibri" charset="0"/>
@@ -26939,7 +27716,7 @@
             <a:pPr algn="ctr"/>
             <a:fld id="{F7021451-1387-4CA6-816F-3879F97B5CBC}" type="slidenum">
               <a:rPr b="1" lang="en-US"/>
-              <a:t>69</a:t>
+              <a:t>71</a:t>
             </a:fld>
             <a:endParaRPr lang="en-US"/>
           </a:p>
@@ -26953,9 +27730,9 @@
 </p:sld>
 </file>
 
-<file path=ppt/slides/slide7.xml><?xml version="1.0" encoding="utf-8"?>
+<file path=ppt/slides/slide72.xml><?xml version="1.0" encoding="utf-8"?>
 <p:sld xmlns:a="http://schemas.openxmlformats.org/drawingml/2006/main" xmlns:r="http://schemas.openxmlformats.org/officeDocument/2006/relationships" xmlns:p="http://schemas.openxmlformats.org/presentationml/2006/main">
-  <p:cSld name="Slide 7">
+  <p:cSld name="Slide 72">
     <p:spTree>
       <p:nvGrpSpPr>
         <p:cNvPr id="1" name=""/>
@@ -27003,7 +27780,7 @@
                 <a:ea typeface="Calibri" pitchFamily="34" charset="-122"/>
                 <a:cs typeface="Calibri" pitchFamily="34" charset="-120"/>
               </a:rPr>
-              <a:t>OBJECTIVES</a:t>
+              <a:t>TEACHER'S NOTE</a:t>
             </a:r>
             <a:endParaRPr lang="en-US" sz="1400" dirty="0"/>
           </a:p>
@@ -27026,7 +27803,7 @@
         <p:spPr>
           <a:xfrm>
             <a:off x="0" y="658368"/>
-            <a:ext cx="5120640" cy="5833872"/>
+            <a:ext cx="3840480" cy="5833872"/>
           </a:xfrm>
           <a:prstGeom prst="rect">
             <a:avLst/>
@@ -27041,8 +27818,8 @@
         </p:nvSpPr>
         <p:spPr>
           <a:xfrm>
-            <a:off x="5349240" y="1005840"/>
-            <a:ext cx="6522415" cy="731520"/>
+            <a:off x="4069080" y="1005840"/>
+            <a:ext cx="7802575" cy="731520"/>
           </a:xfrm>
           <a:prstGeom prst="rect">
             <a:avLst/>
@@ -27068,7 +27845,7 @@
                 <a:ea typeface="Times New Roman" pitchFamily="34" charset="-122"/>
                 <a:cs typeface="Times New Roman" pitchFamily="34" charset="-120"/>
               </a:rPr>
-              <a:t>Objectives</a:t>
+              <a:t>Teacher's Note</a:t>
             </a:r>
             <a:endParaRPr lang="en-US" sz="3600" dirty="0"/>
           </a:p>
@@ -27082,8 +27859,8 @@
         </p:nvSpPr>
         <p:spPr>
           <a:xfrm>
-            <a:off x="5349240" y="1783080"/>
-            <a:ext cx="6522415" cy="4663440"/>
+            <a:off x="4069080" y="1783080"/>
+            <a:ext cx="7802575" cy="4663440"/>
           </a:xfrm>
           <a:prstGeom prst="rect">
             <a:avLst/>
@@ -27094,47 +27871,26 @@
         <p:txBody>
           <a:bodyPr wrap="square" lIns="0" tIns="0" rIns="0" bIns="0" rtlCol="0" anchor="t"/>
           <a:lstStyle/>
-          <a:p>
-            <a:pPr algn="l" indent="0" marL="0">
-              <a:spcAft>
-                <a:spcPts val="800"/>
-              </a:spcAft>
-              <a:buNone/>
-            </a:pPr>
-            <a:r>
-              <a:rPr lang="en-US" sz="4000" b="1" dirty="0">
-                <a:solidFill>
-                  <a:srgbClr val="111111"/>
-                </a:solidFill>
-                <a:latin typeface="Times New Roman" pitchFamily="34" charset="0"/>
-                <a:ea typeface="Times New Roman" pitchFamily="34" charset="-122"/>
-                <a:cs typeface="Times New Roman" pitchFamily="34" charset="-120"/>
-              </a:rPr>
-              <a:t>By the end of this lesson, you should be able to:</a:t>
-            </a:r>
-            <a:endParaRPr lang="en-US" sz="4000" dirty="0"/>
-          </a:p>
           <a:p>
             <a:pPr algn="l" marL="342900" indent="-342900">
               <a:spcAft>
                 <a:spcPts val="800"/>
               </a:spcAft>
               <a:buSzPct val="100000"/>
-              <a:buFont typeface="+mj-lt"/>
-              <a:buAutoNum type="arabicPeriod" startAt="1"/>
-            </a:pPr>
-            <a:r>
-              <a:rPr lang="en-US" sz="4000" dirty="0">
+              <a:buChar char="•"/>
+            </a:pPr>
+            <a:r>
+              <a:rPr lang="en-US" sz="2000" dirty="0">
                 <a:solidFill>
                   <a:srgbClr val="111111"/>
                 </a:solidFill>
-                <a:latin typeface="Times New Roman" pitchFamily="34" charset="0"/>
-                <a:ea typeface="Times New Roman" pitchFamily="34" charset="-122"/>
-                <a:cs typeface="Times New Roman" pitchFamily="34" charset="-120"/>
-              </a:rPr>
-              <a:t>Draw and interpret vertical and horizontal bar graphs.</a:t>
-            </a:r>
-            <a:endParaRPr lang="en-US" sz="4000" dirty="0"/>
+                <a:latin typeface="Calibri" pitchFamily="34" charset="0"/>
+                <a:ea typeface="Calibri" pitchFamily="34" charset="-122"/>
+                <a:cs typeface="Calibri" pitchFamily="34" charset="-120"/>
+              </a:rPr>
+              <a:t>Timing: Homework correction, plan, objectives 8 min | Recall, situation, action 10 min | 5 activities 30 min | Board summary (copying) 30 min | Evaluation, remediation 10 min | Homework, next lesson 5 min | Logbook 7 min</a:t>
+            </a:r>
+            <a:endParaRPr lang="en-US" sz="2000" dirty="0"/>
           </a:p>
           <a:p>
             <a:pPr algn="l" marL="342900" indent="-342900">
@@ -27142,21 +27898,104 @@
                 <a:spcPts val="800"/>
               </a:spcAft>
               <a:buSzPct val="100000"/>
-              <a:buFont typeface="+mj-lt"/>
-              <a:buAutoNum type="arabicPeriod" startAt="1"/>
-            </a:pPr>
-            <a:r>
-              <a:rPr lang="en-US" sz="4000" dirty="0">
+              <a:buChar char="•"/>
+            </a:pPr>
+            <a:r>
+              <a:rPr lang="en-US" sz="2000" dirty="0">
                 <a:solidFill>
                   <a:srgbClr val="111111"/>
                 </a:solidFill>
-                <a:latin typeface="Times New Roman" pitchFamily="34" charset="0"/>
-                <a:ea typeface="Times New Roman" pitchFamily="34" charset="-122"/>
-                <a:cs typeface="Times New Roman" pitchFamily="34" charset="-120"/>
-              </a:rPr>
-              <a:t>Draw and interpret simple and compound line graphs.</a:t>
-            </a:r>
-            <a:endParaRPr lang="en-US" sz="4000" dirty="0"/>
+                <a:latin typeface="Calibri" pitchFamily="34" charset="0"/>
+                <a:ea typeface="Calibri" pitchFamily="34" charset="-122"/>
+                <a:cs typeface="Calibri" pitchFamily="34" charset="-120"/>
+              </a:rPr>
+              <a:t>Without the projector (Activity 1): draw the bars on squared paper.</a:t>
+            </a:r>
+            <a:endParaRPr lang="en-US" sz="2000" dirty="0"/>
+          </a:p>
+          <a:p>
+            <a:pPr algn="l" marL="342900" indent="-342900">
+              <a:spcAft>
+                <a:spcPts val="800"/>
+              </a:spcAft>
+              <a:buSzPct val="100000"/>
+              <a:buChar char="•"/>
+            </a:pPr>
+            <a:r>
+              <a:rPr lang="en-US" sz="2000" dirty="0">
+                <a:solidFill>
+                  <a:srgbClr val="111111"/>
+                </a:solidFill>
+                <a:latin typeface="Calibri" pitchFamily="34" charset="0"/>
+                <a:ea typeface="Calibri" pitchFamily="34" charset="-122"/>
+                <a:cs typeface="Calibri" pitchFamily="34" charset="-120"/>
+              </a:rPr>
+              <a:t>Without the projector (Activity 2): plot the four points.</a:t>
+            </a:r>
+            <a:endParaRPr lang="en-US" sz="2000" dirty="0"/>
+          </a:p>
+          <a:p>
+            <a:pPr algn="l" marL="342900" indent="-342900">
+              <a:spcAft>
+                <a:spcPts val="800"/>
+              </a:spcAft>
+              <a:buSzPct val="100000"/>
+              <a:buChar char="•"/>
+            </a:pPr>
+            <a:r>
+              <a:rPr lang="en-US" sz="2000" dirty="0">
+                <a:solidFill>
+                  <a:srgbClr val="111111"/>
+                </a:solidFill>
+                <a:latin typeface="Calibri" pitchFamily="34" charset="0"/>
+                <a:ea typeface="Calibri" pitchFamily="34" charset="-122"/>
+                <a:cs typeface="Calibri" pitchFamily="34" charset="-120"/>
+              </a:rPr>
+              <a:t>Without the projector (Activity 3): calculate the cumulative frequencies.</a:t>
+            </a:r>
+            <a:endParaRPr lang="en-US" sz="2000" dirty="0"/>
+          </a:p>
+          <a:p>
+            <a:pPr algn="l" marL="342900" indent="-342900">
+              <a:spcAft>
+                <a:spcPts val="800"/>
+              </a:spcAft>
+              <a:buSzPct val="100000"/>
+              <a:buChar char="•"/>
+            </a:pPr>
+            <a:r>
+              <a:rPr lang="en-US" sz="2000" dirty="0">
+                <a:solidFill>
+                  <a:srgbClr val="111111"/>
+                </a:solidFill>
+                <a:latin typeface="Calibri" pitchFamily="34" charset="0"/>
+                <a:ea typeface="Calibri" pitchFamily="34" charset="-122"/>
+                <a:cs typeface="Calibri" pitchFamily="34" charset="-120"/>
+              </a:rPr>
+              <a:t>Without the projector (Activity 4): draw the pie with a protractor.</a:t>
+            </a:r>
+            <a:endParaRPr lang="en-US" sz="2000" dirty="0"/>
+          </a:p>
+          <a:p>
+            <a:pPr algn="l" marL="342900" indent="-342900">
+              <a:spcAft>
+                <a:spcPts val="800"/>
+              </a:spcAft>
+              <a:buSzPct val="100000"/>
+              <a:buChar char="•"/>
+            </a:pPr>
+            <a:r>
+              <a:rPr lang="en-US" sz="2000" dirty="0">
+                <a:solidFill>
+                  <a:srgbClr val="111111"/>
+                </a:solidFill>
+                <a:latin typeface="Calibri" pitchFamily="34" charset="0"/>
+                <a:ea typeface="Calibri" pitchFamily="34" charset="-122"/>
+                <a:cs typeface="Calibri" pitchFamily="34" charset="-120"/>
+              </a:rPr>
+              <a:t>Without the projector (Activity 5): draw the line of best fit by eye.</a:t>
+            </a:r>
+            <a:endParaRPr lang="en-US" sz="2000" dirty="0"/>
           </a:p>
         </p:txBody>
       </p:sp>
@@ -27202,7 +28041,7 @@
             <a:pPr algn="ctr"/>
             <a:fld id="{F7021451-1387-4CA6-816F-3879F97B5CBC}" type="slidenum">
               <a:rPr b="1" lang="en-US"/>
-              <a:t>7</a:t>
+              <a:t>72</a:t>
             </a:fld>
             <a:endParaRPr lang="en-US"/>
           </a:p>
@@ -27216,9 +28055,9 @@
 </p:sld>
 </file>
 
-<file path=ppt/slides/slide70.xml><?xml version="1.0" encoding="utf-8"?>
+<file path=ppt/slides/slide73.xml><?xml version="1.0" encoding="utf-8"?>
 <p:sld xmlns:a="http://schemas.openxmlformats.org/drawingml/2006/main" xmlns:r="http://schemas.openxmlformats.org/officeDocument/2006/relationships" xmlns:p="http://schemas.openxmlformats.org/presentationml/2006/main">
-  <p:cSld name="Slide 70">
+  <p:cSld name="Slide 73">
     <p:spTree>
       <p:nvGrpSpPr>
         <p:cNvPr id="1" name=""/>
@@ -27266,7 +28105,7 @@
                 <a:ea typeface="Calibri" pitchFamily="34" charset="-122"/>
                 <a:cs typeface="Calibri" pitchFamily="34" charset="-120"/>
               </a:rPr>
-              <a:t>TEACHER'S NOTE</a:t>
+              <a:t>REFERENCES</a:t>
             </a:r>
             <a:endParaRPr lang="en-US" sz="1400" dirty="0"/>
           </a:p>
@@ -27289,7 +28128,7 @@
         <p:spPr>
           <a:xfrm>
             <a:off x="0" y="658368"/>
-            <a:ext cx="3840480" cy="5833872"/>
+            <a:ext cx="5120640" cy="5833872"/>
           </a:xfrm>
           <a:prstGeom prst="rect">
             <a:avLst/>
@@ -27304,8 +28143,8 @@
         </p:nvSpPr>
         <p:spPr>
           <a:xfrm>
-            <a:off x="4069080" y="1005840"/>
-            <a:ext cx="7802575" cy="731520"/>
+            <a:off x="5349240" y="1005840"/>
+            <a:ext cx="6522415" cy="731520"/>
           </a:xfrm>
           <a:prstGeom prst="rect">
             <a:avLst/>
@@ -27331,7 +28170,7 @@
                 <a:ea typeface="Times New Roman" pitchFamily="34" charset="-122"/>
                 <a:cs typeface="Times New Roman" pitchFamily="34" charset="-120"/>
               </a:rPr>
-              <a:t>Teacher's Note</a:t>
+              <a:t>References</a:t>
             </a:r>
             <a:endParaRPr lang="en-US" sz="3600" dirty="0"/>
           </a:p>
@@ -27345,8 +28184,8 @@
         </p:nvSpPr>
         <p:spPr>
           <a:xfrm>
-            <a:off x="4069080" y="1783080"/>
-            <a:ext cx="7802575" cy="4663440"/>
+            <a:off x="5349240" y="1783080"/>
+            <a:ext cx="6522415" cy="4663440"/>
           </a:xfrm>
           <a:prstGeom prst="rect">
             <a:avLst/>
@@ -27366,7 +28205,7 @@
               <a:buChar char="•"/>
             </a:pPr>
             <a:r>
-              <a:rPr lang="en-US" sz="2000" dirty="0">
+              <a:rPr lang="en-US" sz="1800" dirty="0">
                 <a:solidFill>
                   <a:srgbClr val="111111"/>
                 </a:solidFill>
@@ -27374,9 +28213,9 @@
                 <a:ea typeface="Calibri" pitchFamily="34" charset="-122"/>
                 <a:cs typeface="Calibri" pitchFamily="34" charset="-120"/>
               </a:rPr>
-              <a:t>Timing: Homework correction, plan, objectives 8 min | Recall, situation, action 10 min | 5 activities 30 min | Board summary (copying) 30 min | Evaluation, remediation 10 min | Homework, next lesson 5 min | Logbook 7 min</a:t>
-            </a:r>
-            <a:endParaRPr lang="en-US" sz="2000" dirty="0"/>
+              <a:t>Geography Syllabus for Sixth Forms (Lower and Upper Sixth), MINESEC, 2019 — Module 8 (Practical Geography).</a:t>
+            </a:r>
+            <a:endParaRPr lang="en-US" sz="1800" dirty="0"/>
           </a:p>
           <a:p>
             <a:pPr algn="l" marL="342900" indent="-342900">
@@ -27387,7 +28226,7 @@
               <a:buChar char="•"/>
             </a:pPr>
             <a:r>
-              <a:rPr lang="en-US" sz="2000" dirty="0">
+              <a:rPr lang="en-US" sz="1800" dirty="0">
                 <a:solidFill>
                   <a:srgbClr val="111111"/>
                 </a:solidFill>
@@ -27395,9 +28234,9 @@
                 <a:ea typeface="Calibri" pitchFamily="34" charset="-122"/>
                 <a:cs typeface="Calibri" pitchFamily="34" charset="-120"/>
               </a:rPr>
-              <a:t>Without the projector (Activity 1): draw the bars on squared paper.</a:t>
-            </a:r>
-            <a:endParaRPr lang="en-US" sz="2000" dirty="0"/>
+              <a:t>Teacher's course notes: Mr KAMDEM E., Statistical Techniques in Geographical Analysis (USA), GBHS Garoua, 2026.</a:t>
+            </a:r>
+            <a:endParaRPr lang="en-US" sz="1800" dirty="0"/>
           </a:p>
           <a:p>
             <a:pPr algn="l" marL="342900" indent="-342900">
@@ -27408,7 +28247,7 @@
               <a:buChar char="•"/>
             </a:pPr>
             <a:r>
-              <a:rPr lang="en-US" sz="2000" dirty="0">
+              <a:rPr lang="en-US" sz="1800" dirty="0">
                 <a:solidFill>
                   <a:srgbClr val="111111"/>
                 </a:solidFill>
@@ -27416,72 +28255,9 @@
                 <a:ea typeface="Calibri" pitchFamily="34" charset="-122"/>
                 <a:cs typeface="Calibri" pitchFamily="34" charset="-120"/>
               </a:rPr>
-              <a:t>Without the projector (Activity 2): plot the four points.</a:t>
-            </a:r>
-            <a:endParaRPr lang="en-US" sz="2000" dirty="0"/>
-          </a:p>
-          <a:p>
-            <a:pPr algn="l" marL="342900" indent="-342900">
-              <a:spcAft>
-                <a:spcPts val="800"/>
-              </a:spcAft>
-              <a:buSzPct val="100000"/>
-              <a:buChar char="•"/>
-            </a:pPr>
-            <a:r>
-              <a:rPr lang="en-US" sz="2000" dirty="0">
-                <a:solidFill>
-                  <a:srgbClr val="111111"/>
-                </a:solidFill>
-                <a:latin typeface="Calibri" pitchFamily="34" charset="0"/>
-                <a:ea typeface="Calibri" pitchFamily="34" charset="-122"/>
-                <a:cs typeface="Calibri" pitchFamily="34" charset="-120"/>
-              </a:rPr>
-              <a:t>Without the projector (Activity 3): calculate the cumulative frequencies.</a:t>
-            </a:r>
-            <a:endParaRPr lang="en-US" sz="2000" dirty="0"/>
-          </a:p>
-          <a:p>
-            <a:pPr algn="l" marL="342900" indent="-342900">
-              <a:spcAft>
-                <a:spcPts val="800"/>
-              </a:spcAft>
-              <a:buSzPct val="100000"/>
-              <a:buChar char="•"/>
-            </a:pPr>
-            <a:r>
-              <a:rPr lang="en-US" sz="2000" dirty="0">
-                <a:solidFill>
-                  <a:srgbClr val="111111"/>
-                </a:solidFill>
-                <a:latin typeface="Calibri" pitchFamily="34" charset="0"/>
-                <a:ea typeface="Calibri" pitchFamily="34" charset="-122"/>
-                <a:cs typeface="Calibri" pitchFamily="34" charset="-120"/>
-              </a:rPr>
-              <a:t>Without the projector (Activity 4): draw the pie with a protractor.</a:t>
-            </a:r>
-            <a:endParaRPr lang="en-US" sz="2000" dirty="0"/>
-          </a:p>
-          <a:p>
-            <a:pPr algn="l" marL="342900" indent="-342900">
-              <a:spcAft>
-                <a:spcPts val="800"/>
-              </a:spcAft>
-              <a:buSzPct val="100000"/>
-              <a:buChar char="•"/>
-            </a:pPr>
-            <a:r>
-              <a:rPr lang="en-US" sz="2000" dirty="0">
-                <a:solidFill>
-                  <a:srgbClr val="111111"/>
-                </a:solidFill>
-                <a:latin typeface="Calibri" pitchFamily="34" charset="0"/>
-                <a:ea typeface="Calibri" pitchFamily="34" charset="-122"/>
-                <a:cs typeface="Calibri" pitchFamily="34" charset="-120"/>
-              </a:rPr>
-              <a:t>Without the projector (Activity 5): draw the line of best fit by eye.</a:t>
-            </a:r>
-            <a:endParaRPr lang="en-US" sz="2000" dirty="0"/>
+              <a:t>Diagrams and animations: drawn for this lesson (Geography Department).</a:t>
+            </a:r>
+            <a:endParaRPr lang="en-US" sz="1800" dirty="0"/>
           </a:p>
         </p:txBody>
       </p:sp>
@@ -27527,269 +28303,7 @@
             <a:pPr algn="ctr"/>
             <a:fld id="{F7021451-1387-4CA6-816F-3879F97B5CBC}" type="slidenum">
               <a:rPr b="1" lang="en-US"/>
-              <a:t>70</a:t>
-            </a:fld>
-            <a:endParaRPr lang="en-US"/>
-          </a:p>
-        </p:txBody>
-      </p:sp>
-    </p:spTree>
-  </p:cSld>
-  <p:clrMapOvr>
-    <a:masterClrMapping/>
-  </p:clrMapOvr>
-</p:sld>
-</file>
-
-<file path=ppt/slides/slide71.xml><?xml version="1.0" encoding="utf-8"?>
-<p:sld xmlns:a="http://schemas.openxmlformats.org/drawingml/2006/main" xmlns:r="http://schemas.openxmlformats.org/officeDocument/2006/relationships" xmlns:p="http://schemas.openxmlformats.org/presentationml/2006/main">
-  <p:cSld name="Slide 71">
-    <p:spTree>
-      <p:nvGrpSpPr>
-        <p:cNvPr id="1" name=""/>
-        <p:cNvGrpSpPr/>
-        <p:nvPr/>
-      </p:nvGrpSpPr>
-      <p:grpSpPr>
-        <a:xfrm>
-          <a:off x="0" y="0"/>
-          <a:ext cx="0" cy="0"/>
-          <a:chOff x="0" y="0"/>
-          <a:chExt cx="0" cy="0"/>
-        </a:xfrm>
-      </p:grpSpPr>
-      <p:sp>
-        <p:nvSpPr>
-          <p:cNvPr id="2" name="Text 0"/>
-          <p:cNvSpPr/>
-          <p:nvPr/>
-        </p:nvSpPr>
-        <p:spPr>
-          <a:xfrm>
-            <a:off x="457200" y="713232"/>
-            <a:ext cx="11368735" cy="274320"/>
-          </a:xfrm>
-          <a:prstGeom prst="rect">
-            <a:avLst/>
-          </a:prstGeom>
-          <a:noFill/>
-          <a:ln/>
-        </p:spPr>
-        <p:txBody>
-          <a:bodyPr wrap="square" lIns="0" tIns="0" rIns="0" bIns="0" rtlCol="0" anchor="ctr"/>
-          <a:lstStyle/>
-          <a:p>
-            <a:pPr algn="r" indent="0" marL="0">
-              <a:buNone/>
-            </a:pPr>
-            <a:r>
-              <a:rPr lang="en-US" sz="1400" b="1" dirty="0">
-                <a:solidFill>
-                  <a:srgbClr val="1C3F6E"/>
-                </a:solidFill>
-                <a:latin typeface="Calibri" pitchFamily="34" charset="0"/>
-                <a:ea typeface="Calibri" pitchFamily="34" charset="-122"/>
-                <a:cs typeface="Calibri" pitchFamily="34" charset="-120"/>
-              </a:rPr>
-              <a:t>REFERENCES</a:t>
-            </a:r>
-            <a:endParaRPr lang="en-US" sz="1400" dirty="0"/>
-          </a:p>
-        </p:txBody>
-      </p:sp>
-      <p:pic>
-        <p:nvPicPr>
-          <p:cNvPr id="3" name="Image 0" descr="/home/claude/f4/img/minesec_sheet.png">    </p:cNvPr>
-          <p:cNvPicPr>
-            <a:picLocks noChangeAspect="1"/>
-          </p:cNvPicPr>
-          <p:nvPr/>
-        </p:nvPicPr>
-        <p:blipFill>
-          <a:blip r:embed="rId1"/>
-          <a:stretch>
-            <a:fillRect/>
-          </a:stretch>
-        </p:blipFill>
-        <p:spPr>
-          <a:xfrm>
-            <a:off x="0" y="658368"/>
-            <a:ext cx="5120640" cy="5833872"/>
-          </a:xfrm>
-          <a:prstGeom prst="rect">
-            <a:avLst/>
-          </a:prstGeom>
-        </p:spPr>
-      </p:pic>
-      <p:sp>
-        <p:nvSpPr>
-          <p:cNvPr id="4" name="Text 1"/>
-          <p:cNvSpPr/>
-          <p:nvPr/>
-        </p:nvSpPr>
-        <p:spPr>
-          <a:xfrm>
-            <a:off x="5349240" y="1005840"/>
-            <a:ext cx="6522415" cy="731520"/>
-          </a:xfrm>
-          <a:prstGeom prst="rect">
-            <a:avLst/>
-          </a:prstGeom>
-          <a:noFill/>
-          <a:ln/>
-        </p:spPr>
-        <p:txBody>
-          <a:bodyPr wrap="square" lIns="0" tIns="0" rIns="0" bIns="0" rtlCol="0" anchor="ctr">
-            <a:normAutofit/>
-          </a:bodyPr>
-          <a:lstStyle/>
-          <a:p>
-            <a:pPr algn="ctr" indent="0" marL="0">
-              <a:buNone/>
-            </a:pPr>
-            <a:r>
-              <a:rPr lang="en-US" sz="3600" b="1" dirty="0">
-                <a:solidFill>
-                  <a:srgbClr val="990011"/>
-                </a:solidFill>
-                <a:latin typeface="Times New Roman" pitchFamily="34" charset="0"/>
-                <a:ea typeface="Times New Roman" pitchFamily="34" charset="-122"/>
-                <a:cs typeface="Times New Roman" pitchFamily="34" charset="-120"/>
-              </a:rPr>
-              <a:t>References</a:t>
-            </a:r>
-            <a:endParaRPr lang="en-US" sz="3600" dirty="0"/>
-          </a:p>
-        </p:txBody>
-      </p:sp>
-      <p:sp>
-        <p:nvSpPr>
-          <p:cNvPr id="5" name="Text 2"/>
-          <p:cNvSpPr/>
-          <p:nvPr/>
-        </p:nvSpPr>
-        <p:spPr>
-          <a:xfrm>
-            <a:off x="5349240" y="1783080"/>
-            <a:ext cx="6522415" cy="4663440"/>
-          </a:xfrm>
-          <a:prstGeom prst="rect">
-            <a:avLst/>
-          </a:prstGeom>
-          <a:noFill/>
-          <a:ln/>
-        </p:spPr>
-        <p:txBody>
-          <a:bodyPr wrap="square" lIns="0" tIns="0" rIns="0" bIns="0" rtlCol="0" anchor="t"/>
-          <a:lstStyle/>
-          <a:p>
-            <a:pPr algn="l" marL="342900" indent="-342900">
-              <a:spcAft>
-                <a:spcPts val="800"/>
-              </a:spcAft>
-              <a:buSzPct val="100000"/>
-              <a:buChar char="•"/>
-            </a:pPr>
-            <a:r>
-              <a:rPr lang="en-US" sz="1800" dirty="0">
-                <a:solidFill>
-                  <a:srgbClr val="111111"/>
-                </a:solidFill>
-                <a:latin typeface="Calibri" pitchFamily="34" charset="0"/>
-                <a:ea typeface="Calibri" pitchFamily="34" charset="-122"/>
-                <a:cs typeface="Calibri" pitchFamily="34" charset="-120"/>
-              </a:rPr>
-              <a:t>Geography Syllabus for Sixth Forms (Lower and Upper Sixth), MINESEC, 2019 — Module 8 (Practical Geography).</a:t>
-            </a:r>
-            <a:endParaRPr lang="en-US" sz="1800" dirty="0"/>
-          </a:p>
-          <a:p>
-            <a:pPr algn="l" marL="342900" indent="-342900">
-              <a:spcAft>
-                <a:spcPts val="800"/>
-              </a:spcAft>
-              <a:buSzPct val="100000"/>
-              <a:buChar char="•"/>
-            </a:pPr>
-            <a:r>
-              <a:rPr lang="en-US" sz="1800" dirty="0">
-                <a:solidFill>
-                  <a:srgbClr val="111111"/>
-                </a:solidFill>
-                <a:latin typeface="Calibri" pitchFamily="34" charset="0"/>
-                <a:ea typeface="Calibri" pitchFamily="34" charset="-122"/>
-                <a:cs typeface="Calibri" pitchFamily="34" charset="-120"/>
-              </a:rPr>
-              <a:t>Teacher's course notes: Mr KAMDEM E., Statistical Techniques in Geographical Analysis (USA), GBHS Garoua, 2026.</a:t>
-            </a:r>
-            <a:endParaRPr lang="en-US" sz="1800" dirty="0"/>
-          </a:p>
-          <a:p>
-            <a:pPr algn="l" marL="342900" indent="-342900">
-              <a:spcAft>
-                <a:spcPts val="800"/>
-              </a:spcAft>
-              <a:buSzPct val="100000"/>
-              <a:buChar char="•"/>
-            </a:pPr>
-            <a:r>
-              <a:rPr lang="en-US" sz="1800" dirty="0">
-                <a:solidFill>
-                  <a:srgbClr val="111111"/>
-                </a:solidFill>
-                <a:latin typeface="Calibri" pitchFamily="34" charset="0"/>
-                <a:ea typeface="Calibri" pitchFamily="34" charset="-122"/>
-                <a:cs typeface="Calibri" pitchFamily="34" charset="-120"/>
-              </a:rPr>
-              <a:t>Diagrams and animations: drawn for this lesson (Geography Department).</a:t>
-            </a:r>
-            <a:endParaRPr lang="en-US" sz="1800" dirty="0"/>
-          </a:p>
-        </p:txBody>
-      </p:sp>
-      <p:sp>
-        <p:nvSpPr>
-          <p:cNvPr id="25" name="Slide Number Placeholder 0"/>
-          <p:cNvSpPr>
-            <a:spLocks noGrp="1"/>
-          </p:cNvSpPr>
-          <p:nvPr>
-            <p:ph type="sldNum" sz="quarter" idx="4294967295"/>
-          </p:nvPr>
-        </p:nvSpPr>
-        <p:spPr>
-          <a:xfrm>
-            <a:off x="27432" y="91440"/>
-            <a:ext cx="585216" cy="475488"/>
-          </a:xfrm>
-          <a:prstGeom prst="rect">
-            <a:avLst/>
-          </a:prstGeom>
-          <a:extLst>
-            <a:ext uri="{C572A759-6A51-4108-AA02-DFA0A04FC94B}">
-              <ma14:wrappingTextBoxFlag xmlns:ma14="http://schemas.microsoft.com/office/mac/drawingml/2011/main" val="0"/>
-            </a:ext>
-          </a:extLst>
-        </p:spPr>
-        <p:txBody>
-          <a:bodyPr/>
-          <a:lstStyle>
-            <a:lvl1pPr>
-              <a:defRPr sz="2000">
-                <a:solidFill>
-                  <a:srgbClr val="FFFFFF"/>
-                </a:solidFill>
-                <a:latin typeface="Calibri"/>
-                <a:ea typeface="Calibri"/>
-                <a:cs typeface="Calibri"/>
-              </a:defRPr>
-            </a:lvl1pPr>
-          </a:lstStyle>
-          <a:p>
-            <a:pPr algn="ctr"/>
-            <a:fld id="{F7021451-1387-4CA6-816F-3879F97B5CBC}" type="slidenum">
-              <a:rPr b="1" lang="en-US"/>
-              <a:t>71</a:t>
+              <a:t>73</a:t>
             </a:fld>
             <a:endParaRPr lang="en-US"/>
           </a:p>
